--- a/presentation/Watson_Healthcare_Attrition_Presentation.pptx
+++ b/presentation/Watson_Healthcare_Attrition_Presentation.pptx
@@ -4,6 +4,9 @@
   <p:sldMasterIdLst>
     <p:sldMasterId id="2147483648" r:id="rId1"/>
   </p:sldMasterIdLst>
+  <p:notesMasterIdLst>
+    <p:notesMasterId r:id="rId12"/>
+  </p:notesMasterIdLst>
   <p:sldIdLst>
     <p:sldId id="256" r:id="rId2"/>
     <p:sldId id="257" r:id="rId3"/>
@@ -16,10 +19,7 @@
     <p:sldId id="264" r:id="rId10"/>
     <p:sldId id="265" r:id="rId11"/>
   </p:sldIdLst>
-  <p:notesMasterIdLst>
-    <p:notesMasterId r:id="rId12"/>
-  </p:notesMasterIdLst>
-  <p:sldSz cx="9144000" cy="5143500"/>
+  <p:sldSz cx="9144000" cy="5143500" type="screen16x9"/>
   <p:notesSz cx="5143500" cy="9144000"/>
   <p:defaultTextStyle>
     <a:lvl1pPr marL="0" algn="l" defTabSz="914400" rtl="0" eaLnBrk="1" latinLnBrk="0" hangingPunct="1">
@@ -113,13 +113,20 @@
       </a:defRPr>
     </a:lvl9pPr>
   </p:defaultTextStyle>
+  <p:extLst>
+    <p:ext uri="{EFAFB233-063F-42B5-8137-9DF3F51BA10A}">
+      <p15:sldGuideLst xmlns:p15="http://schemas.microsoft.com/office/powerpoint/2012/main"/>
+    </p:ext>
+  </p:extLst>
 </p:presentation>
 </file>
 
 <file path=ppt/charts/chart1.xml><?xml version="1.0" encoding="utf-8"?>
-<c:chartSpace xmlns:c="http://schemas.openxmlformats.org/drawingml/2006/chart" xmlns:a="http://schemas.openxmlformats.org/drawingml/2006/main" xmlns:r="http://schemas.openxmlformats.org/officeDocument/2006/relationships">
+<c:chartSpace xmlns:c="http://schemas.openxmlformats.org/drawingml/2006/chart" xmlns:a="http://schemas.openxmlformats.org/drawingml/2006/main" xmlns:r="http://schemas.openxmlformats.org/officeDocument/2006/relationships" xmlns:c16r2="http://schemas.microsoft.com/office/drawing/2015/06/chart">
   <c:date1904 val="0"/>
+  <c:lang val="en-US"/>
   <c:roundedCorners val="1"/>
+  <c:style val="2"/>
   <c:chart>
     <c:autoTitleDeleted val="1"/>
     <c:plotArea>
@@ -149,20 +156,60 @@
             <a:effectLst/>
           </c:spPr>
           <c:invertIfNegative val="0"/>
+          <c:dPt>
+            <c:idx val="0"/>
+            <c:invertIfNegative val="0"/>
+            <c:bubble3D val="0"/>
+            <c:spPr>
+              <a:solidFill>
+                <a:schemeClr val="accent1"/>
+              </a:solidFill>
+              <a:effectLst/>
+            </c:spPr>
+            <c:extLst>
+              <c:ext xmlns:c16="http://schemas.microsoft.com/office/drawing/2014/chart" uri="{C3380CC4-5D6E-409C-BE32-E72D297353CC}">
+                <c16:uniqueId val="{00000001-9210-FF4F-AB66-D82842C4D35B}"/>
+              </c:ext>
+            </c:extLst>
+          </c:dPt>
+          <c:dPt>
+            <c:idx val="1"/>
+            <c:invertIfNegative val="0"/>
+            <c:bubble3D val="0"/>
+            <c:spPr>
+              <a:solidFill>
+                <a:srgbClr val="C00000"/>
+              </a:solidFill>
+              <a:effectLst/>
+            </c:spPr>
+            <c:extLst>
+              <c:ext xmlns:c16="http://schemas.microsoft.com/office/drawing/2014/chart" uri="{C3380CC4-5D6E-409C-BE32-E72D297353CC}">
+                <c16:uniqueId val="{00000002-9210-FF4F-AB66-D82842C4D35B}"/>
+              </c:ext>
+            </c:extLst>
+          </c:dPt>
           <c:dLbls>
             <c:numFmt formatCode="#,##0" sourceLinked="0"/>
+            <c:spPr>
+              <a:noFill/>
+              <a:ln>
+                <a:noFill/>
+              </a:ln>
+              <a:effectLst/>
+            </c:spPr>
             <c:txPr>
               <a:bodyPr/>
               <a:lstStyle/>
               <a:p>
                 <a:pPr>
-                  <a:defRPr b="0" i="0" strike="noStrike" sz="1400" u="none">
+                  <a:defRPr sz="1400" b="0" i="0" u="none" strike="noStrike">
                     <a:solidFill>
                       <a:srgbClr val="2C2C2C"/>
                     </a:solidFill>
                     <a:latin typeface="Arial"/>
                   </a:defRPr>
                 </a:pPr>
+                <a:endParaRPr lang="en-US"/>
               </a:p>
             </c:txPr>
             <c:showLegendKey val="0"/>
@@ -172,22 +219,25 @@
             <c:showPercent val="0"/>
             <c:showBubbleSize val="0"/>
             <c:showLeaderLines val="0"/>
+            <c:extLst>
+              <c:ext xmlns:c15="http://schemas.microsoft.com/office/drawing/2012/chart" uri="{CE6537A1-D6FC-4f65-9D91-7224C49458BB}">
+                <c15:showLeaderLines val="0"/>
+              </c:ext>
+            </c:extLst>
           </c:dLbls>
           <c:cat>
-            <c:multiLvlStrRef>
+            <c:strRef>
               <c:f>Sheet1!$A$2:$A$3</c:f>
-              <c:multiLvlStrCache>
+              <c:strCache>
                 <c:ptCount val="2"/>
-                <c:lvl>
-                  <c:pt idx="0">
-                    <c:v>No overtime</c:v>
-                  </c:pt>
-                  <c:pt idx="1">
-                    <c:v>Works overtime</c:v>
-                  </c:pt>
-                </c:lvl>
-              </c:multiLvlStrCache>
-            </c:multiLvlStrRef>
+                <c:pt idx="0">
+                  <c:v>No overtime</c:v>
+                </c:pt>
+                <c:pt idx="1">
+                  <c:v>Works overtime</c:v>
+                </c:pt>
+              </c:strCache>
+            </c:strRef>
           </c:cat>
           <c:val>
             <c:numRef>
@@ -204,36 +254,23 @@
               </c:numCache>
             </c:numRef>
           </c:val>
+          <c:extLst>
+            <c:ext xmlns:c16="http://schemas.microsoft.com/office/drawing/2014/chart" uri="{C3380CC4-5D6E-409C-BE32-E72D297353CC}">
+              <c16:uniqueId val="{00000000-9210-FF4F-AB66-D82842C4D35B}"/>
+            </c:ext>
+          </c:extLst>
         </c:ser>
         <c:dLbls>
-          <c:numFmt formatCode="#,##0" sourceLinked="0"/>
-          <c:txPr>
-            <a:bodyPr/>
-            <a:lstStyle/>
-            <a:p>
-              <a:pPr>
-                <a:defRPr b="0" i="0" strike="noStrike" sz="1400" u="none">
-                  <a:solidFill>
-                    <a:srgbClr val="2C2C2C"/>
-                  </a:solidFill>
-                  <a:latin typeface="Arial"/>
-                </a:defRPr>
-              </a:pPr>
-            </a:p>
-          </c:txPr>
           <c:showLegendKey val="0"/>
           <c:showVal val="1"/>
           <c:showCatName val="0"/>
           <c:showSerName val="0"/>
           <c:showPercent val="0"/>
           <c:showBubbleSize val="0"/>
-          <c:showLeaderLines val="0"/>
         </c:dLbls>
         <c:gapWidth val="150"/>
-        <c:overlap val="0"/>
         <c:axId val="2094734554"/>
         <c:axId val="2094734552"/>
-        <c:axId val="2094734556"/>
       </c:barChart>
       <c:catAx>
         <c:axId val="2094734554"/>
@@ -274,6 +311,7 @@
         <c:crosses val="autoZero"/>
         <c:auto val="1"/>
         <c:lblAlgn val="ctr"/>
+        <c:lblOffset val="100"/>
         <c:noMultiLvlLbl val="1"/>
       </c:catAx>
       <c:valAx>
@@ -337,6 +375,7 @@
     </c:plotArea>
     <c:plotVisOnly val="1"/>
     <c:dispBlanksAs val="span"/>
+    <c:showDLblsOverMax val="1"/>
   </c:chart>
   <c:spPr>
     <a:solidFill>
@@ -354,9 +393,11 @@
 </file>
 
 <file path=ppt/charts/chart2.xml><?xml version="1.0" encoding="utf-8"?>
-<c:chartSpace xmlns:c="http://schemas.openxmlformats.org/drawingml/2006/chart" xmlns:a="http://schemas.openxmlformats.org/drawingml/2006/main" xmlns:r="http://schemas.openxmlformats.org/officeDocument/2006/relationships">
+<c:chartSpace xmlns:c="http://schemas.openxmlformats.org/drawingml/2006/chart" xmlns:a="http://schemas.openxmlformats.org/drawingml/2006/main" xmlns:r="http://schemas.openxmlformats.org/officeDocument/2006/relationships" xmlns:c16r2="http://schemas.microsoft.com/office/drawing/2015/06/chart">
   <c:date1904 val="0"/>
+  <c:lang val="en-US"/>
   <c:roundedCorners val="1"/>
+  <c:style val="2"/>
   <c:chart>
     <c:autoTitleDeleted val="1"/>
     <c:plotArea>
@@ -381,25 +422,97 @@
           </c:tx>
           <c:spPr>
             <a:solidFill>
-              <a:srgbClr val="E76F51"/>
+              <a:srgbClr val="C00000"/>
             </a:solidFill>
             <a:effectLst/>
           </c:spPr>
           <c:invertIfNegative val="0"/>
+          <c:dPt>
+            <c:idx val="0"/>
+            <c:invertIfNegative val="0"/>
+            <c:bubble3D val="0"/>
+            <c:spPr>
+              <a:solidFill>
+                <a:srgbClr val="C00000"/>
+              </a:solidFill>
+              <a:effectLst/>
+            </c:spPr>
+            <c:extLst>
+              <c:ext xmlns:c16="http://schemas.microsoft.com/office/drawing/2014/chart" uri="{C3380CC4-5D6E-409C-BE32-E72D297353CC}">
+                <c16:uniqueId val="{00000001-1675-414B-9DFA-02A3D18C3156}"/>
+              </c:ext>
+            </c:extLst>
+          </c:dPt>
+          <c:dPt>
+            <c:idx val="1"/>
+            <c:invertIfNegative val="0"/>
+            <c:bubble3D val="0"/>
+            <c:spPr>
+              <a:solidFill>
+                <a:schemeClr val="accent1"/>
+              </a:solidFill>
+              <a:effectLst/>
+            </c:spPr>
+            <c:extLst>
+              <c:ext xmlns:c16="http://schemas.microsoft.com/office/drawing/2014/chart" uri="{C3380CC4-5D6E-409C-BE32-E72D297353CC}">
+                <c16:uniqueId val="{00000003-1675-414B-9DFA-02A3D18C3156}"/>
+              </c:ext>
+            </c:extLst>
+          </c:dPt>
+          <c:dPt>
+            <c:idx val="2"/>
+            <c:invertIfNegative val="0"/>
+            <c:bubble3D val="0"/>
+            <c:spPr>
+              <a:solidFill>
+                <a:schemeClr val="accent1"/>
+              </a:solidFill>
+              <a:effectLst/>
+            </c:spPr>
+            <c:extLst>
+              <c:ext xmlns:c16="http://schemas.microsoft.com/office/drawing/2014/chart" uri="{C3380CC4-5D6E-409C-BE32-E72D297353CC}">
+                <c16:uniqueId val="{00000005-1675-414B-9DFA-02A3D18C3156}"/>
+              </c:ext>
+            </c:extLst>
+          </c:dPt>
+          <c:dPt>
+            <c:idx val="3"/>
+            <c:invertIfNegative val="0"/>
+            <c:bubble3D val="0"/>
+            <c:spPr>
+              <a:solidFill>
+                <a:schemeClr val="accent1"/>
+              </a:solidFill>
+              <a:effectLst/>
+            </c:spPr>
+            <c:extLst>
+              <c:ext xmlns:c16="http://schemas.microsoft.com/office/drawing/2014/chart" uri="{C3380CC4-5D6E-409C-BE32-E72D297353CC}">
+                <c16:uniqueId val="{00000007-1675-414B-9DFA-02A3D18C3156}"/>
+              </c:ext>
+            </c:extLst>
+          </c:dPt>
           <c:dLbls>
             <c:numFmt formatCode="#,##0" sourceLinked="0"/>
+            <c:spPr>
+              <a:noFill/>
+              <a:ln>
+                <a:noFill/>
+              </a:ln>
+              <a:effectLst/>
+            </c:spPr>
             <c:txPr>
               <a:bodyPr/>
               <a:lstStyle/>
               <a:p>
                 <a:pPr>
-                  <a:defRPr b="0" i="0" strike="noStrike" sz="1200" u="none">
+                  <a:defRPr sz="1200" b="0" i="0" u="none" strike="noStrike">
                     <a:solidFill>
                       <a:srgbClr val="2C2C2C"/>
                     </a:solidFill>
                     <a:latin typeface="Arial"/>
                   </a:defRPr>
                 </a:pPr>
+                <a:endParaRPr lang="en-US"/>
               </a:p>
             </c:txPr>
             <c:showLegendKey val="0"/>
@@ -409,72 +522,31 @@
             <c:showPercent val="0"/>
             <c:showBubbleSize val="0"/>
             <c:showLeaderLines val="0"/>
+            <c:extLst>
+              <c:ext xmlns:c15="http://schemas.microsoft.com/office/drawing/2012/chart" uri="{CE6537A1-D6FC-4f65-9D91-7224C49458BB}">
+                <c15:showLeaderLines val="0"/>
+              </c:ext>
+            </c:extLst>
           </c:dLbls>
-          <c:dPt>
-            <c:idx val="0"/>
-            <c:invertIfNegative val="0"/>
-            <c:bubble3D val="0"/>
-            <c:spPr>
-              <a:solidFill>
-                <a:srgbClr val="E76F51"/>
-              </a:solidFill>
-              <a:effectLst/>
-            </c:spPr>
-          </c:dPt>
-          <c:dPt>
-            <c:idx val="1"/>
-            <c:invertIfNegative val="0"/>
-            <c:bubble3D val="0"/>
-            <c:spPr>
-              <a:solidFill>
-                <a:srgbClr val="E9C46A"/>
-              </a:solidFill>
-              <a:effectLst/>
-            </c:spPr>
-          </c:dPt>
-          <c:dPt>
-            <c:idx val="2"/>
-            <c:invertIfNegative val="0"/>
-            <c:bubble3D val="0"/>
-            <c:spPr>
-              <a:solidFill>
-                <a:srgbClr val="2A9D8F"/>
-              </a:solidFill>
-              <a:effectLst/>
-            </c:spPr>
-          </c:dPt>
-          <c:dPt>
-            <c:idx val="3"/>
-            <c:invertIfNegative val="0"/>
-            <c:bubble3D val="0"/>
-            <c:spPr>
-              <a:solidFill>
-                <a:srgbClr val="2A9D8F"/>
-              </a:solidFill>
-              <a:effectLst/>
-            </c:spPr>
-          </c:dPt>
           <c:cat>
-            <c:multiLvlStrRef>
+            <c:strRef>
               <c:f>Sheet1!$A$2:$A$5</c:f>
-              <c:multiLvlStrCache>
+              <c:strCache>
                 <c:ptCount val="4"/>
-                <c:lvl>
-                  <c:pt idx="0">
-                    <c:v>Under $3K</c:v>
-                  </c:pt>
-                  <c:pt idx="1">
-                    <c:v>$3K-$6K</c:v>
-                  </c:pt>
-                  <c:pt idx="2">
-                    <c:v>$6K-$10K</c:v>
-                  </c:pt>
-                  <c:pt idx="3">
-                    <c:v>$10K+</c:v>
-                  </c:pt>
-                </c:lvl>
-              </c:multiLvlStrCache>
-            </c:multiLvlStrRef>
+                <c:pt idx="0">
+                  <c:v>Under $3K</c:v>
+                </c:pt>
+                <c:pt idx="1">
+                  <c:v>$3K-$6K</c:v>
+                </c:pt>
+                <c:pt idx="2">
+                  <c:v>$6K-$10K</c:v>
+                </c:pt>
+                <c:pt idx="3">
+                  <c:v>$10K+</c:v>
+                </c:pt>
+              </c:strCache>
+            </c:strRef>
           </c:cat>
           <c:val>
             <c:numRef>
@@ -486,7 +558,7 @@
                   <c:v>26.23</c:v>
                 </c:pt>
                 <c:pt idx="1">
-                  <c:v>8.38</c:v>
+                  <c:v>8.3800000000000008</c:v>
                 </c:pt>
                 <c:pt idx="2">
                   <c:v>6.49</c:v>
@@ -497,36 +569,23 @@
               </c:numCache>
             </c:numRef>
           </c:val>
+          <c:extLst>
+            <c:ext xmlns:c16="http://schemas.microsoft.com/office/drawing/2014/chart" uri="{C3380CC4-5D6E-409C-BE32-E72D297353CC}">
+              <c16:uniqueId val="{00000008-1675-414B-9DFA-02A3D18C3156}"/>
+            </c:ext>
+          </c:extLst>
         </c:ser>
         <c:dLbls>
-          <c:numFmt formatCode="#,##0" sourceLinked="0"/>
-          <c:txPr>
-            <a:bodyPr/>
-            <a:lstStyle/>
-            <a:p>
-              <a:pPr>
-                <a:defRPr b="0" i="0" strike="noStrike" sz="1200" u="none">
-                  <a:solidFill>
-                    <a:srgbClr val="2C2C2C"/>
-                  </a:solidFill>
-                  <a:latin typeface="Arial"/>
-                </a:defRPr>
-              </a:pPr>
-            </a:p>
-          </c:txPr>
           <c:showLegendKey val="0"/>
           <c:showVal val="1"/>
           <c:showCatName val="0"/>
           <c:showSerName val="0"/>
           <c:showPercent val="0"/>
           <c:showBubbleSize val="0"/>
-          <c:showLeaderLines val="0"/>
         </c:dLbls>
         <c:gapWidth val="150"/>
-        <c:overlap val="0"/>
         <c:axId val="2094734554"/>
         <c:axId val="2094734552"/>
-        <c:axId val="2094734556"/>
       </c:barChart>
       <c:catAx>
         <c:axId val="2094734554"/>
@@ -567,6 +626,7 @@
         <c:crosses val="autoZero"/>
         <c:auto val="1"/>
         <c:lblAlgn val="ctr"/>
+        <c:lblOffset val="100"/>
         <c:noMultiLvlLbl val="1"/>
       </c:catAx>
       <c:valAx>
@@ -630,6 +690,7 @@
     </c:plotArea>
     <c:plotVisOnly val="1"/>
     <c:dispBlanksAs val="span"/>
+    <c:showDLblsOverMax val="1"/>
   </c:chart>
   <c:spPr>
     <a:solidFill>
@@ -647,9 +708,11 @@
 </file>
 
 <file path=ppt/charts/chart3.xml><?xml version="1.0" encoding="utf-8"?>
-<c:chartSpace xmlns:c="http://schemas.openxmlformats.org/drawingml/2006/chart" xmlns:a="http://schemas.openxmlformats.org/drawingml/2006/main" xmlns:r="http://schemas.openxmlformats.org/officeDocument/2006/relationships">
+<c:chartSpace xmlns:c="http://schemas.openxmlformats.org/drawingml/2006/chart" xmlns:a="http://schemas.openxmlformats.org/drawingml/2006/main" xmlns:r="http://schemas.openxmlformats.org/officeDocument/2006/relationships" xmlns:c16r2="http://schemas.microsoft.com/office/drawing/2015/06/chart">
   <c:date1904 val="0"/>
+  <c:lang val="en-US"/>
   <c:roundedCorners val="1"/>
+  <c:style val="2"/>
   <c:chart>
     <c:autoTitleDeleted val="1"/>
     <c:plotArea>
@@ -679,40 +742,21 @@
             <a:effectLst/>
           </c:spPr>
           <c:invertIfNegative val="0"/>
-          <c:dLbls>
-            <c:numFmt formatCode="#,##0" sourceLinked="0"/>
-            <c:txPr>
-              <a:bodyPr/>
-              <a:lstStyle/>
-              <a:p>
-                <a:pPr>
-                  <a:defRPr b="0" i="0" strike="noStrike" sz="1200" u="none">
-                    <a:solidFill>
-                      <a:srgbClr val="2C2C2C"/>
-                    </a:solidFill>
-                    <a:latin typeface="Arial"/>
-                  </a:defRPr>
-                </a:pPr>
-              </a:p>
-            </c:txPr>
-            <c:showLegendKey val="0"/>
-            <c:showVal val="1"/>
-            <c:showCatName val="0"/>
-            <c:showSerName val="0"/>
-            <c:showPercent val="0"/>
-            <c:showBubbleSize val="0"/>
-            <c:showLeaderLines val="0"/>
-          </c:dLbls>
           <c:dPt>
             <c:idx val="0"/>
             <c:invertIfNegative val="0"/>
             <c:bubble3D val="0"/>
             <c:spPr>
               <a:solidFill>
-                <a:srgbClr val="E76F51"/>
+                <a:srgbClr val="C00000"/>
               </a:solidFill>
               <a:effectLst/>
             </c:spPr>
+            <c:extLst>
+              <c:ext xmlns:c16="http://schemas.microsoft.com/office/drawing/2014/chart" uri="{C3380CC4-5D6E-409C-BE32-E72D297353CC}">
+                <c16:uniqueId val="{00000001-0CCF-944D-BCC3-9226C0FA17E7}"/>
+              </c:ext>
+            </c:extLst>
           </c:dPt>
           <c:dPt>
             <c:idx val="1"/>
@@ -724,6 +768,11 @@
               </a:solidFill>
               <a:effectLst/>
             </c:spPr>
+            <c:extLst>
+              <c:ext xmlns:c16="http://schemas.microsoft.com/office/drawing/2014/chart" uri="{C3380CC4-5D6E-409C-BE32-E72D297353CC}">
+                <c16:uniqueId val="{00000003-0CCF-944D-BCC3-9226C0FA17E7}"/>
+              </c:ext>
+            </c:extLst>
           </c:dPt>
           <c:dPt>
             <c:idx val="2"/>
@@ -731,10 +780,15 @@
             <c:bubble3D val="0"/>
             <c:spPr>
               <a:solidFill>
-                <a:srgbClr val="2A9D8F"/>
+                <a:schemeClr val="accent1"/>
               </a:solidFill>
               <a:effectLst/>
             </c:spPr>
+            <c:extLst>
+              <c:ext xmlns:c16="http://schemas.microsoft.com/office/drawing/2014/chart" uri="{C3380CC4-5D6E-409C-BE32-E72D297353CC}">
+                <c16:uniqueId val="{00000005-0CCF-944D-BCC3-9226C0FA17E7}"/>
+              </c:ext>
+            </c:extLst>
           </c:dPt>
           <c:dPt>
             <c:idx val="3"/>
@@ -742,32 +796,72 @@
             <c:bubble3D val="0"/>
             <c:spPr>
               <a:solidFill>
-                <a:srgbClr val="2A9D8F"/>
+                <a:schemeClr val="accent1"/>
               </a:solidFill>
               <a:effectLst/>
             </c:spPr>
+            <c:extLst>
+              <c:ext xmlns:c16="http://schemas.microsoft.com/office/drawing/2014/chart" uri="{C3380CC4-5D6E-409C-BE32-E72D297353CC}">
+                <c16:uniqueId val="{00000007-0CCF-944D-BCC3-9226C0FA17E7}"/>
+              </c:ext>
+            </c:extLst>
           </c:dPt>
+          <c:dLbls>
+            <c:numFmt formatCode="#,##0" sourceLinked="0"/>
+            <c:spPr>
+              <a:noFill/>
+              <a:ln>
+                <a:noFill/>
+              </a:ln>
+              <a:effectLst/>
+            </c:spPr>
+            <c:txPr>
+              <a:bodyPr/>
+              <a:lstStyle/>
+              <a:p>
+                <a:pPr>
+                  <a:defRPr sz="1200" b="0" i="0" u="none" strike="noStrike">
+                    <a:solidFill>
+                      <a:srgbClr val="2C2C2C"/>
+                    </a:solidFill>
+                    <a:latin typeface="Arial"/>
+                  </a:defRPr>
+                </a:pPr>
+                <a:endParaRPr lang="en-US"/>
+              </a:p>
+            </c:txPr>
+            <c:showLegendKey val="0"/>
+            <c:showVal val="1"/>
+            <c:showCatName val="0"/>
+            <c:showSerName val="0"/>
+            <c:showPercent val="0"/>
+            <c:showBubbleSize val="0"/>
+            <c:showLeaderLines val="0"/>
+            <c:extLst>
+              <c:ext xmlns:c15="http://schemas.microsoft.com/office/drawing/2012/chart" uri="{CE6537A1-D6FC-4f65-9D91-7224C49458BB}">
+                <c15:showLeaderLines val="0"/>
+              </c:ext>
+            </c:extLst>
+          </c:dLbls>
           <c:cat>
-            <c:multiLvlStrRef>
+            <c:strRef>
               <c:f>Sheet1!$A$2:$A$5</c:f>
-              <c:multiLvlStrCache>
+              <c:strCache>
                 <c:ptCount val="4"/>
-                <c:lvl>
-                  <c:pt idx="0">
-                    <c:v>0-2 years</c:v>
-                  </c:pt>
-                  <c:pt idx="1">
-                    <c:v>3-5 years</c:v>
-                  </c:pt>
-                  <c:pt idx="2">
-                    <c:v>6-10 years</c:v>
-                  </c:pt>
-                  <c:pt idx="3">
-                    <c:v>10+ years</c:v>
-                  </c:pt>
-                </c:lvl>
-              </c:multiLvlStrCache>
-            </c:multiLvlStrRef>
+                <c:pt idx="0">
+                  <c:v>0-2 years</c:v>
+                </c:pt>
+                <c:pt idx="1">
+                  <c:v>3-5 years</c:v>
+                </c:pt>
+                <c:pt idx="2">
+                  <c:v>6-10 years</c:v>
+                </c:pt>
+                <c:pt idx="3">
+                  <c:v>10+ years</c:v>
+                </c:pt>
+              </c:strCache>
+            </c:strRef>
           </c:cat>
           <c:val>
             <c:numRef>
@@ -790,36 +884,23 @@
               </c:numCache>
             </c:numRef>
           </c:val>
+          <c:extLst>
+            <c:ext xmlns:c16="http://schemas.microsoft.com/office/drawing/2014/chart" uri="{C3380CC4-5D6E-409C-BE32-E72D297353CC}">
+              <c16:uniqueId val="{00000008-0CCF-944D-BCC3-9226C0FA17E7}"/>
+            </c:ext>
+          </c:extLst>
         </c:ser>
         <c:dLbls>
-          <c:numFmt formatCode="#,##0" sourceLinked="0"/>
-          <c:txPr>
-            <a:bodyPr/>
-            <a:lstStyle/>
-            <a:p>
-              <a:pPr>
-                <a:defRPr b="0" i="0" strike="noStrike" sz="1200" u="none">
-                  <a:solidFill>
-                    <a:srgbClr val="2C2C2C"/>
-                  </a:solidFill>
-                  <a:latin typeface="Arial"/>
-                </a:defRPr>
-              </a:pPr>
-            </a:p>
-          </c:txPr>
           <c:showLegendKey val="0"/>
           <c:showVal val="1"/>
           <c:showCatName val="0"/>
           <c:showSerName val="0"/>
           <c:showPercent val="0"/>
           <c:showBubbleSize val="0"/>
-          <c:showLeaderLines val="0"/>
         </c:dLbls>
         <c:gapWidth val="150"/>
-        <c:overlap val="0"/>
         <c:axId val="2094734554"/>
         <c:axId val="2094734552"/>
-        <c:axId val="2094734556"/>
       </c:barChart>
       <c:catAx>
         <c:axId val="2094734554"/>
@@ -860,6 +941,7 @@
         <c:crosses val="autoZero"/>
         <c:auto val="1"/>
         <c:lblAlgn val="ctr"/>
+        <c:lblOffset val="100"/>
         <c:noMultiLvlLbl val="1"/>
       </c:catAx>
       <c:valAx>
@@ -923,6 +1005,7 @@
     </c:plotArea>
     <c:plotVisOnly val="1"/>
     <c:dispBlanksAs val="span"/>
+    <c:showDLblsOverMax val="1"/>
   </c:chart>
   <c:spPr>
     <a:solidFill>
@@ -940,9 +1023,11 @@
 </file>
 
 <file path=ppt/charts/chart4.xml><?xml version="1.0" encoding="utf-8"?>
-<c:chartSpace xmlns:c="http://schemas.openxmlformats.org/drawingml/2006/chart" xmlns:a="http://schemas.openxmlformats.org/drawingml/2006/main" xmlns:r="http://schemas.openxmlformats.org/officeDocument/2006/relationships">
+<c:chartSpace xmlns:c="http://schemas.openxmlformats.org/drawingml/2006/chart" xmlns:a="http://schemas.openxmlformats.org/drawingml/2006/main" xmlns:r="http://schemas.openxmlformats.org/officeDocument/2006/relationships" xmlns:c16r2="http://schemas.microsoft.com/office/drawing/2015/06/chart">
   <c:date1904 val="0"/>
+  <c:lang val="en-US"/>
   <c:roundedCorners val="1"/>
+  <c:style val="2"/>
   <c:chart>
     <c:autoTitleDeleted val="1"/>
     <c:plotArea>
@@ -972,20 +1057,92 @@
             <a:effectLst/>
           </c:spPr>
           <c:invertIfNegative val="0"/>
+          <c:dPt>
+            <c:idx val="0"/>
+            <c:invertIfNegative val="0"/>
+            <c:bubble3D val="0"/>
+            <c:spPr>
+              <a:solidFill>
+                <a:srgbClr val="C00000"/>
+              </a:solidFill>
+              <a:effectLst/>
+            </c:spPr>
+            <c:extLst>
+              <c:ext xmlns:c16="http://schemas.microsoft.com/office/drawing/2014/chart" uri="{C3380CC4-5D6E-409C-BE32-E72D297353CC}">
+                <c16:uniqueId val="{00000001-86F3-C644-AB8C-3C959B2EF322}"/>
+              </c:ext>
+            </c:extLst>
+          </c:dPt>
+          <c:dPt>
+            <c:idx val="1"/>
+            <c:invertIfNegative val="0"/>
+            <c:bubble3D val="0"/>
+            <c:spPr>
+              <a:solidFill>
+                <a:schemeClr val="accent4"/>
+              </a:solidFill>
+              <a:effectLst/>
+            </c:spPr>
+            <c:extLst>
+              <c:ext xmlns:c16="http://schemas.microsoft.com/office/drawing/2014/chart" uri="{C3380CC4-5D6E-409C-BE32-E72D297353CC}">
+                <c16:uniqueId val="{00000003-86F3-C644-AB8C-3C959B2EF322}"/>
+              </c:ext>
+            </c:extLst>
+          </c:dPt>
+          <c:dPt>
+            <c:idx val="2"/>
+            <c:invertIfNegative val="0"/>
+            <c:bubble3D val="0"/>
+            <c:spPr>
+              <a:solidFill>
+                <a:schemeClr val="accent1"/>
+              </a:solidFill>
+              <a:effectLst/>
+            </c:spPr>
+            <c:extLst>
+              <c:ext xmlns:c16="http://schemas.microsoft.com/office/drawing/2014/chart" uri="{C3380CC4-5D6E-409C-BE32-E72D297353CC}">
+                <c16:uniqueId val="{00000005-86F3-C644-AB8C-3C959B2EF322}"/>
+              </c:ext>
+            </c:extLst>
+          </c:dPt>
+          <c:dPt>
+            <c:idx val="3"/>
+            <c:invertIfNegative val="0"/>
+            <c:bubble3D val="0"/>
+            <c:spPr>
+              <a:solidFill>
+                <a:schemeClr val="accent4"/>
+              </a:solidFill>
+              <a:effectLst/>
+            </c:spPr>
+            <c:extLst>
+              <c:ext xmlns:c16="http://schemas.microsoft.com/office/drawing/2014/chart" uri="{C3380CC4-5D6E-409C-BE32-E72D297353CC}">
+                <c16:uniqueId val="{00000007-86F3-C644-AB8C-3C959B2EF322}"/>
+              </c:ext>
+            </c:extLst>
+          </c:dPt>
           <c:dLbls>
             <c:numFmt formatCode="#,##0" sourceLinked="0"/>
+            <c:spPr>
+              <a:noFill/>
+              <a:ln>
+                <a:noFill/>
+              </a:ln>
+              <a:effectLst/>
+            </c:spPr>
             <c:txPr>
               <a:bodyPr/>
               <a:lstStyle/>
               <a:p>
                 <a:pPr>
-                  <a:defRPr b="0" i="0" strike="noStrike" sz="1100" u="none">
+                  <a:defRPr sz="1100" b="0" i="0" u="none" strike="noStrike">
                     <a:solidFill>
                       <a:srgbClr val="2C2C2C"/>
                     </a:solidFill>
                     <a:latin typeface="Arial"/>
                   </a:defRPr>
                 </a:pPr>
+                <a:endParaRPr lang="en-US"/>
               </a:p>
             </c:txPr>
             <c:showLegendKey val="0"/>
@@ -995,72 +1152,31 @@
             <c:showPercent val="0"/>
             <c:showBubbleSize val="0"/>
             <c:showLeaderLines val="0"/>
+            <c:extLst>
+              <c:ext xmlns:c15="http://schemas.microsoft.com/office/drawing/2012/chart" uri="{CE6537A1-D6FC-4f65-9D91-7224C49458BB}">
+                <c15:showLeaderLines val="0"/>
+              </c:ext>
+            </c:extLst>
           </c:dLbls>
-          <c:dPt>
-            <c:idx val="0"/>
-            <c:invertIfNegative val="0"/>
-            <c:bubble3D val="0"/>
-            <c:spPr>
-              <a:solidFill>
-                <a:srgbClr val="E76F51"/>
-              </a:solidFill>
-              <a:effectLst/>
-            </c:spPr>
-          </c:dPt>
-          <c:dPt>
-            <c:idx val="1"/>
-            <c:invertIfNegative val="0"/>
-            <c:bubble3D val="0"/>
-            <c:spPr>
-              <a:solidFill>
-                <a:srgbClr val="E9C46A"/>
-              </a:solidFill>
-              <a:effectLst/>
-            </c:spPr>
-          </c:dPt>
-          <c:dPt>
-            <c:idx val="2"/>
-            <c:invertIfNegative val="0"/>
-            <c:bubble3D val="0"/>
-            <c:spPr>
-              <a:solidFill>
-                <a:srgbClr val="2A9D8F"/>
-              </a:solidFill>
-              <a:effectLst/>
-            </c:spPr>
-          </c:dPt>
-          <c:dPt>
-            <c:idx val="3"/>
-            <c:invertIfNegative val="0"/>
-            <c:bubble3D val="0"/>
-            <c:spPr>
-              <a:solidFill>
-                <a:srgbClr val="E9C46A"/>
-              </a:solidFill>
-              <a:effectLst/>
-            </c:spPr>
-          </c:dPt>
           <c:cat>
-            <c:multiLvlStrRef>
+            <c:strRef>
               <c:f>Sheet1!$A$2:$A$5</c:f>
-              <c:multiLvlStrCache>
+              <c:strCache>
                 <c:ptCount val="4"/>
-                <c:lvl>
-                  <c:pt idx="0">
-                    <c:v>Low (1)</c:v>
-                  </c:pt>
-                  <c:pt idx="1">
-                    <c:v>Medium (2)</c:v>
-                  </c:pt>
-                  <c:pt idx="2">
-                    <c:v>High (3)</c:v>
-                  </c:pt>
-                  <c:pt idx="3">
-                    <c:v>Very High (4)</c:v>
-                  </c:pt>
-                </c:lvl>
-              </c:multiLvlStrCache>
-            </c:multiLvlStrRef>
+                <c:pt idx="0">
+                  <c:v>Low (1)</c:v>
+                </c:pt>
+                <c:pt idx="1">
+                  <c:v>Medium (2)</c:v>
+                </c:pt>
+                <c:pt idx="2">
+                  <c:v>High (3)</c:v>
+                </c:pt>
+                <c:pt idx="3">
+                  <c:v>Very High (4)</c:v>
+                </c:pt>
+              </c:strCache>
+            </c:strRef>
           </c:cat>
           <c:val>
             <c:numRef>
@@ -1083,36 +1199,23 @@
               </c:numCache>
             </c:numRef>
           </c:val>
+          <c:extLst>
+            <c:ext xmlns:c16="http://schemas.microsoft.com/office/drawing/2014/chart" uri="{C3380CC4-5D6E-409C-BE32-E72D297353CC}">
+              <c16:uniqueId val="{00000008-86F3-C644-AB8C-3C959B2EF322}"/>
+            </c:ext>
+          </c:extLst>
         </c:ser>
         <c:dLbls>
-          <c:numFmt formatCode="#,##0" sourceLinked="0"/>
-          <c:txPr>
-            <a:bodyPr/>
-            <a:lstStyle/>
-            <a:p>
-              <a:pPr>
-                <a:defRPr b="0" i="0" strike="noStrike" sz="1100" u="none">
-                  <a:solidFill>
-                    <a:srgbClr val="2C2C2C"/>
-                  </a:solidFill>
-                  <a:latin typeface="Arial"/>
-                </a:defRPr>
-              </a:pPr>
-            </a:p>
-          </c:txPr>
           <c:showLegendKey val="0"/>
           <c:showVal val="1"/>
           <c:showCatName val="0"/>
           <c:showSerName val="0"/>
           <c:showPercent val="0"/>
           <c:showBubbleSize val="0"/>
-          <c:showLeaderLines val="0"/>
         </c:dLbls>
         <c:gapWidth val="150"/>
-        <c:overlap val="0"/>
         <c:axId val="2094734554"/>
         <c:axId val="2094734552"/>
-        <c:axId val="2094734556"/>
       </c:barChart>
       <c:catAx>
         <c:axId val="2094734554"/>
@@ -1153,6 +1256,7 @@
         <c:crosses val="autoZero"/>
         <c:auto val="1"/>
         <c:lblAlgn val="ctr"/>
+        <c:lblOffset val="100"/>
         <c:noMultiLvlLbl val="1"/>
       </c:catAx>
       <c:valAx>
@@ -1216,6 +1320,7 @@
     </c:plotArea>
     <c:plotVisOnly val="1"/>
     <c:dispBlanksAs val="span"/>
+    <c:showDLblsOverMax val="1"/>
   </c:chart>
   <c:spPr>
     <a:solidFill>
@@ -1233,9 +1338,11 @@
 </file>
 
 <file path=ppt/charts/chart5.xml><?xml version="1.0" encoding="utf-8"?>
-<c:chartSpace xmlns:c="http://schemas.openxmlformats.org/drawingml/2006/chart" xmlns:a="http://schemas.openxmlformats.org/drawingml/2006/main" xmlns:r="http://schemas.openxmlformats.org/officeDocument/2006/relationships">
+<c:chartSpace xmlns:c="http://schemas.openxmlformats.org/drawingml/2006/chart" xmlns:a="http://schemas.openxmlformats.org/drawingml/2006/main" xmlns:r="http://schemas.openxmlformats.org/officeDocument/2006/relationships" xmlns:c16r2="http://schemas.microsoft.com/office/drawing/2015/06/chart">
   <c:date1904 val="0"/>
+  <c:lang val="en-US"/>
   <c:roundedCorners val="1"/>
+  <c:style val="2"/>
   <c:chart>
     <c:autoTitleDeleted val="1"/>
     <c:plotArea>
@@ -1265,20 +1372,92 @@
             <a:effectLst/>
           </c:spPr>
           <c:invertIfNegative val="0"/>
+          <c:dPt>
+            <c:idx val="0"/>
+            <c:invertIfNegative val="0"/>
+            <c:bubble3D val="0"/>
+            <c:spPr>
+              <a:solidFill>
+                <a:srgbClr val="C00000"/>
+              </a:solidFill>
+              <a:effectLst/>
+            </c:spPr>
+            <c:extLst>
+              <c:ext xmlns:c16="http://schemas.microsoft.com/office/drawing/2014/chart" uri="{C3380CC4-5D6E-409C-BE32-E72D297353CC}">
+                <c16:uniqueId val="{00000001-8547-0844-9BDE-84709320DB01}"/>
+              </c:ext>
+            </c:extLst>
+          </c:dPt>
+          <c:dPt>
+            <c:idx val="1"/>
+            <c:invertIfNegative val="0"/>
+            <c:bubble3D val="0"/>
+            <c:spPr>
+              <a:solidFill>
+                <a:schemeClr val="accent4"/>
+              </a:solidFill>
+              <a:effectLst/>
+            </c:spPr>
+            <c:extLst>
+              <c:ext xmlns:c16="http://schemas.microsoft.com/office/drawing/2014/chart" uri="{C3380CC4-5D6E-409C-BE32-E72D297353CC}">
+                <c16:uniqueId val="{00000003-8547-0844-9BDE-84709320DB01}"/>
+              </c:ext>
+            </c:extLst>
+          </c:dPt>
+          <c:dPt>
+            <c:idx val="2"/>
+            <c:invertIfNegative val="0"/>
+            <c:bubble3D val="0"/>
+            <c:spPr>
+              <a:solidFill>
+                <a:schemeClr val="accent4"/>
+              </a:solidFill>
+              <a:effectLst/>
+            </c:spPr>
+            <c:extLst>
+              <c:ext xmlns:c16="http://schemas.microsoft.com/office/drawing/2014/chart" uri="{C3380CC4-5D6E-409C-BE32-E72D297353CC}">
+                <c16:uniqueId val="{00000005-8547-0844-9BDE-84709320DB01}"/>
+              </c:ext>
+            </c:extLst>
+          </c:dPt>
+          <c:dPt>
+            <c:idx val="3"/>
+            <c:invertIfNegative val="0"/>
+            <c:bubble3D val="0"/>
+            <c:spPr>
+              <a:solidFill>
+                <a:schemeClr val="accent1"/>
+              </a:solidFill>
+              <a:effectLst/>
+            </c:spPr>
+            <c:extLst>
+              <c:ext xmlns:c16="http://schemas.microsoft.com/office/drawing/2014/chart" uri="{C3380CC4-5D6E-409C-BE32-E72D297353CC}">
+                <c16:uniqueId val="{00000007-8547-0844-9BDE-84709320DB01}"/>
+              </c:ext>
+            </c:extLst>
+          </c:dPt>
           <c:dLbls>
             <c:numFmt formatCode="#,##0" sourceLinked="0"/>
+            <c:spPr>
+              <a:noFill/>
+              <a:ln>
+                <a:noFill/>
+              </a:ln>
+              <a:effectLst/>
+            </c:spPr>
             <c:txPr>
               <a:bodyPr/>
               <a:lstStyle/>
               <a:p>
                 <a:pPr>
-                  <a:defRPr b="0" i="0" strike="noStrike" sz="1100" u="none">
+                  <a:defRPr sz="1100" b="0" i="0" u="none" strike="noStrike">
                     <a:solidFill>
                       <a:srgbClr val="2C2C2C"/>
                     </a:solidFill>
                     <a:latin typeface="Arial"/>
                   </a:defRPr>
                 </a:pPr>
+                <a:endParaRPr lang="en-US"/>
               </a:p>
             </c:txPr>
             <c:showLegendKey val="0"/>
@@ -1288,72 +1467,31 @@
             <c:showPercent val="0"/>
             <c:showBubbleSize val="0"/>
             <c:showLeaderLines val="0"/>
+            <c:extLst>
+              <c:ext xmlns:c15="http://schemas.microsoft.com/office/drawing/2012/chart" uri="{CE6537A1-D6FC-4f65-9D91-7224C49458BB}">
+                <c15:showLeaderLines val="0"/>
+              </c:ext>
+            </c:extLst>
           </c:dLbls>
-          <c:dPt>
-            <c:idx val="0"/>
-            <c:invertIfNegative val="0"/>
-            <c:bubble3D val="0"/>
-            <c:spPr>
-              <a:solidFill>
-                <a:srgbClr val="E76F51"/>
-              </a:solidFill>
-              <a:effectLst/>
-            </c:spPr>
-          </c:dPt>
-          <c:dPt>
-            <c:idx val="1"/>
-            <c:invertIfNegative val="0"/>
-            <c:bubble3D val="0"/>
-            <c:spPr>
-              <a:solidFill>
-                <a:srgbClr val="E9C46A"/>
-              </a:solidFill>
-              <a:effectLst/>
-            </c:spPr>
-          </c:dPt>
-          <c:dPt>
-            <c:idx val="2"/>
-            <c:invertIfNegative val="0"/>
-            <c:bubble3D val="0"/>
-            <c:spPr>
-              <a:solidFill>
-                <a:srgbClr val="E9C46A"/>
-              </a:solidFill>
-              <a:effectLst/>
-            </c:spPr>
-          </c:dPt>
-          <c:dPt>
-            <c:idx val="3"/>
-            <c:invertIfNegative val="0"/>
-            <c:bubble3D val="0"/>
-            <c:spPr>
-              <a:solidFill>
-                <a:srgbClr val="2A9D8F"/>
-              </a:solidFill>
-              <a:effectLst/>
-            </c:spPr>
-          </c:dPt>
           <c:cat>
-            <c:multiLvlStrRef>
+            <c:strRef>
               <c:f>Sheet1!$A$2:$A$5</c:f>
-              <c:multiLvlStrCache>
+              <c:strCache>
                 <c:ptCount val="4"/>
-                <c:lvl>
-                  <c:pt idx="0">
-                    <c:v>Low (1)</c:v>
-                  </c:pt>
-                  <c:pt idx="1">
-                    <c:v>Medium (2)</c:v>
-                  </c:pt>
-                  <c:pt idx="2">
-                    <c:v>High (3)</c:v>
-                  </c:pt>
-                  <c:pt idx="3">
-                    <c:v>Very High (4)</c:v>
-                  </c:pt>
-                </c:lvl>
-              </c:multiLvlStrCache>
-            </c:multiLvlStrRef>
+                <c:pt idx="0">
+                  <c:v>Low (1)</c:v>
+                </c:pt>
+                <c:pt idx="1">
+                  <c:v>Medium (2)</c:v>
+                </c:pt>
+                <c:pt idx="2">
+                  <c:v>High (3)</c:v>
+                </c:pt>
+                <c:pt idx="3">
+                  <c:v>Very High (4)</c:v>
+                </c:pt>
+              </c:strCache>
+            </c:strRef>
           </c:cat>
           <c:val>
             <c:numRef>
@@ -1376,36 +1514,23 @@
               </c:numCache>
             </c:numRef>
           </c:val>
+          <c:extLst>
+            <c:ext xmlns:c16="http://schemas.microsoft.com/office/drawing/2014/chart" uri="{C3380CC4-5D6E-409C-BE32-E72D297353CC}">
+              <c16:uniqueId val="{00000008-8547-0844-9BDE-84709320DB01}"/>
+            </c:ext>
+          </c:extLst>
         </c:ser>
         <c:dLbls>
-          <c:numFmt formatCode="#,##0" sourceLinked="0"/>
-          <c:txPr>
-            <a:bodyPr/>
-            <a:lstStyle/>
-            <a:p>
-              <a:pPr>
-                <a:defRPr b="0" i="0" strike="noStrike" sz="1100" u="none">
-                  <a:solidFill>
-                    <a:srgbClr val="2C2C2C"/>
-                  </a:solidFill>
-                  <a:latin typeface="Arial"/>
-                </a:defRPr>
-              </a:pPr>
-            </a:p>
-          </c:txPr>
           <c:showLegendKey val="0"/>
           <c:showVal val="1"/>
           <c:showCatName val="0"/>
           <c:showSerName val="0"/>
           <c:showPercent val="0"/>
           <c:showBubbleSize val="0"/>
-          <c:showLeaderLines val="0"/>
         </c:dLbls>
         <c:gapWidth val="150"/>
-        <c:overlap val="0"/>
         <c:axId val="2094734554"/>
         <c:axId val="2094734552"/>
-        <c:axId val="2094734556"/>
       </c:barChart>
       <c:catAx>
         <c:axId val="2094734554"/>
@@ -1446,6 +1571,7 @@
         <c:crosses val="autoZero"/>
         <c:auto val="1"/>
         <c:lblAlgn val="ctr"/>
+        <c:lblOffset val="100"/>
         <c:noMultiLvlLbl val="1"/>
       </c:catAx>
       <c:valAx>
@@ -1509,6 +1635,7 @@
     </c:plotArea>
     <c:plotVisOnly val="1"/>
     <c:dispBlanksAs val="span"/>
+    <c:showDLblsOverMax val="1"/>
   </c:chart>
   <c:spPr>
     <a:solidFill>
@@ -1526,9 +1653,11 @@
 </file>
 
 <file path=ppt/charts/chart6.xml><?xml version="1.0" encoding="utf-8"?>
-<c:chartSpace xmlns:c="http://schemas.openxmlformats.org/drawingml/2006/chart" xmlns:a="http://schemas.openxmlformats.org/drawingml/2006/main" xmlns:r="http://schemas.openxmlformats.org/officeDocument/2006/relationships">
+<c:chartSpace xmlns:c="http://schemas.openxmlformats.org/drawingml/2006/chart" xmlns:a="http://schemas.openxmlformats.org/drawingml/2006/main" xmlns:r="http://schemas.openxmlformats.org/officeDocument/2006/relationships" xmlns:c16r2="http://schemas.microsoft.com/office/drawing/2015/06/chart">
   <c:date1904 val="0"/>
+  <c:lang val="en-US"/>
   <c:roundedCorners val="1"/>
+  <c:style val="2"/>
   <c:chart>
     <c:autoTitleDeleted val="1"/>
     <c:plotArea>
@@ -1558,20 +1687,92 @@
             <a:effectLst/>
           </c:spPr>
           <c:invertIfNegative val="0"/>
+          <c:dPt>
+            <c:idx val="0"/>
+            <c:invertIfNegative val="0"/>
+            <c:bubble3D val="0"/>
+            <c:spPr>
+              <a:solidFill>
+                <a:srgbClr val="C00000"/>
+              </a:solidFill>
+              <a:effectLst/>
+            </c:spPr>
+            <c:extLst>
+              <c:ext xmlns:c16="http://schemas.microsoft.com/office/drawing/2014/chart" uri="{C3380CC4-5D6E-409C-BE32-E72D297353CC}">
+                <c16:uniqueId val="{00000001-0CF3-184A-AA74-A370E29EF219}"/>
+              </c:ext>
+            </c:extLst>
+          </c:dPt>
+          <c:dPt>
+            <c:idx val="1"/>
+            <c:invertIfNegative val="0"/>
+            <c:bubble3D val="0"/>
+            <c:spPr>
+              <a:solidFill>
+                <a:schemeClr val="accent4"/>
+              </a:solidFill>
+              <a:effectLst/>
+            </c:spPr>
+            <c:extLst>
+              <c:ext xmlns:c16="http://schemas.microsoft.com/office/drawing/2014/chart" uri="{C3380CC4-5D6E-409C-BE32-E72D297353CC}">
+                <c16:uniqueId val="{00000003-0CF3-184A-AA74-A370E29EF219}"/>
+              </c:ext>
+            </c:extLst>
+          </c:dPt>
+          <c:dPt>
+            <c:idx val="2"/>
+            <c:invertIfNegative val="0"/>
+            <c:bubble3D val="0"/>
+            <c:spPr>
+              <a:solidFill>
+                <a:schemeClr val="accent1"/>
+              </a:solidFill>
+              <a:effectLst/>
+            </c:spPr>
+            <c:extLst>
+              <c:ext xmlns:c16="http://schemas.microsoft.com/office/drawing/2014/chart" uri="{C3380CC4-5D6E-409C-BE32-E72D297353CC}">
+                <c16:uniqueId val="{00000005-0CF3-184A-AA74-A370E29EF219}"/>
+              </c:ext>
+            </c:extLst>
+          </c:dPt>
+          <c:dPt>
+            <c:idx val="3"/>
+            <c:invertIfNegative val="0"/>
+            <c:bubble3D val="0"/>
+            <c:spPr>
+              <a:solidFill>
+                <a:schemeClr val="accent1"/>
+              </a:solidFill>
+              <a:effectLst/>
+            </c:spPr>
+            <c:extLst>
+              <c:ext xmlns:c16="http://schemas.microsoft.com/office/drawing/2014/chart" uri="{C3380CC4-5D6E-409C-BE32-E72D297353CC}">
+                <c16:uniqueId val="{00000007-0CF3-184A-AA74-A370E29EF219}"/>
+              </c:ext>
+            </c:extLst>
+          </c:dPt>
           <c:dLbls>
             <c:numFmt formatCode="#,##0" sourceLinked="0"/>
+            <c:spPr>
+              <a:noFill/>
+              <a:ln>
+                <a:noFill/>
+              </a:ln>
+              <a:effectLst/>
+            </c:spPr>
             <c:txPr>
               <a:bodyPr/>
               <a:lstStyle/>
               <a:p>
                 <a:pPr>
-                  <a:defRPr b="0" i="0" strike="noStrike" sz="1200" u="none">
+                  <a:defRPr sz="1200" b="0" i="0" u="none" strike="noStrike">
                     <a:solidFill>
                       <a:srgbClr val="2C2C2C"/>
                     </a:solidFill>
                     <a:latin typeface="Arial"/>
                   </a:defRPr>
                 </a:pPr>
+                <a:endParaRPr lang="en-US"/>
               </a:p>
             </c:txPr>
             <c:showLegendKey val="0"/>
@@ -1581,72 +1782,31 @@
             <c:showPercent val="0"/>
             <c:showBubbleSize val="0"/>
             <c:showLeaderLines val="0"/>
+            <c:extLst>
+              <c:ext xmlns:c15="http://schemas.microsoft.com/office/drawing/2012/chart" uri="{CE6537A1-D6FC-4f65-9D91-7224C49458BB}">
+                <c15:showLeaderLines val="0"/>
+              </c:ext>
+            </c:extLst>
           </c:dLbls>
-          <c:dPt>
-            <c:idx val="0"/>
-            <c:invertIfNegative val="0"/>
-            <c:bubble3D val="0"/>
-            <c:spPr>
-              <a:solidFill>
-                <a:srgbClr val="E76F51"/>
-              </a:solidFill>
-              <a:effectLst/>
-            </c:spPr>
-          </c:dPt>
-          <c:dPt>
-            <c:idx val="1"/>
-            <c:invertIfNegative val="0"/>
-            <c:bubble3D val="0"/>
-            <c:spPr>
-              <a:solidFill>
-                <a:srgbClr val="E9C46A"/>
-              </a:solidFill>
-              <a:effectLst/>
-            </c:spPr>
-          </c:dPt>
-          <c:dPt>
-            <c:idx val="2"/>
-            <c:invertIfNegative val="0"/>
-            <c:bubble3D val="0"/>
-            <c:spPr>
-              <a:solidFill>
-                <a:srgbClr val="2A9D8F"/>
-              </a:solidFill>
-              <a:effectLst/>
-            </c:spPr>
-          </c:dPt>
-          <c:dPt>
-            <c:idx val="3"/>
-            <c:invertIfNegative val="0"/>
-            <c:bubble3D val="0"/>
-            <c:spPr>
-              <a:solidFill>
-                <a:srgbClr val="2A9D8F"/>
-              </a:solidFill>
-              <a:effectLst/>
-            </c:spPr>
-          </c:dPt>
           <c:cat>
-            <c:multiLvlStrRef>
+            <c:strRef>
               <c:f>Sheet1!$A$2:$A$5</c:f>
-              <c:multiLvlStrCache>
+              <c:strCache>
                 <c:ptCount val="4"/>
-                <c:lvl>
-                  <c:pt idx="0">
-                    <c:v>Other</c:v>
-                  </c:pt>
-                  <c:pt idx="1">
-                    <c:v>Nurse</c:v>
-                  </c:pt>
-                  <c:pt idx="2">
-                    <c:v>Therapist</c:v>
-                  </c:pt>
-                  <c:pt idx="3">
-                    <c:v>Administrative</c:v>
-                  </c:pt>
-                </c:lvl>
-              </c:multiLvlStrCache>
-            </c:multiLvlStrRef>
+                <c:pt idx="0">
+                  <c:v>Other</c:v>
+                </c:pt>
+                <c:pt idx="1">
+                  <c:v>Nurse</c:v>
+                </c:pt>
+                <c:pt idx="2">
+                  <c:v>Therapist</c:v>
+                </c:pt>
+                <c:pt idx="3">
+                  <c:v>Administrative</c:v>
+                </c:pt>
+              </c:strCache>
+            </c:strRef>
           </c:cat>
           <c:val>
             <c:numRef>
@@ -1669,36 +1829,23 @@
               </c:numCache>
             </c:numRef>
           </c:val>
+          <c:extLst>
+            <c:ext xmlns:c16="http://schemas.microsoft.com/office/drawing/2014/chart" uri="{C3380CC4-5D6E-409C-BE32-E72D297353CC}">
+              <c16:uniqueId val="{00000008-0CF3-184A-AA74-A370E29EF219}"/>
+            </c:ext>
+          </c:extLst>
         </c:ser>
         <c:dLbls>
-          <c:numFmt formatCode="#,##0" sourceLinked="0"/>
-          <c:txPr>
-            <a:bodyPr/>
-            <a:lstStyle/>
-            <a:p>
-              <a:pPr>
-                <a:defRPr b="0" i="0" strike="noStrike" sz="1200" u="none">
-                  <a:solidFill>
-                    <a:srgbClr val="2C2C2C"/>
-                  </a:solidFill>
-                  <a:latin typeface="Arial"/>
-                </a:defRPr>
-              </a:pPr>
-            </a:p>
-          </c:txPr>
           <c:showLegendKey val="0"/>
           <c:showVal val="1"/>
           <c:showCatName val="0"/>
           <c:showSerName val="0"/>
           <c:showPercent val="0"/>
           <c:showBubbleSize val="0"/>
-          <c:showLeaderLines val="0"/>
         </c:dLbls>
         <c:gapWidth val="150"/>
-        <c:overlap val="0"/>
         <c:axId val="2094734554"/>
         <c:axId val="2094734552"/>
-        <c:axId val="2094734556"/>
       </c:barChart>
       <c:catAx>
         <c:axId val="2094734554"/>
@@ -1739,6 +1886,7 @@
         <c:crosses val="autoZero"/>
         <c:auto val="1"/>
         <c:lblAlgn val="ctr"/>
+        <c:lblOffset val="100"/>
         <c:noMultiLvlLbl val="1"/>
       </c:catAx>
       <c:valAx>
@@ -1801,6 +1949,7 @@
     </c:plotArea>
     <c:plotVisOnly val="1"/>
     <c:dispBlanksAs val="span"/>
+    <c:showDLblsOverMax val="1"/>
   </c:chart>
   <c:spPr>
     <a:solidFill>
@@ -1839,234 +1988,10 @@
           <a:chExt cx="0" cy="0"/>
         </a:xfrm>
       </p:grpSpPr>
-      <p:sp>
-        <p:nvSpPr>
-          <p:cNvPr id="2" name="Header Placeholder 1"/>
-          <p:cNvSpPr>
-            <a:spLocks noGrp="1"/>
-          </p:cNvSpPr>
-          <p:nvPr>
-            <p:ph type="hdr" sz="quarter"/>
-          </p:nvPr>
-        </p:nvSpPr>
-        <p:spPr>
-          <a:xfrm>
-            <a:off x="0" y="0"/>
-            <a:ext cx="2971800" cy="458788"/>
-          </a:xfrm>
-          <a:prstGeom prst="rect">
-            <a:avLst/>
-          </a:prstGeom>
-        </p:spPr>
-        <p:txBody>
-          <a:bodyPr vert="horz" lIns="91440" tIns="45720" rIns="91440" bIns="45720" rtlCol="0"/>
-          <a:lstStyle>
-            <a:lvl1pPr algn="l">
-              <a:defRPr sz="1200"/>
-            </a:lvl1pPr>
-          </a:lstStyle>
-          <a:p>
-            <a:endParaRPr lang="en-US"/>
-          </a:p>
-        </p:txBody>
-      </p:sp>
-      <p:sp>
-        <p:nvSpPr>
-          <p:cNvPr id="3" name="Date Placeholder 2"/>
-          <p:cNvSpPr>
-            <a:spLocks noGrp="1"/>
-          </p:cNvSpPr>
-          <p:nvPr>
-            <p:ph type="dt" idx="1"/>
-          </p:nvPr>
-        </p:nvSpPr>
-        <p:spPr>
-          <a:xfrm>
-            <a:off x="3884613" y="0"/>
-            <a:ext cx="2971800" cy="458788"/>
-          </a:xfrm>
-          <a:prstGeom prst="rect">
-            <a:avLst/>
-          </a:prstGeom>
-        </p:spPr>
-        <p:txBody>
-          <a:bodyPr vert="horz" lIns="91440" tIns="45720" rIns="91440" bIns="45720" rtlCol="0"/>
-          <a:lstStyle>
-            <a:lvl1pPr algn="r">
-              <a:defRPr sz="1200"/>
-            </a:lvl1pPr>
-          </a:lstStyle>
-          <a:p>
-            <a:fld id="{5282F153-3F37-0F45-9E97-73ACFA13230C}" type="datetimeFigureOut">
-              <a:rPr lang="en-US"/>
-              <a:t>7/23/19</a:t>
-            </a:fld>
-            <a:endParaRPr lang="en-US"/>
-          </a:p>
-        </p:txBody>
-      </p:sp>
-      <p:sp>
-        <p:nvSpPr>
-          <p:cNvPr id="4" name="Slide Image Placeholder 3"/>
-          <p:cNvSpPr>
-            <a:spLocks noGrp="1" noRot="1" noChangeAspect="1"/>
-          </p:cNvSpPr>
-          <p:nvPr>
-            <p:ph type="sldImg" idx="2"/>
-          </p:nvPr>
-        </p:nvSpPr>
-        <p:spPr>
-          <a:xfrm>
-            <a:off x="685800" y="1143000"/>
-            <a:ext cx="5486400" cy="3086100"/>
-          </a:xfrm>
-          <a:prstGeom prst="rect">
-            <a:avLst/>
-          </a:prstGeom>
-          <a:noFill/>
-          <a:ln w="12700">
-            <a:solidFill>
-              <a:prstClr val="black"/>
-            </a:solidFill>
-          </a:ln>
-        </p:spPr>
-        <p:txBody>
-          <a:bodyPr vert="horz" lIns="91440" tIns="45720" rIns="91440" bIns="45720" rtlCol="0" anchor="ctr"/>
-          <a:lstStyle/>
-          <a:p>
-            <a:endParaRPr lang="en-US"/>
-          </a:p>
-        </p:txBody>
-      </p:sp>
-      <p:sp>
-        <p:nvSpPr>
-          <p:cNvPr id="5" name="Notes Placeholder 4"/>
-          <p:cNvSpPr>
-            <a:spLocks noGrp="1"/>
-          </p:cNvSpPr>
-          <p:nvPr>
-            <p:ph type="body" sz="quarter" idx="3"/>
-          </p:nvPr>
-        </p:nvSpPr>
-        <p:spPr>
-          <a:xfrm>
-            <a:off x="685800" y="4400550"/>
-            <a:ext cx="5486400" cy="3600450"/>
-          </a:xfrm>
-          <a:prstGeom prst="rect">
-            <a:avLst/>
-          </a:prstGeom>
-        </p:spPr>
-        <p:txBody>
-          <a:bodyPr vert="horz" lIns="91440" tIns="45720" rIns="91440" bIns="45720" rtlCol="0"/>
-          <a:lstStyle/>
-          <a:p>
-            <a:pPr lvl="0"/>
-            <a:r>
-              <a:rPr lang="en-US"/>
-              <a:t>Click to edit Master text styles</a:t>
-            </a:r>
-          </a:p>
-          <a:p>
-            <a:pPr lvl="1"/>
-            <a:r>
-              <a:rPr lang="en-US"/>
-              <a:t>Second level</a:t>
-            </a:r>
-          </a:p>
-          <a:p>
-            <a:pPr lvl="2"/>
-            <a:r>
-              <a:rPr lang="en-US"/>
-              <a:t>Third level</a:t>
-            </a:r>
-          </a:p>
-          <a:p>
-            <a:pPr lvl="3"/>
-            <a:r>
-              <a:rPr lang="en-US"/>
-              <a:t>Fourth level</a:t>
-            </a:r>
-          </a:p>
-          <a:p>
-            <a:pPr lvl="4"/>
-            <a:r>
-              <a:rPr lang="en-US"/>
-              <a:t>Fifth level</a:t>
-            </a:r>
-          </a:p>
-        </p:txBody>
-      </p:sp>
-      <p:sp>
-        <p:nvSpPr>
-          <p:cNvPr id="6" name="Footer Placeholder 5"/>
-          <p:cNvSpPr>
-            <a:spLocks noGrp="1"/>
-          </p:cNvSpPr>
-          <p:nvPr>
-            <p:ph type="ftr" sz="quarter" idx="4"/>
-          </p:nvPr>
-        </p:nvSpPr>
-        <p:spPr>
-          <a:xfrm>
-            <a:off x="0" y="8685213"/>
-            <a:ext cx="2971800" cy="458787"/>
-          </a:xfrm>
-          <a:prstGeom prst="rect">
-            <a:avLst/>
-          </a:prstGeom>
-        </p:spPr>
-        <p:txBody>
-          <a:bodyPr vert="horz" lIns="91440" tIns="45720" rIns="91440" bIns="45720" rtlCol="0" anchor="b"/>
-          <a:lstStyle>
-            <a:lvl1pPr algn="l">
-              <a:defRPr sz="1200"/>
-            </a:lvl1pPr>
-          </a:lstStyle>
-          <a:p>
-            <a:endParaRPr lang="en-US"/>
-          </a:p>
-        </p:txBody>
-      </p:sp>
-      <p:sp>
-        <p:nvSpPr>
-          <p:cNvPr id="7" name="Slide Number Placeholder 6"/>
-          <p:cNvSpPr>
-            <a:spLocks noGrp="1"/>
-          </p:cNvSpPr>
-          <p:nvPr>
-            <p:ph type="sldNum" sz="quarter" idx="5"/>
-          </p:nvPr>
-        </p:nvSpPr>
-        <p:spPr>
-          <a:xfrm>
-            <a:off x="3884613" y="8685213"/>
-            <a:ext cx="2971800" cy="458787"/>
-          </a:xfrm>
-          <a:prstGeom prst="rect">
-            <a:avLst/>
-          </a:prstGeom>
-        </p:spPr>
-        <p:txBody>
-          <a:bodyPr vert="horz" lIns="91440" tIns="45720" rIns="91440" bIns="45720" rtlCol="0" anchor="b"/>
-          <a:lstStyle>
-            <a:lvl1pPr algn="r">
-              <a:defRPr sz="1200"/>
-            </a:lvl1pPr>
-          </a:lstStyle>
-          <a:p>
-            <a:fld id="{CE5E9CC1-C706-0F49-92D6-E571CC5EEA8F}" type="slidenum">
-              <a:rPr lang="en-US"/>
-              <a:t>‹#›</a:t>
-            </a:fld>
-            <a:endParaRPr lang="en-US"/>
-          </a:p>
-        </p:txBody>
-      </p:sp>
     </p:spTree>
     <p:extLst>
       <p:ext uri="{BB962C8B-B14F-4D97-AF65-F5344CB8AC3E}">
-        <p14:creationId xmlns:p14="http://schemas.microsoft.com/office/powerpoint/2010/main" val="1024086991"/>
+        <p14:creationId xmlns:p14="http://schemas.microsoft.com/office/powerpoint/2010/main" val="4271002435"/>
       </p:ext>
     </p:extLst>
   </p:cSld>
@@ -2210,10 +2135,6 @@
           <a:bodyPr/>
           <a:lstStyle/>
           <a:p>
-            <a:r>
-              <a:rPr lang="en-US" dirty="0"/>
-              <a:t/>
-            </a:r>
             <a:endParaRPr lang="en-US" dirty="0"/>
           </a:p>
         </p:txBody>
@@ -2298,10 +2219,6 @@
           <a:bodyPr/>
           <a:lstStyle/>
           <a:p>
-            <a:r>
-              <a:rPr lang="en-US" dirty="0"/>
-              <a:t/>
-            </a:r>
             <a:endParaRPr lang="en-US" dirty="0"/>
           </a:p>
         </p:txBody>
@@ -2386,10 +2303,6 @@
           <a:bodyPr/>
           <a:lstStyle/>
           <a:p>
-            <a:r>
-              <a:rPr lang="en-US" dirty="0"/>
-              <a:t/>
-            </a:r>
             <a:endParaRPr lang="en-US" dirty="0"/>
           </a:p>
         </p:txBody>
@@ -2474,10 +2387,6 @@
           <a:bodyPr/>
           <a:lstStyle/>
           <a:p>
-            <a:r>
-              <a:rPr lang="en-US" dirty="0"/>
-              <a:t/>
-            </a:r>
             <a:endParaRPr lang="en-US" dirty="0"/>
           </a:p>
         </p:txBody>
@@ -2562,10 +2471,6 @@
           <a:bodyPr/>
           <a:lstStyle/>
           <a:p>
-            <a:r>
-              <a:rPr lang="en-US" dirty="0"/>
-              <a:t/>
-            </a:r>
             <a:endParaRPr lang="en-US" dirty="0"/>
           </a:p>
         </p:txBody>
@@ -2650,10 +2555,6 @@
           <a:bodyPr/>
           <a:lstStyle/>
           <a:p>
-            <a:r>
-              <a:rPr lang="en-US" dirty="0"/>
-              <a:t/>
-            </a:r>
             <a:endParaRPr lang="en-US" dirty="0"/>
           </a:p>
         </p:txBody>
@@ -2738,10 +2639,6 @@
           <a:bodyPr/>
           <a:lstStyle/>
           <a:p>
-            <a:r>
-              <a:rPr lang="en-US" dirty="0"/>
-              <a:t/>
-            </a:r>
             <a:endParaRPr lang="en-US" dirty="0"/>
           </a:p>
         </p:txBody>
@@ -2826,10 +2723,6 @@
           <a:bodyPr/>
           <a:lstStyle/>
           <a:p>
-            <a:r>
-              <a:rPr lang="en-US" dirty="0"/>
-              <a:t/>
-            </a:r>
             <a:endParaRPr lang="en-US" dirty="0"/>
           </a:p>
         </p:txBody>
@@ -2914,10 +2807,6 @@
           <a:bodyPr/>
           <a:lstStyle/>
           <a:p>
-            <a:r>
-              <a:rPr lang="en-US" dirty="0"/>
-              <a:t/>
-            </a:r>
             <a:endParaRPr lang="en-US" dirty="0"/>
           </a:p>
         </p:txBody>
@@ -3002,10 +2891,6 @@
           <a:bodyPr/>
           <a:lstStyle/>
           <a:p>
-            <a:r>
-              <a:rPr lang="en-US" dirty="0"/>
-              <a:t/>
-            </a:r>
             <a:endParaRPr lang="en-US" dirty="0"/>
           </a:p>
         </p:txBody>
@@ -3079,6 +2964,11 @@
 <file path=ppt/slideMasters/slideMaster1.xml><?xml version="1.0" encoding="utf-8"?>
 <p:sldMaster xmlns:a="http://schemas.openxmlformats.org/drawingml/2006/main" xmlns:r="http://schemas.openxmlformats.org/officeDocument/2006/relationships" xmlns:p="http://schemas.openxmlformats.org/presentationml/2006/main">
   <p:cSld>
+    <p:bg>
+      <p:bgRef idx="1001">
+        <a:schemeClr val="bg1"/>
+      </p:bgRef>
+    </p:bg>
     <p:spTree>
       <p:nvGrpSpPr>
         <p:cNvPr id="1" name=""/>
@@ -3361,6 +3251,7 @@
         <a:solidFill>
           <a:srgbClr val="1B2A4A"/>
         </a:solidFill>
+        <a:effectLst/>
       </p:bgPr>
     </p:bg>
     <p:spTree>
@@ -3392,10 +3283,20 @@
             <a:avLst/>
           </a:prstGeom>
           <a:solidFill>
-            <a:srgbClr val="E76F51"/>
+            <a:schemeClr val="accent3">
+              <a:lumMod val="60000"/>
+              <a:lumOff val="40000"/>
+            </a:schemeClr>
           </a:solidFill>
           <a:ln/>
         </p:spPr>
+        <p:txBody>
+          <a:bodyPr/>
+          <a:lstStyle/>
+          <a:p>
+            <a:endParaRPr lang="en-US"/>
+          </a:p>
+        </p:txBody>
       </p:sp>
       <p:sp>
         <p:nvSpPr>
@@ -3418,13 +3319,13 @@
           <a:bodyPr wrap="square" lIns="0" tIns="0" rIns="0" bIns="0" rtlCol="0" anchor="ctr"/>
           <a:lstStyle/>
           <a:p>
-            <a:pPr indent="0" marL="0">
+            <a:pPr marL="0" indent="0">
               <a:buNone/>
             </a:pPr>
             <a:r>
               <a:rPr lang="en-US" sz="4200" b="1" dirty="0">
                 <a:solidFill>
-                  <a:srgbClr val="FFFFFF"/>
+                  <a:schemeClr val="bg2"/>
                 </a:solidFill>
                 <a:latin typeface="Georgia" pitchFamily="34" charset="0"/>
                 <a:ea typeface="Georgia" pitchFamily="34" charset="-122"/>
@@ -3432,7 +3333,11 @@
               </a:rPr>
               <a:t>Watson Healthcare</a:t>
             </a:r>
-            <a:endParaRPr lang="en-US" sz="4200" dirty="0"/>
+            <a:endParaRPr lang="en-US" sz="4200" dirty="0">
+              <a:solidFill>
+                <a:schemeClr val="bg2"/>
+              </a:solidFill>
+            </a:endParaRPr>
           </a:p>
         </p:txBody>
       </p:sp>
@@ -3457,13 +3362,13 @@
           <a:bodyPr wrap="square" lIns="0" tIns="0" rIns="0" bIns="0" rtlCol="0" anchor="ctr"/>
           <a:lstStyle/>
           <a:p>
-            <a:pPr indent="0" marL="0">
+            <a:pPr marL="0" indent="0">
               <a:buNone/>
             </a:pPr>
             <a:r>
               <a:rPr lang="en-US" sz="2800" dirty="0">
                 <a:solidFill>
-                  <a:srgbClr val="2A9D8F"/>
+                  <a:schemeClr val="bg2"/>
                 </a:solidFill>
                 <a:latin typeface="Georgia" pitchFamily="34" charset="0"/>
                 <a:ea typeface="Georgia" pitchFamily="34" charset="-122"/>
@@ -3471,7 +3376,11 @@
               </a:rPr>
               <a:t>Employee Attrition Analysis</a:t>
             </a:r>
-            <a:endParaRPr lang="en-US" sz="2800" dirty="0"/>
+            <a:endParaRPr lang="en-US" sz="2800" dirty="0">
+              <a:solidFill>
+                <a:schemeClr val="bg2"/>
+              </a:solidFill>
+            </a:endParaRPr>
           </a:p>
         </p:txBody>
       </p:sp>
@@ -3496,13 +3405,13 @@
           <a:bodyPr wrap="square" lIns="0" tIns="0" rIns="0" bIns="0" rtlCol="0" anchor="ctr"/>
           <a:lstStyle/>
           <a:p>
-            <a:pPr indent="0" marL="0">
+            <a:pPr marL="0" indent="0">
               <a:buNone/>
             </a:pPr>
             <a:r>
               <a:rPr lang="en-US" sz="1400" dirty="0">
                 <a:solidFill>
-                  <a:srgbClr val="8899BB"/>
+                  <a:schemeClr val="bg2"/>
                 </a:solidFill>
                 <a:latin typeface="Calibri" pitchFamily="34" charset="0"/>
                 <a:ea typeface="Calibri" pitchFamily="34" charset="-122"/>
@@ -3510,7 +3419,11 @@
               </a:rPr>
               <a:t>Identifying the key drivers of turnover and actionable strategies to improve retention</a:t>
             </a:r>
-            <a:endParaRPr lang="en-US" sz="1400" dirty="0"/>
+            <a:endParaRPr lang="en-US" sz="1400" dirty="0">
+              <a:solidFill>
+                <a:schemeClr val="bg2"/>
+              </a:solidFill>
+            </a:endParaRPr>
           </a:p>
         </p:txBody>
       </p:sp>
@@ -3535,14 +3448,11 @@
           <a:bodyPr wrap="square" lIns="0" tIns="0" rIns="0" bIns="0" rtlCol="0" anchor="ctr"/>
           <a:lstStyle/>
           <a:p>
-            <a:pPr indent="0" marL="0">
+            <a:pPr marL="0" indent="0">
               <a:buNone/>
             </a:pPr>
             <a:r>
               <a:rPr lang="en-US" sz="1600" b="1" dirty="0">
-                <a:solidFill>
-                  <a:srgbClr val="FFFFFF"/>
-                </a:solidFill>
                 <a:latin typeface="Calibri" pitchFamily="34" charset="0"/>
                 <a:ea typeface="Calibri" pitchFamily="34" charset="-122"/>
                 <a:cs typeface="Calibri" pitchFamily="34" charset="-120"/>
@@ -3574,7 +3484,7 @@
           <a:bodyPr wrap="square" lIns="0" tIns="0" rIns="0" bIns="0" rtlCol="0" anchor="ctr"/>
           <a:lstStyle/>
           <a:p>
-            <a:pPr indent="0" marL="0">
+            <a:pPr marL="0" indent="0">
               <a:buNone/>
             </a:pPr>
             <a:r>
@@ -3608,6 +3518,7 @@
         <a:solidFill>
           <a:srgbClr val="1B2A4A"/>
         </a:solidFill>
+        <a:effectLst/>
       </p:bgPr>
     </p:bg>
     <p:spTree>
@@ -3645,7 +3556,7 @@
           <a:bodyPr wrap="square" lIns="0" tIns="0" rIns="0" bIns="0" rtlCol="0" anchor="ctr"/>
           <a:lstStyle/>
           <a:p>
-            <a:pPr indent="0" marL="0">
+            <a:pPr marL="0" indent="0">
               <a:buNone/>
             </a:pPr>
             <a:r>
@@ -3665,48 +3576,6 @@
       </p:sp>
       <p:sp>
         <p:nvSpPr>
-          <p:cNvPr id="3" name="Shape 1"/>
-          <p:cNvSpPr/>
-          <p:nvPr/>
-        </p:nvSpPr>
-        <p:spPr>
-          <a:xfrm>
-            <a:off x="640080" y="960120"/>
-            <a:ext cx="3749040" cy="1143000"/>
-          </a:xfrm>
-          <a:prstGeom prst="rect">
-            <a:avLst/>
-          </a:prstGeom>
-          <a:solidFill>
-            <a:srgbClr val="FFFFFF">
-              <a:alpha val="92000"/>
-            </a:srgbClr>
-          </a:solidFill>
-          <a:ln/>
-        </p:spPr>
-      </p:sp>
-      <p:sp>
-        <p:nvSpPr>
-          <p:cNvPr id="4" name="Shape 2"/>
-          <p:cNvSpPr/>
-          <p:nvPr/>
-        </p:nvSpPr>
-        <p:spPr>
-          <a:xfrm>
-            <a:off x="640080" y="960120"/>
-            <a:ext cx="54864" cy="1143000"/>
-          </a:xfrm>
-          <a:prstGeom prst="rect">
-            <a:avLst/>
-          </a:prstGeom>
-          <a:solidFill>
-            <a:srgbClr val="E76F51"/>
-          </a:solidFill>
-          <a:ln/>
-        </p:spPr>
-      </p:sp>
-      <p:sp>
-        <p:nvSpPr>
           <p:cNvPr id="5" name="Text 3"/>
           <p:cNvSpPr/>
           <p:nvPr/>
@@ -3726,20 +3595,9 @@
           <a:bodyPr wrap="square" lIns="0" tIns="0" rIns="0" bIns="0" rtlCol="0" anchor="ctr"/>
           <a:lstStyle/>
           <a:p>
-            <a:pPr indent="0" marL="0">
-              <a:buNone/>
-            </a:pPr>
-            <a:r>
-              <a:rPr lang="en-US" sz="1800" b="1" dirty="0">
-                <a:solidFill>
-                  <a:srgbClr val="E76F51"/>
-                </a:solidFill>
-                <a:latin typeface="Georgia" pitchFamily="34" charset="0"/>
-                <a:ea typeface="Georgia" pitchFamily="34" charset="-122"/>
-                <a:cs typeface="Georgia" pitchFamily="34" charset="-120"/>
-              </a:rPr>
-              <a:t>1</a:t>
-            </a:r>
+            <a:pPr marL="0" indent="0">
+              <a:buNone/>
+            </a:pPr>
             <a:endParaRPr lang="en-US" sz="1800" dirty="0"/>
           </a:p>
         </p:txBody>
@@ -3752,7 +3610,7 @@
         </p:nvSpPr>
         <p:spPr>
           <a:xfrm>
-            <a:off x="1188720" y="1051560"/>
+            <a:off x="1188720" y="1044787"/>
             <a:ext cx="2926080" cy="320040"/>
           </a:xfrm>
           <a:prstGeom prst="rect">
@@ -3765,7 +3623,7 @@
           <a:bodyPr wrap="square" lIns="0" tIns="0" rIns="0" bIns="0" rtlCol="0" anchor="ctr"/>
           <a:lstStyle/>
           <a:p>
-            <a:pPr indent="0" marL="0">
+            <a:pPr marL="0" indent="0">
               <a:buNone/>
             </a:pPr>
             <a:r>
@@ -3791,7 +3649,7 @@
         </p:nvSpPr>
         <p:spPr>
           <a:xfrm>
-            <a:off x="1188720" y="1417320"/>
+            <a:off x="1180253" y="1349584"/>
             <a:ext cx="2926080" cy="594360"/>
           </a:xfrm>
           <a:prstGeom prst="rect">
@@ -3804,7 +3662,7 @@
           <a:bodyPr wrap="square" lIns="0" tIns="0" rIns="0" bIns="0" rtlCol="0" anchor="ctr"/>
           <a:lstStyle/>
           <a:p>
-            <a:pPr indent="0" marL="0">
+            <a:pPr marL="0" indent="0">
               <a:lnSpc>
                 <a:spcPct val="120000"/>
               </a:lnSpc>
@@ -3819,7 +3677,7 @@
                 <a:ea typeface="Calibri" pitchFamily="34" charset="-122"/>
                 <a:cs typeface="Calibri" pitchFamily="34" charset="-120"/>
               </a:rPr>
-              <a:t>Hire additional staff to break the understaffing-overtime-burnout cycle, especially in Cardiology and Maternity</a:t>
+              <a:t>Hire additional staff, specifically in Cardiology and Maternity. Address the highest impact factor on the departments with the highest attrition rate</a:t>
             </a:r>
             <a:endParaRPr lang="en-US" sz="1000" dirty="0"/>
           </a:p>
@@ -3827,94 +3685,13 @@
       </p:sp>
       <p:sp>
         <p:nvSpPr>
-          <p:cNvPr id="8" name="Shape 6"/>
-          <p:cNvSpPr/>
-          <p:nvPr/>
-        </p:nvSpPr>
-        <p:spPr>
-          <a:xfrm>
-            <a:off x="640080" y="2286000"/>
-            <a:ext cx="3749040" cy="1143000"/>
-          </a:xfrm>
-          <a:prstGeom prst="rect">
-            <a:avLst/>
-          </a:prstGeom>
-          <a:solidFill>
-            <a:srgbClr val="FFFFFF">
-              <a:alpha val="92000"/>
-            </a:srgbClr>
-          </a:solidFill>
-          <a:ln/>
-        </p:spPr>
-      </p:sp>
-      <p:sp>
-        <p:nvSpPr>
-          <p:cNvPr id="9" name="Shape 7"/>
-          <p:cNvSpPr/>
-          <p:nvPr/>
-        </p:nvSpPr>
-        <p:spPr>
-          <a:xfrm>
-            <a:off x="640080" y="2286000"/>
-            <a:ext cx="54864" cy="1143000"/>
-          </a:xfrm>
-          <a:prstGeom prst="rect">
-            <a:avLst/>
-          </a:prstGeom>
-          <a:solidFill>
-            <a:srgbClr val="E9C46A"/>
-          </a:solidFill>
-          <a:ln/>
-        </p:spPr>
-      </p:sp>
-      <p:sp>
-        <p:nvSpPr>
-          <p:cNvPr id="10" name="Text 8"/>
-          <p:cNvSpPr/>
-          <p:nvPr/>
-        </p:nvSpPr>
-        <p:spPr>
-          <a:xfrm>
-            <a:off x="822960" y="2377440"/>
-            <a:ext cx="365760" cy="365760"/>
-          </a:xfrm>
-          <a:prstGeom prst="rect">
-            <a:avLst/>
-          </a:prstGeom>
-          <a:noFill/>
-          <a:ln/>
-        </p:spPr>
-        <p:txBody>
-          <a:bodyPr wrap="square" lIns="0" tIns="0" rIns="0" bIns="0" rtlCol="0" anchor="ctr"/>
-          <a:lstStyle/>
-          <a:p>
-            <a:pPr indent="0" marL="0">
-              <a:buNone/>
-            </a:pPr>
-            <a:r>
-              <a:rPr lang="en-US" sz="1800" b="1" dirty="0">
-                <a:solidFill>
-                  <a:srgbClr val="E9C46A"/>
-                </a:solidFill>
-                <a:latin typeface="Georgia" pitchFamily="34" charset="0"/>
-                <a:ea typeface="Georgia" pitchFamily="34" charset="-122"/>
-                <a:cs typeface="Georgia" pitchFamily="34" charset="-120"/>
-              </a:rPr>
-              <a:t>2</a:t>
-            </a:r>
-            <a:endParaRPr lang="en-US" sz="1800" dirty="0"/>
-          </a:p>
-        </p:txBody>
-      </p:sp>
-      <p:sp>
-        <p:nvSpPr>
           <p:cNvPr id="11" name="Text 9"/>
           <p:cNvSpPr/>
           <p:nvPr/>
         </p:nvSpPr>
         <p:spPr>
           <a:xfrm>
-            <a:off x="1188720" y="2377440"/>
+            <a:off x="1188720" y="2157299"/>
             <a:ext cx="2926080" cy="320040"/>
           </a:xfrm>
           <a:prstGeom prst="rect">
@@ -3927,7 +3704,7 @@
           <a:bodyPr wrap="square" lIns="0" tIns="0" rIns="0" bIns="0" rtlCol="0" anchor="ctr"/>
           <a:lstStyle/>
           <a:p>
-            <a:pPr indent="0" marL="0">
+            <a:pPr marL="0" indent="0">
               <a:buNone/>
             </a:pPr>
             <a:r>
@@ -3953,7 +3730,7 @@
         </p:nvSpPr>
         <p:spPr>
           <a:xfrm>
-            <a:off x="1188720" y="2743200"/>
+            <a:off x="1188720" y="2514591"/>
             <a:ext cx="2926080" cy="594360"/>
           </a:xfrm>
           <a:prstGeom prst="rect">
@@ -3966,7 +3743,7 @@
           <a:bodyPr wrap="square" lIns="0" tIns="0" rIns="0" bIns="0" rtlCol="0" anchor="ctr"/>
           <a:lstStyle/>
           <a:p>
-            <a:pPr indent="0" marL="0">
+            <a:pPr marL="0" indent="0">
               <a:lnSpc>
                 <a:spcPct val="120000"/>
               </a:lnSpc>
@@ -3981,53 +3758,11 @@
                 <a:ea typeface="Calibri" pitchFamily="34" charset="-122"/>
                 <a:cs typeface="Calibri" pitchFamily="34" charset="-120"/>
               </a:rPr>
-              <a:t>Target employees earning under $3K/month where attrition is 26%. Even modest raises could have outsized impact</a:t>
+              <a:t>Target employees earning under $3K/month where attrition is 26%. Even modest raises significantly improve retention rate, as the data indicates</a:t>
             </a:r>
             <a:endParaRPr lang="en-US" sz="1000" dirty="0"/>
           </a:p>
         </p:txBody>
-      </p:sp>
-      <p:sp>
-        <p:nvSpPr>
-          <p:cNvPr id="13" name="Shape 11"/>
-          <p:cNvSpPr/>
-          <p:nvPr/>
-        </p:nvSpPr>
-        <p:spPr>
-          <a:xfrm>
-            <a:off x="640080" y="3611880"/>
-            <a:ext cx="3749040" cy="1143000"/>
-          </a:xfrm>
-          <a:prstGeom prst="rect">
-            <a:avLst/>
-          </a:prstGeom>
-          <a:solidFill>
-            <a:srgbClr val="FFFFFF">
-              <a:alpha val="92000"/>
-            </a:srgbClr>
-          </a:solidFill>
-          <a:ln/>
-        </p:spPr>
-      </p:sp>
-      <p:sp>
-        <p:nvSpPr>
-          <p:cNvPr id="14" name="Shape 12"/>
-          <p:cNvSpPr/>
-          <p:nvPr/>
-        </p:nvSpPr>
-        <p:spPr>
-          <a:xfrm>
-            <a:off x="640080" y="3611880"/>
-            <a:ext cx="54864" cy="1143000"/>
-          </a:xfrm>
-          <a:prstGeom prst="rect">
-            <a:avLst/>
-          </a:prstGeom>
-          <a:solidFill>
-            <a:srgbClr val="2A9D8F"/>
-          </a:solidFill>
-          <a:ln/>
-        </p:spPr>
       </p:sp>
       <p:sp>
         <p:nvSpPr>
@@ -4050,20 +3785,9 @@
           <a:bodyPr wrap="square" lIns="0" tIns="0" rIns="0" bIns="0" rtlCol="0" anchor="ctr"/>
           <a:lstStyle/>
           <a:p>
-            <a:pPr indent="0" marL="0">
-              <a:buNone/>
-            </a:pPr>
-            <a:r>
-              <a:rPr lang="en-US" sz="1800" b="1" dirty="0">
-                <a:solidFill>
-                  <a:srgbClr val="2A9D8F"/>
-                </a:solidFill>
-                <a:latin typeface="Georgia" pitchFamily="34" charset="0"/>
-                <a:ea typeface="Georgia" pitchFamily="34" charset="-122"/>
-                <a:cs typeface="Georgia" pitchFamily="34" charset="-120"/>
-              </a:rPr>
-              <a:t>3</a:t>
-            </a:r>
+            <a:pPr marL="0" indent="0">
+              <a:buNone/>
+            </a:pPr>
             <a:endParaRPr lang="en-US" sz="1800" dirty="0"/>
           </a:p>
         </p:txBody>
@@ -4089,33 +3813,158 @@
           <a:bodyPr wrap="square" lIns="0" tIns="0" rIns="0" bIns="0" rtlCol="0" anchor="ctr"/>
           <a:lstStyle/>
           <a:p>
-            <a:pPr indent="0" marL="0">
-              <a:buNone/>
-            </a:pPr>
+            <a:pPr marL="0" indent="0">
+              <a:buNone/>
+            </a:pPr>
+            <a:endParaRPr lang="en-US" sz="1300" dirty="0"/>
+          </a:p>
+        </p:txBody>
+      </p:sp>
+      <p:sp>
+        <p:nvSpPr>
+          <p:cNvPr id="17" name="Text 15"/>
+          <p:cNvSpPr/>
+          <p:nvPr/>
+        </p:nvSpPr>
+        <p:spPr>
+          <a:xfrm>
+            <a:off x="1188720" y="4069080"/>
+            <a:ext cx="2926080" cy="594360"/>
+          </a:xfrm>
+          <a:prstGeom prst="rect">
+            <a:avLst/>
+          </a:prstGeom>
+          <a:noFill/>
+          <a:ln/>
+        </p:spPr>
+        <p:txBody>
+          <a:bodyPr wrap="square" lIns="0" tIns="0" rIns="0" bIns="0" rtlCol="0" anchor="ctr"/>
+          <a:lstStyle/>
+          <a:p>
+            <a:pPr marL="0" indent="0">
+              <a:lnSpc>
+                <a:spcPct val="120000"/>
+              </a:lnSpc>
+              <a:buNone/>
+            </a:pPr>
+            <a:endParaRPr lang="en-US" sz="1000" dirty="0"/>
+          </a:p>
+        </p:txBody>
+      </p:sp>
+      <p:sp>
+        <p:nvSpPr>
+          <p:cNvPr id="21" name="Text 19"/>
+          <p:cNvSpPr/>
+          <p:nvPr/>
+        </p:nvSpPr>
+        <p:spPr>
+          <a:xfrm>
+            <a:off x="5318757" y="1017692"/>
+            <a:ext cx="2926080" cy="320040"/>
+          </a:xfrm>
+          <a:prstGeom prst="rect">
+            <a:avLst/>
+          </a:prstGeom>
+          <a:noFill/>
+          <a:ln/>
+        </p:spPr>
+        <p:txBody>
+          <a:bodyPr wrap="square" lIns="0" tIns="0" rIns="0" bIns="0" rtlCol="0" anchor="ctr"/>
+          <a:lstStyle/>
+          <a:p>
             <a:r>
               <a:rPr lang="en-US" sz="1300" b="1" dirty="0">
                 <a:solidFill>
                   <a:srgbClr val="FFFFFF"/>
+                </a:solidFill>
+                <a:latin typeface="Calibri" pitchFamily="34" charset="0"/>
+                <a:cs typeface="Calibri" pitchFamily="34" charset="-120"/>
+              </a:rPr>
+              <a:t>Start enacting policy which would improve work life balance</a:t>
+            </a:r>
+            <a:endParaRPr lang="en-US" sz="1300" dirty="0"/>
+          </a:p>
+        </p:txBody>
+      </p:sp>
+      <p:sp>
+        <p:nvSpPr>
+          <p:cNvPr id="22" name="Text 20"/>
+          <p:cNvSpPr/>
+          <p:nvPr/>
+        </p:nvSpPr>
+        <p:spPr>
+          <a:xfrm>
+            <a:off x="5303520" y="1417320"/>
+            <a:ext cx="2926080" cy="594360"/>
+          </a:xfrm>
+          <a:prstGeom prst="rect">
+            <a:avLst/>
+          </a:prstGeom>
+          <a:noFill/>
+          <a:ln/>
+        </p:spPr>
+        <p:txBody>
+          <a:bodyPr wrap="square" lIns="0" tIns="0" rIns="0" bIns="0" rtlCol="0" anchor="ctr"/>
+          <a:lstStyle/>
+          <a:p>
+            <a:pPr marL="0" indent="0">
+              <a:lnSpc>
+                <a:spcPct val="120000"/>
+              </a:lnSpc>
+              <a:buNone/>
+            </a:pPr>
+            <a:r>
+              <a:rPr lang="en-US" sz="1000" dirty="0">
+                <a:solidFill>
+                  <a:srgbClr val="AABBCC"/>
                 </a:solidFill>
                 <a:latin typeface="Calibri" pitchFamily="34" charset="0"/>
                 <a:ea typeface="Calibri" pitchFamily="34" charset="-122"/>
                 <a:cs typeface="Calibri" pitchFamily="34" charset="-120"/>
               </a:rPr>
-              <a:t>Strengthen the first 2 years</a:t>
-            </a:r>
+              <a:t>Flexible scheduling, predictable shift rotations, and adequate time off — especially for roles with lowest balance ratings</a:t>
+            </a:r>
+            <a:endParaRPr lang="en-US" sz="1000" dirty="0"/>
+          </a:p>
+        </p:txBody>
+      </p:sp>
+      <p:sp>
+        <p:nvSpPr>
+          <p:cNvPr id="26" name="Text 24"/>
+          <p:cNvSpPr/>
+          <p:nvPr/>
+        </p:nvSpPr>
+        <p:spPr>
+          <a:xfrm>
+            <a:off x="5303520" y="2377440"/>
+            <a:ext cx="2926080" cy="320040"/>
+          </a:xfrm>
+          <a:prstGeom prst="rect">
+            <a:avLst/>
+          </a:prstGeom>
+          <a:noFill/>
+          <a:ln/>
+        </p:spPr>
+        <p:txBody>
+          <a:bodyPr wrap="square" lIns="0" tIns="0" rIns="0" bIns="0" rtlCol="0" anchor="ctr"/>
+          <a:lstStyle/>
+          <a:p>
+            <a:pPr marL="0" indent="0">
+              <a:buNone/>
+            </a:pPr>
             <a:endParaRPr lang="en-US" sz="1300" dirty="0"/>
           </a:p>
         </p:txBody>
       </p:sp>
       <p:sp>
         <p:nvSpPr>
-          <p:cNvPr id="17" name="Text 15"/>
-          <p:cNvSpPr/>
-          <p:nvPr/>
-        </p:nvSpPr>
-        <p:spPr>
-          <a:xfrm>
-            <a:off x="1188720" y="4069080"/>
+          <p:cNvPr id="27" name="Text 25"/>
+          <p:cNvSpPr/>
+          <p:nvPr/>
+        </p:nvSpPr>
+        <p:spPr>
+          <a:xfrm>
+            <a:off x="5303520" y="2743200"/>
             <a:ext cx="2926080" cy="594360"/>
           </a:xfrm>
           <a:prstGeom prst="rect">
@@ -4128,22 +3977,50 @@
           <a:bodyPr wrap="square" lIns="0" tIns="0" rIns="0" bIns="0" rtlCol="0" anchor="ctr"/>
           <a:lstStyle/>
           <a:p>
-            <a:pPr indent="0" marL="0">
+            <a:pPr marL="0" indent="0">
               <a:lnSpc>
                 <a:spcPct val="120000"/>
               </a:lnSpc>
               <a:buNone/>
             </a:pPr>
+            <a:endParaRPr lang="en-US" sz="1000" dirty="0"/>
+          </a:p>
+        </p:txBody>
+      </p:sp>
+      <p:sp>
+        <p:nvSpPr>
+          <p:cNvPr id="33" name="Text 31"/>
+          <p:cNvSpPr/>
+          <p:nvPr/>
+        </p:nvSpPr>
+        <p:spPr>
+          <a:xfrm>
+            <a:off x="640080" y="4663440"/>
+            <a:ext cx="7863840" cy="274320"/>
+          </a:xfrm>
+          <a:prstGeom prst="rect">
+            <a:avLst/>
+          </a:prstGeom>
+          <a:noFill/>
+          <a:ln/>
+        </p:spPr>
+        <p:txBody>
+          <a:bodyPr wrap="square" lIns="0" tIns="0" rIns="0" bIns="0" rtlCol="0" anchor="ctr"/>
+          <a:lstStyle/>
+          <a:p>
+            <a:pPr marL="0" indent="0">
+              <a:buNone/>
+            </a:pPr>
             <a:r>
               <a:rPr lang="en-US" sz="1000" dirty="0">
                 <a:solidFill>
-                  <a:srgbClr val="AABBCC"/>
+                  <a:srgbClr val="667799"/>
                 </a:solidFill>
                 <a:latin typeface="Calibri" pitchFamily="34" charset="0"/>
                 <a:ea typeface="Calibri" pitchFamily="34" charset="-122"/>
                 <a:cs typeface="Calibri" pitchFamily="34" charset="-120"/>
               </a:rPr>
-              <a:t>Structured mentorship, 30-60-90 day check-ins, and buddy systems to address the 27.65% early attrition rate</a:t>
+              <a:t>Analysis by S. Jai Varanasi  |  InsightArc Analytics  |  March 2026</a:t>
             </a:r>
             <a:endParaRPr lang="en-US" sz="1000" dirty="0"/>
           </a:p>
@@ -4151,94 +4028,76 @@
       </p:sp>
       <p:sp>
         <p:nvSpPr>
-          <p:cNvPr id="18" name="Shape 16"/>
-          <p:cNvSpPr/>
-          <p:nvPr/>
-        </p:nvSpPr>
-        <p:spPr>
-          <a:xfrm>
-            <a:off x="4754880" y="960120"/>
-            <a:ext cx="3749040" cy="1143000"/>
-          </a:xfrm>
-          <a:prstGeom prst="rect">
-            <a:avLst/>
-          </a:prstGeom>
-          <a:solidFill>
-            <a:srgbClr val="FFFFFF">
-              <a:alpha val="92000"/>
-            </a:srgbClr>
-          </a:solidFill>
-          <a:ln/>
-        </p:spPr>
-      </p:sp>
-      <p:sp>
-        <p:nvSpPr>
-          <p:cNvPr id="19" name="Shape 17"/>
-          <p:cNvSpPr/>
-          <p:nvPr/>
-        </p:nvSpPr>
-        <p:spPr>
-          <a:xfrm>
-            <a:off x="4754880" y="960120"/>
-            <a:ext cx="54864" cy="1143000"/>
-          </a:xfrm>
-          <a:prstGeom prst="rect">
-            <a:avLst/>
-          </a:prstGeom>
-          <a:solidFill>
-            <a:srgbClr val="2A9D8F"/>
-          </a:solidFill>
-          <a:ln/>
-        </p:spPr>
-      </p:sp>
-      <p:sp>
-        <p:nvSpPr>
-          <p:cNvPr id="20" name="Text 18"/>
-          <p:cNvSpPr/>
-          <p:nvPr/>
-        </p:nvSpPr>
-        <p:spPr>
-          <a:xfrm>
-            <a:off x="4937760" y="1051560"/>
-            <a:ext cx="365760" cy="365760"/>
-          </a:xfrm>
-          <a:prstGeom prst="rect">
-            <a:avLst/>
-          </a:prstGeom>
-          <a:noFill/>
-          <a:ln/>
-        </p:spPr>
-        <p:txBody>
-          <a:bodyPr wrap="square" lIns="0" tIns="0" rIns="0" bIns="0" rtlCol="0" anchor="ctr"/>
-          <a:lstStyle/>
-          <a:p>
-            <a:pPr indent="0" marL="0">
-              <a:buNone/>
-            </a:pPr>
-            <a:r>
-              <a:rPr lang="en-US" sz="1800" b="1" dirty="0">
-                <a:solidFill>
-                  <a:srgbClr val="2A9D8F"/>
-                </a:solidFill>
-                <a:latin typeface="Georgia" pitchFamily="34" charset="0"/>
-                <a:ea typeface="Georgia" pitchFamily="34" charset="-122"/>
-                <a:cs typeface="Georgia" pitchFamily="34" charset="-120"/>
-              </a:rPr>
-              <a:t>4</a:t>
-            </a:r>
-            <a:endParaRPr lang="en-US" sz="1800" dirty="0"/>
-          </a:p>
-        </p:txBody>
-      </p:sp>
-      <p:sp>
-        <p:nvSpPr>
-          <p:cNvPr id="21" name="Text 19"/>
-          <p:cNvSpPr/>
-          <p:nvPr/>
-        </p:nvSpPr>
-        <p:spPr>
-          <a:xfrm>
-            <a:off x="5303520" y="1051560"/>
+          <p:cNvPr id="35" name="TextBox 34">
+            <a:extLst>
+              <a:ext uri="{FF2B5EF4-FFF2-40B4-BE49-F238E27FC236}">
+                <a16:creationId xmlns:a16="http://schemas.microsoft.com/office/drawing/2014/main" id="{D75EEF92-9C81-BB16-9D5B-CBA657775446}"/>
+              </a:ext>
+            </a:extLst>
+          </p:cNvPr>
+          <p:cNvSpPr txBox="1"/>
+          <p:nvPr/>
+        </p:nvSpPr>
+        <p:spPr>
+          <a:xfrm>
+            <a:off x="5269652" y="2697480"/>
+            <a:ext cx="2926079" cy="1446550"/>
+          </a:xfrm>
+          <a:prstGeom prst="rect">
+            <a:avLst/>
+          </a:prstGeom>
+          <a:noFill/>
+        </p:spPr>
+        <p:txBody>
+          <a:bodyPr wrap="square" rtlCol="0">
+            <a:spAutoFit/>
+          </a:bodyPr>
+          <a:lstStyle/>
+          <a:p>
+            <a:r>
+              <a:rPr lang="en-US" sz="1000" dirty="0">
+                <a:solidFill>
+                  <a:srgbClr val="AABBCC"/>
+                </a:solidFill>
+                <a:latin typeface="Calibri" panose="020F0502020204030204" pitchFamily="34" charset="0"/>
+                <a:ea typeface="Calibri" pitchFamily="34" charset="-122"/>
+                <a:cs typeface="Calibri" panose="020F0502020204030204" pitchFamily="34" charset="0"/>
+              </a:rPr>
+              <a:t>Significantly Focus efforts on the early career segment of the employment pool: Mentorship programs, career-ladder programs, etc. Lack of training was a major attrition factor, so implementing a new more robust training program would drive attrition down.</a:t>
+            </a:r>
+            <a:endParaRPr lang="en-US" sz="1000" dirty="0">
+              <a:solidFill>
+                <a:schemeClr val="bg1">
+                  <a:lumMod val="85000"/>
+                </a:schemeClr>
+              </a:solidFill>
+              <a:latin typeface="Calibri" panose="020F0502020204030204" pitchFamily="34" charset="0"/>
+              <a:cs typeface="Calibri" panose="020F0502020204030204" pitchFamily="34" charset="0"/>
+            </a:endParaRPr>
+          </a:p>
+          <a:p>
+            <a:endParaRPr lang="en-US" sz="1000" dirty="0"/>
+          </a:p>
+          <a:p>
+            <a:endParaRPr lang="en-US" dirty="0"/>
+          </a:p>
+        </p:txBody>
+      </p:sp>
+      <p:sp>
+        <p:nvSpPr>
+          <p:cNvPr id="36" name="Text 9">
+            <a:extLst>
+              <a:ext uri="{FF2B5EF4-FFF2-40B4-BE49-F238E27FC236}">
+                <a16:creationId xmlns:a16="http://schemas.microsoft.com/office/drawing/2014/main" id="{25171E3A-E17F-F93E-8DD1-1C0798399F10}"/>
+              </a:ext>
+            </a:extLst>
+          </p:cNvPr>
+          <p:cNvSpPr/>
+          <p:nvPr/>
+        </p:nvSpPr>
+        <p:spPr>
+          <a:xfrm>
+            <a:off x="5352625" y="2377440"/>
             <a:ext cx="2926080" cy="320040"/>
           </a:xfrm>
           <a:prstGeom prst="rect">
@@ -4251,53 +4110,113 @@
           <a:bodyPr wrap="square" lIns="0" tIns="0" rIns="0" bIns="0" rtlCol="0" anchor="ctr"/>
           <a:lstStyle/>
           <a:p>
-            <a:pPr indent="0" marL="0">
+            <a:pPr marL="0" indent="0">
               <a:buNone/>
             </a:pPr>
             <a:r>
               <a:rPr lang="en-US" sz="1300" b="1" dirty="0">
                 <a:solidFill>
                   <a:srgbClr val="FFFFFF"/>
+                </a:solidFill>
+                <a:latin typeface="Calibri" pitchFamily="34" charset="0"/>
+                <a:cs typeface="Calibri" pitchFamily="34" charset="-120"/>
+              </a:rPr>
+              <a:t>Overhaul Onboarding Training Program</a:t>
+            </a:r>
+            <a:endParaRPr lang="en-US" sz="1300" dirty="0"/>
+          </a:p>
+        </p:txBody>
+      </p:sp>
+      <p:sp>
+        <p:nvSpPr>
+          <p:cNvPr id="37" name="Text 9">
+            <a:extLst>
+              <a:ext uri="{FF2B5EF4-FFF2-40B4-BE49-F238E27FC236}">
+                <a16:creationId xmlns:a16="http://schemas.microsoft.com/office/drawing/2014/main" id="{C8AA48C2-5303-1FB4-37FF-2B50C5E1F6C7}"/>
+              </a:ext>
+            </a:extLst>
+          </p:cNvPr>
+          <p:cNvSpPr/>
+          <p:nvPr/>
+        </p:nvSpPr>
+        <p:spPr>
+          <a:xfrm>
+            <a:off x="1188720" y="3370579"/>
+            <a:ext cx="2926080" cy="320040"/>
+          </a:xfrm>
+          <a:prstGeom prst="rect">
+            <a:avLst/>
+          </a:prstGeom>
+          <a:noFill/>
+          <a:ln/>
+        </p:spPr>
+        <p:txBody>
+          <a:bodyPr wrap="square" lIns="0" tIns="0" rIns="0" bIns="0" rtlCol="0" anchor="ctr"/>
+          <a:lstStyle/>
+          <a:p>
+            <a:pPr marL="0" indent="0">
+              <a:buNone/>
+            </a:pPr>
+            <a:r>
+              <a:rPr lang="en-US" sz="1300" b="1" dirty="0">
+                <a:solidFill>
+                  <a:srgbClr val="FFFFFF"/>
+                </a:solidFill>
+                <a:latin typeface="Calibri" pitchFamily="34" charset="0"/>
+                <a:cs typeface="Calibri" pitchFamily="34" charset="-120"/>
+              </a:rPr>
+              <a:t>Implement a Nursing-Specific Retention Program</a:t>
+            </a:r>
+            <a:endParaRPr lang="en-US" sz="1300" dirty="0"/>
+          </a:p>
+        </p:txBody>
+      </p:sp>
+      <p:sp>
+        <p:nvSpPr>
+          <p:cNvPr id="39" name="Text 10">
+            <a:extLst>
+              <a:ext uri="{FF2B5EF4-FFF2-40B4-BE49-F238E27FC236}">
+                <a16:creationId xmlns:a16="http://schemas.microsoft.com/office/drawing/2014/main" id="{CD35A4B9-3193-2DDC-C534-81EF6EEE0929}"/>
+              </a:ext>
+            </a:extLst>
+          </p:cNvPr>
+          <p:cNvSpPr/>
+          <p:nvPr/>
+        </p:nvSpPr>
+        <p:spPr>
+          <a:xfrm>
+            <a:off x="1180253" y="3874348"/>
+            <a:ext cx="2926080" cy="594360"/>
+          </a:xfrm>
+          <a:prstGeom prst="rect">
+            <a:avLst/>
+          </a:prstGeom>
+          <a:noFill/>
+          <a:ln/>
+        </p:spPr>
+        <p:txBody>
+          <a:bodyPr wrap="square" lIns="0" tIns="0" rIns="0" bIns="0" rtlCol="0" anchor="ctr"/>
+          <a:lstStyle/>
+          <a:p>
+            <a:pPr marL="0" indent="0">
+              <a:lnSpc>
+                <a:spcPct val="120000"/>
+              </a:lnSpc>
+              <a:buNone/>
+            </a:pPr>
+            <a:r>
+              <a:rPr lang="en-US" sz="1000" dirty="0">
+                <a:solidFill>
+                  <a:srgbClr val="AABBCC"/>
                 </a:solidFill>
                 <a:latin typeface="Calibri" pitchFamily="34" charset="0"/>
                 <a:ea typeface="Calibri" pitchFamily="34" charset="-122"/>
                 <a:cs typeface="Calibri" pitchFamily="34" charset="-120"/>
               </a:rPr>
-              <a:t>Improve work-life balance</a:t>
-            </a:r>
-            <a:endParaRPr lang="en-US" sz="1300" dirty="0"/>
-          </a:p>
-        </p:txBody>
-      </p:sp>
-      <p:sp>
-        <p:nvSpPr>
-          <p:cNvPr id="22" name="Text 20"/>
-          <p:cNvSpPr/>
-          <p:nvPr/>
-        </p:nvSpPr>
-        <p:spPr>
-          <a:xfrm>
-            <a:off x="5303520" y="1417320"/>
-            <a:ext cx="2926080" cy="594360"/>
-          </a:xfrm>
-          <a:prstGeom prst="rect">
-            <a:avLst/>
-          </a:prstGeom>
-          <a:noFill/>
-          <a:ln/>
-        </p:spPr>
-        <p:txBody>
-          <a:bodyPr wrap="square" lIns="0" tIns="0" rIns="0" bIns="0" rtlCol="0" anchor="ctr"/>
-          <a:lstStyle/>
-          <a:p>
-            <a:pPr indent="0" marL="0">
-              <a:lnSpc>
-                <a:spcPct val="120000"/>
-              </a:lnSpc>
-              <a:buNone/>
-            </a:pPr>
-            <a:r>
-              <a:rPr lang="en-US" sz="1000" dirty="0">
+              <a:t>Start an incentive program for nurses by offering bonuses, priority scheduling initiatives, </a:t>
+            </a:r>
+            <a:r>
+              <a:rPr lang="en-US" sz="1000" dirty="0" err="1">
                 <a:solidFill>
                   <a:srgbClr val="AABBCC"/>
                 </a:solidFill>
@@ -4305,372 +4224,19 @@
                 <a:ea typeface="Calibri" pitchFamily="34" charset="-122"/>
                 <a:cs typeface="Calibri" pitchFamily="34" charset="-120"/>
               </a:rPr>
-              <a:t>Flexible scheduling, predictable shift rotations, and adequate time off — especially for roles with lowest balance ratings</a:t>
-            </a:r>
-            <a:endParaRPr lang="en-US" sz="1000" dirty="0"/>
-          </a:p>
-        </p:txBody>
-      </p:sp>
-      <p:sp>
-        <p:nvSpPr>
-          <p:cNvPr id="23" name="Shape 21"/>
-          <p:cNvSpPr/>
-          <p:nvPr/>
-        </p:nvSpPr>
-        <p:spPr>
-          <a:xfrm>
-            <a:off x="4754880" y="2286000"/>
-            <a:ext cx="3749040" cy="1143000"/>
-          </a:xfrm>
-          <a:prstGeom prst="rect">
-            <a:avLst/>
-          </a:prstGeom>
-          <a:solidFill>
-            <a:srgbClr val="FFFFFF">
-              <a:alpha val="92000"/>
-            </a:srgbClr>
-          </a:solidFill>
-          <a:ln/>
-        </p:spPr>
-      </p:sp>
-      <p:sp>
-        <p:nvSpPr>
-          <p:cNvPr id="24" name="Shape 22"/>
-          <p:cNvSpPr/>
-          <p:nvPr/>
-        </p:nvSpPr>
-        <p:spPr>
-          <a:xfrm>
-            <a:off x="4754880" y="2286000"/>
-            <a:ext cx="54864" cy="1143000"/>
-          </a:xfrm>
-          <a:prstGeom prst="rect">
-            <a:avLst/>
-          </a:prstGeom>
-          <a:solidFill>
-            <a:srgbClr val="2A9D8F"/>
-          </a:solidFill>
-          <a:ln/>
-        </p:spPr>
-      </p:sp>
-      <p:sp>
-        <p:nvSpPr>
-          <p:cNvPr id="25" name="Text 23"/>
-          <p:cNvSpPr/>
-          <p:nvPr/>
-        </p:nvSpPr>
-        <p:spPr>
-          <a:xfrm>
-            <a:off x="4937760" y="2377440"/>
-            <a:ext cx="365760" cy="365760"/>
-          </a:xfrm>
-          <a:prstGeom prst="rect">
-            <a:avLst/>
-          </a:prstGeom>
-          <a:noFill/>
-          <a:ln/>
-        </p:spPr>
-        <p:txBody>
-          <a:bodyPr wrap="square" lIns="0" tIns="0" rIns="0" bIns="0" rtlCol="0" anchor="ctr"/>
-          <a:lstStyle/>
-          <a:p>
-            <a:pPr indent="0" marL="0">
-              <a:buNone/>
-            </a:pPr>
-            <a:r>
-              <a:rPr lang="en-US" sz="1800" b="1" dirty="0">
-                <a:solidFill>
-                  <a:srgbClr val="2A9D8F"/>
-                </a:solidFill>
-                <a:latin typeface="Georgia" pitchFamily="34" charset="0"/>
-                <a:ea typeface="Georgia" pitchFamily="34" charset="-122"/>
-                <a:cs typeface="Georgia" pitchFamily="34" charset="-120"/>
-              </a:rPr>
-              <a:t>5</a:t>
-            </a:r>
-            <a:endParaRPr lang="en-US" sz="1800" dirty="0"/>
-          </a:p>
-        </p:txBody>
-      </p:sp>
-      <p:sp>
-        <p:nvSpPr>
-          <p:cNvPr id="26" name="Text 24"/>
-          <p:cNvSpPr/>
-          <p:nvPr/>
-        </p:nvSpPr>
-        <p:spPr>
-          <a:xfrm>
-            <a:off x="5303520" y="2377440"/>
-            <a:ext cx="2926080" cy="320040"/>
-          </a:xfrm>
-          <a:prstGeom prst="rect">
-            <a:avLst/>
-          </a:prstGeom>
-          <a:noFill/>
-          <a:ln/>
-        </p:spPr>
-        <p:txBody>
-          <a:bodyPr wrap="square" lIns="0" tIns="0" rIns="0" bIns="0" rtlCol="0" anchor="ctr"/>
-          <a:lstStyle/>
-          <a:p>
-            <a:pPr indent="0" marL="0">
-              <a:buNone/>
-            </a:pPr>
-            <a:r>
-              <a:rPr lang="en-US" sz="1300" b="1" dirty="0">
-                <a:solidFill>
-                  <a:srgbClr val="FFFFFF"/>
+              <a:t>etc</a:t>
+            </a:r>
+            <a:r>
+              <a:rPr lang="en-US" sz="1000" dirty="0">
+                <a:solidFill>
+                  <a:srgbClr val="AABBCC"/>
                 </a:solidFill>
                 <a:latin typeface="Calibri" pitchFamily="34" charset="0"/>
                 <a:ea typeface="Calibri" pitchFamily="34" charset="-122"/>
                 <a:cs typeface="Calibri" pitchFamily="34" charset="-120"/>
               </a:rPr>
-              <a:t>Create nurse-specific retention programs</a:t>
-            </a:r>
-            <a:endParaRPr lang="en-US" sz="1300" dirty="0"/>
-          </a:p>
-        </p:txBody>
-      </p:sp>
-      <p:sp>
-        <p:nvSpPr>
-          <p:cNvPr id="27" name="Text 25"/>
-          <p:cNvSpPr/>
-          <p:nvPr/>
-        </p:nvSpPr>
-        <p:spPr>
-          <a:xfrm>
-            <a:off x="5303520" y="2743200"/>
-            <a:ext cx="2926080" cy="594360"/>
-          </a:xfrm>
-          <a:prstGeom prst="rect">
-            <a:avLst/>
-          </a:prstGeom>
-          <a:noFill/>
-          <a:ln/>
-        </p:spPr>
-        <p:txBody>
-          <a:bodyPr wrap="square" lIns="0" tIns="0" rIns="0" bIns="0" rtlCol="0" anchor="ctr"/>
-          <a:lstStyle/>
-          <a:p>
-            <a:pPr indent="0" marL="0">
-              <a:lnSpc>
-                <a:spcPct val="120000"/>
-              </a:lnSpc>
-              <a:buNone/>
-            </a:pPr>
-            <a:r>
-              <a:rPr lang="en-US" sz="1000" dirty="0">
-                <a:solidFill>
-                  <a:srgbClr val="AABBCC"/>
-                </a:solidFill>
-                <a:latin typeface="Calibri" pitchFamily="34" charset="0"/>
-                <a:ea typeface="Calibri" pitchFamily="34" charset="-122"/>
-                <a:cs typeface="Calibri" pitchFamily="34" charset="-120"/>
-              </a:rPr>
-              <a:t>Career ladders, specialty training, and retention bonuses for the largest at-risk population (822 nurses, 13% attrition)</a:t>
-            </a:r>
-            <a:endParaRPr lang="en-US" sz="1000" dirty="0"/>
-          </a:p>
-        </p:txBody>
-      </p:sp>
-      <p:sp>
-        <p:nvSpPr>
-          <p:cNvPr id="28" name="Shape 26"/>
-          <p:cNvSpPr/>
-          <p:nvPr/>
-        </p:nvSpPr>
-        <p:spPr>
-          <a:xfrm>
-            <a:off x="4754880" y="3611880"/>
-            <a:ext cx="3749040" cy="1143000"/>
-          </a:xfrm>
-          <a:prstGeom prst="rect">
-            <a:avLst/>
-          </a:prstGeom>
-          <a:solidFill>
-            <a:srgbClr val="FFFFFF">
-              <a:alpha val="92000"/>
-            </a:srgbClr>
-          </a:solidFill>
-          <a:ln/>
-        </p:spPr>
-      </p:sp>
-      <p:sp>
-        <p:nvSpPr>
-          <p:cNvPr id="29" name="Shape 27"/>
-          <p:cNvSpPr/>
-          <p:nvPr/>
-        </p:nvSpPr>
-        <p:spPr>
-          <a:xfrm>
-            <a:off x="4754880" y="3611880"/>
-            <a:ext cx="54864" cy="1143000"/>
-          </a:xfrm>
-          <a:prstGeom prst="rect">
-            <a:avLst/>
-          </a:prstGeom>
-          <a:solidFill>
-            <a:srgbClr val="E9C46A"/>
-          </a:solidFill>
-          <a:ln/>
-        </p:spPr>
-      </p:sp>
-      <p:sp>
-        <p:nvSpPr>
-          <p:cNvPr id="30" name="Text 28"/>
-          <p:cNvSpPr/>
-          <p:nvPr/>
-        </p:nvSpPr>
-        <p:spPr>
-          <a:xfrm>
-            <a:off x="4937760" y="3703320"/>
-            <a:ext cx="365760" cy="365760"/>
-          </a:xfrm>
-          <a:prstGeom prst="rect">
-            <a:avLst/>
-          </a:prstGeom>
-          <a:noFill/>
-          <a:ln/>
-        </p:spPr>
-        <p:txBody>
-          <a:bodyPr wrap="square" lIns="0" tIns="0" rIns="0" bIns="0" rtlCol="0" anchor="ctr"/>
-          <a:lstStyle/>
-          <a:p>
-            <a:pPr indent="0" marL="0">
-              <a:buNone/>
-            </a:pPr>
-            <a:r>
-              <a:rPr lang="en-US" sz="1800" b="1" dirty="0">
-                <a:solidFill>
-                  <a:srgbClr val="E9C46A"/>
-                </a:solidFill>
-                <a:latin typeface="Georgia" pitchFamily="34" charset="0"/>
-                <a:ea typeface="Georgia" pitchFamily="34" charset="-122"/>
-                <a:cs typeface="Georgia" pitchFamily="34" charset="-120"/>
-              </a:rPr>
-              <a:t>6</a:t>
-            </a:r>
-            <a:endParaRPr lang="en-US" sz="1800" dirty="0"/>
-          </a:p>
-        </p:txBody>
-      </p:sp>
-      <p:sp>
-        <p:nvSpPr>
-          <p:cNvPr id="31" name="Text 29"/>
-          <p:cNvSpPr/>
-          <p:nvPr/>
-        </p:nvSpPr>
-        <p:spPr>
-          <a:xfrm>
-            <a:off x="5303520" y="3703320"/>
-            <a:ext cx="2926080" cy="320040"/>
-          </a:xfrm>
-          <a:prstGeom prst="rect">
-            <a:avLst/>
-          </a:prstGeom>
-          <a:noFill/>
-          <a:ln/>
-        </p:spPr>
-        <p:txBody>
-          <a:bodyPr wrap="square" lIns="0" tIns="0" rIns="0" bIns="0" rtlCol="0" anchor="ctr"/>
-          <a:lstStyle/>
-          <a:p>
-            <a:pPr indent="0" marL="0">
-              <a:buNone/>
-            </a:pPr>
-            <a:r>
-              <a:rPr lang="en-US" sz="1300" b="1" dirty="0">
-                <a:solidFill>
-                  <a:srgbClr val="FFFFFF"/>
-                </a:solidFill>
-                <a:latin typeface="Calibri" pitchFamily="34" charset="0"/>
-                <a:ea typeface="Calibri" pitchFamily="34" charset="-122"/>
-                <a:cs typeface="Calibri" pitchFamily="34" charset="-120"/>
-              </a:rPr>
-              <a:t>Ensure basic training for all employees</a:t>
-            </a:r>
-            <a:endParaRPr lang="en-US" sz="1300" dirty="0"/>
-          </a:p>
-        </p:txBody>
-      </p:sp>
-      <p:sp>
-        <p:nvSpPr>
-          <p:cNvPr id="32" name="Text 30"/>
-          <p:cNvSpPr/>
-          <p:nvPr/>
-        </p:nvSpPr>
-        <p:spPr>
-          <a:xfrm>
-            <a:off x="5303520" y="4069080"/>
-            <a:ext cx="2926080" cy="594360"/>
-          </a:xfrm>
-          <a:prstGeom prst="rect">
-            <a:avLst/>
-          </a:prstGeom>
-          <a:noFill/>
-          <a:ln/>
-        </p:spPr>
-        <p:txBody>
-          <a:bodyPr wrap="square" lIns="0" tIns="0" rIns="0" bIns="0" rtlCol="0" anchor="ctr"/>
-          <a:lstStyle/>
-          <a:p>
-            <a:pPr indent="0" marL="0">
-              <a:lnSpc>
-                <a:spcPct val="120000"/>
-              </a:lnSpc>
-              <a:buNone/>
-            </a:pPr>
-            <a:r>
-              <a:rPr lang="en-US" sz="1000" dirty="0">
-                <a:solidFill>
-                  <a:srgbClr val="AABBCC"/>
-                </a:solidFill>
-                <a:latin typeface="Calibri" pitchFamily="34" charset="0"/>
-                <a:ea typeface="Calibri" pitchFamily="34" charset="-122"/>
-                <a:cs typeface="Calibri" pitchFamily="34" charset="-120"/>
-              </a:rPr>
-              <a:t>Zero-training employees leave at 21.3%. Even one session drops attrition to 5.95%</a:t>
-            </a:r>
-            <a:endParaRPr lang="en-US" sz="1000" dirty="0"/>
-          </a:p>
-        </p:txBody>
-      </p:sp>
-      <p:sp>
-        <p:nvSpPr>
-          <p:cNvPr id="33" name="Text 31"/>
-          <p:cNvSpPr/>
-          <p:nvPr/>
-        </p:nvSpPr>
-        <p:spPr>
-          <a:xfrm>
-            <a:off x="640080" y="4663440"/>
-            <a:ext cx="7863840" cy="274320"/>
-          </a:xfrm>
-          <a:prstGeom prst="rect">
-            <a:avLst/>
-          </a:prstGeom>
-          <a:noFill/>
-          <a:ln/>
-        </p:spPr>
-        <p:txBody>
-          <a:bodyPr wrap="square" lIns="0" tIns="0" rIns="0" bIns="0" rtlCol="0" anchor="ctr"/>
-          <a:lstStyle/>
-          <a:p>
-            <a:pPr indent="0" marL="0">
-              <a:buNone/>
-            </a:pPr>
-            <a:r>
-              <a:rPr lang="en-US" sz="1000" dirty="0">
-                <a:solidFill>
-                  <a:srgbClr val="667799"/>
-                </a:solidFill>
-                <a:latin typeface="Calibri" pitchFamily="34" charset="0"/>
-                <a:ea typeface="Calibri" pitchFamily="34" charset="-122"/>
-                <a:cs typeface="Calibri" pitchFamily="34" charset="-120"/>
-              </a:rPr>
-              <a:t>Analysis by S. Jai Varanasi  |  InsightArc Analytics  |  March 2026</a:t>
-            </a:r>
-            <a:endParaRPr lang="en-US" sz="1000" dirty="0"/>
+              <a:t>, to address this group specifically, as this is one of the highest attrition categories</a:t>
+            </a:r>
           </a:p>
         </p:txBody>
       </p:sp>
@@ -4690,6 +4256,7 @@
         <a:solidFill>
           <a:srgbClr val="FFFFFF"/>
         </a:solidFill>
+        <a:effectLst/>
       </p:bgPr>
     </p:bg>
     <p:spTree>
@@ -4708,26 +4275,6 @@
       </p:grpSpPr>
       <p:sp>
         <p:nvSpPr>
-          <p:cNvPr id="2" name="Shape 0"/>
-          <p:cNvSpPr/>
-          <p:nvPr/>
-        </p:nvSpPr>
-        <p:spPr>
-          <a:xfrm>
-            <a:off x="0" y="0"/>
-            <a:ext cx="73152" cy="5143500"/>
-          </a:xfrm>
-          <a:prstGeom prst="rect">
-            <a:avLst/>
-          </a:prstGeom>
-          <a:solidFill>
-            <a:srgbClr val="E76F51"/>
-          </a:solidFill>
-          <a:ln/>
-        </p:spPr>
-      </p:sp>
-      <p:sp>
-        <p:nvSpPr>
           <p:cNvPr id="3" name="Text 1"/>
           <p:cNvSpPr/>
           <p:nvPr/>
@@ -4747,7 +4294,7 @@
           <a:bodyPr wrap="square" lIns="0" tIns="0" rIns="0" bIns="0" rtlCol="0" anchor="ctr"/>
           <a:lstStyle/>
           <a:p>
-            <a:pPr indent="0" marL="0">
+            <a:pPr marL="0" indent="0">
               <a:buNone/>
             </a:pPr>
             <a:r>
@@ -4784,6 +4331,13 @@
           </a:solidFill>
           <a:ln/>
         </p:spPr>
+        <p:txBody>
+          <a:bodyPr/>
+          <a:lstStyle/>
+          <a:p>
+            <a:endParaRPr lang="en-US"/>
+          </a:p>
+        </p:txBody>
       </p:sp>
       <p:sp>
         <p:nvSpPr>
@@ -4806,7 +4360,7 @@
           <a:bodyPr wrap="square" lIns="0" tIns="0" rIns="0" bIns="0" rtlCol="0" anchor="ctr"/>
           <a:lstStyle/>
           <a:p>
-            <a:pPr indent="0" marL="0">
+            <a:pPr marL="0" indent="0">
               <a:lnSpc>
                 <a:spcPct val="130000"/>
               </a:lnSpc>
@@ -4815,7 +4369,7 @@
             <a:r>
               <a:rPr lang="en-US" sz="1300" b="1" dirty="0">
                 <a:solidFill>
-                  <a:srgbClr val="E76F51"/>
+                  <a:srgbClr val="C00000"/>
                 </a:solidFill>
                 <a:latin typeface="Calibri" pitchFamily="34" charset="0"/>
                 <a:ea typeface="Calibri" pitchFamily="34" charset="-122"/>
@@ -4823,22 +4377,69 @@
               </a:rPr>
               <a:t>The problem: </a:t>
             </a:r>
-            <a:pPr indent="0" marL="0">
+            <a:r>
+              <a:rPr lang="en-US" sz="1300" dirty="0">
+                <a:solidFill>
+                  <a:srgbClr val="2C2C2C"/>
+                </a:solidFill>
+                <a:latin typeface="Calibri" pitchFamily="34" charset="0"/>
+                <a:ea typeface="Calibri" pitchFamily="34" charset="-122"/>
+                <a:cs typeface="Calibri" pitchFamily="34" charset="-120"/>
+              </a:rPr>
+              <a:t>Watson Healthcare is experiencing an 11.87% attrition rate across 1,676 employees, with 199 departures. While below industry average, the financial and operational impact is significant — each departure costs 0.5-2x annual salary to replace.</a:t>
+            </a:r>
+            <a:endParaRPr lang="en-US" sz="1300" dirty="0"/>
+          </a:p>
+        </p:txBody>
+      </p:sp>
+      <p:sp>
+        <p:nvSpPr>
+          <p:cNvPr id="6" name="Text 4"/>
+          <p:cNvSpPr/>
+          <p:nvPr/>
+        </p:nvSpPr>
+        <p:spPr>
+          <a:xfrm>
+            <a:off x="640080" y="1828800"/>
+            <a:ext cx="7863840" cy="822960"/>
+          </a:xfrm>
+          <a:prstGeom prst="rect">
+            <a:avLst/>
+          </a:prstGeom>
+          <a:noFill/>
+          <a:ln/>
+        </p:spPr>
+        <p:txBody>
+          <a:bodyPr wrap="square" lIns="0" tIns="0" rIns="0" bIns="0" rtlCol="0" anchor="ctr"/>
+          <a:lstStyle/>
+          <a:p>
+            <a:pPr marL="0" indent="0">
               <a:lnSpc>
                 <a:spcPct val="130000"/>
               </a:lnSpc>
               <a:buNone/>
             </a:pPr>
             <a:r>
-              <a:rPr lang="en-US" sz="1300" dirty="0">
-                <a:solidFill>
-                  <a:srgbClr val="2C2C2C"/>
+              <a:rPr lang="en-US" sz="1300" b="1" dirty="0">
+                <a:solidFill>
+                  <a:srgbClr val="C00000"/>
                 </a:solidFill>
                 <a:latin typeface="Calibri" pitchFamily="34" charset="0"/>
                 <a:ea typeface="Calibri" pitchFamily="34" charset="-122"/>
                 <a:cs typeface="Calibri" pitchFamily="34" charset="-120"/>
               </a:rPr>
-              <a:t>Watson Healthcare is experiencing an 11.87% attrition rate across 1,676 employees, with 199 departures. While below industry average, the financial and operational impact is significant — each departure costs 0.5-2x annual salary to replace.</a:t>
+              <a:t>The single biggest finding: </a:t>
+            </a:r>
+            <a:r>
+              <a:rPr lang="en-US" sz="1300" dirty="0">
+                <a:solidFill>
+                  <a:srgbClr val="2C2C2C"/>
+                </a:solidFill>
+                <a:latin typeface="Calibri" pitchFamily="34" charset="0"/>
+                <a:ea typeface="Calibri" pitchFamily="34" charset="-122"/>
+                <a:cs typeface="Calibri" pitchFamily="34" charset="-120"/>
+              </a:rPr>
+              <a:t>Overtime is the dominant predictor of attrition. Employees who work overtime leave at 29.2% — nearly 6x the rate of non-overtime workers (5.0%). This creates a vicious cycle: understaffing leads to overtime, which causes burnout, which causes more departures, which creates more understaffing.</a:t>
             </a:r>
             <a:endParaRPr lang="en-US" sz="1300" dirty="0"/>
           </a:p>
@@ -4846,26 +4447,26 @@
       </p:sp>
       <p:sp>
         <p:nvSpPr>
-          <p:cNvPr id="6" name="Text 4"/>
-          <p:cNvSpPr/>
-          <p:nvPr/>
-        </p:nvSpPr>
-        <p:spPr>
-          <a:xfrm>
-            <a:off x="640080" y="1828800"/>
-            <a:ext cx="7863840" cy="822960"/>
-          </a:xfrm>
-          <a:prstGeom prst="rect">
-            <a:avLst/>
-          </a:prstGeom>
-          <a:noFill/>
-          <a:ln/>
-        </p:spPr>
-        <p:txBody>
-          <a:bodyPr wrap="square" lIns="0" tIns="0" rIns="0" bIns="0" rtlCol="0" anchor="ctr"/>
-          <a:lstStyle/>
-          <a:p>
-            <a:pPr indent="0" marL="0">
+          <p:cNvPr id="7" name="Text 5"/>
+          <p:cNvSpPr/>
+          <p:nvPr/>
+        </p:nvSpPr>
+        <p:spPr>
+          <a:xfrm>
+            <a:off x="640080" y="2743200"/>
+            <a:ext cx="7863840" cy="731520"/>
+          </a:xfrm>
+          <a:prstGeom prst="rect">
+            <a:avLst/>
+          </a:prstGeom>
+          <a:noFill/>
+          <a:ln/>
+        </p:spPr>
+        <p:txBody>
+          <a:bodyPr wrap="square" lIns="0" tIns="0" rIns="0" bIns="0" rtlCol="0" anchor="ctr"/>
+          <a:lstStyle/>
+          <a:p>
+            <a:pPr marL="0" indent="0">
               <a:lnSpc>
                 <a:spcPct val="130000"/>
               </a:lnSpc>
@@ -4874,147 +4475,76 @@
             <a:r>
               <a:rPr lang="en-US" sz="1300" b="1" dirty="0">
                 <a:solidFill>
-                  <a:srgbClr val="E76F51"/>
+                  <a:srgbClr val="C00000"/>
                 </a:solidFill>
                 <a:latin typeface="Calibri" pitchFamily="34" charset="0"/>
                 <a:ea typeface="Calibri" pitchFamily="34" charset="-122"/>
                 <a:cs typeface="Calibri" pitchFamily="34" charset="-120"/>
               </a:rPr>
-              <a:t>The single biggest finding: </a:t>
-            </a:r>
-            <a:pPr indent="0" marL="0">
+              <a:t>The at-risk profile: </a:t>
+            </a:r>
+            <a:r>
+              <a:rPr lang="en-US" sz="1300" dirty="0">
+                <a:solidFill>
+                  <a:srgbClr val="2C2C2C"/>
+                </a:solidFill>
+                <a:latin typeface="Calibri" pitchFamily="34" charset="0"/>
+                <a:ea typeface="Calibri" pitchFamily="34" charset="-122"/>
+                <a:cs typeface="Calibri" pitchFamily="34" charset="-120"/>
+              </a:rPr>
+              <a:t>Young (~31 years old), low-paid (avg $4,024/month), new to the company (avg 3.7 years), working overtime, with poor work-life balance. Most likely a Nurse or 'Other' role in Cardiology or Maternity.</a:t>
+            </a:r>
+            <a:endParaRPr lang="en-US" sz="1300" dirty="0"/>
+          </a:p>
+        </p:txBody>
+      </p:sp>
+      <p:sp>
+        <p:nvSpPr>
+          <p:cNvPr id="8" name="Text 6"/>
+          <p:cNvSpPr/>
+          <p:nvPr/>
+        </p:nvSpPr>
+        <p:spPr>
+          <a:xfrm>
+            <a:off x="640080" y="3566160"/>
+            <a:ext cx="7863840" cy="731520"/>
+          </a:xfrm>
+          <a:prstGeom prst="rect">
+            <a:avLst/>
+          </a:prstGeom>
+          <a:noFill/>
+          <a:ln/>
+        </p:spPr>
+        <p:txBody>
+          <a:bodyPr wrap="square" lIns="0" tIns="0" rIns="0" bIns="0" rtlCol="0" anchor="ctr"/>
+          <a:lstStyle/>
+          <a:p>
+            <a:pPr marL="0" indent="0">
               <a:lnSpc>
                 <a:spcPct val="130000"/>
               </a:lnSpc>
               <a:buNone/>
             </a:pPr>
             <a:r>
-              <a:rPr lang="en-US" sz="1300" dirty="0">
-                <a:solidFill>
-                  <a:srgbClr val="2C2C2C"/>
+              <a:rPr lang="en-US" sz="1300" b="1" dirty="0">
+                <a:solidFill>
+                  <a:schemeClr val="accent1"/>
                 </a:solidFill>
                 <a:latin typeface="Calibri" pitchFamily="34" charset="0"/>
                 <a:ea typeface="Calibri" pitchFamily="34" charset="-122"/>
                 <a:cs typeface="Calibri" pitchFamily="34" charset="-120"/>
               </a:rPr>
-              <a:t>Overtime is the dominant predictor of attrition. Employees who work overtime leave at 29.2% — nearly 6x the rate of non-overtime workers (5.0%). This creates a vicious cycle: understaffing leads to overtime, which causes burnout, which causes more departures, which creates more understaffing.</a:t>
-            </a:r>
-            <a:endParaRPr lang="en-US" sz="1300" dirty="0"/>
-          </a:p>
-        </p:txBody>
-      </p:sp>
-      <p:sp>
-        <p:nvSpPr>
-          <p:cNvPr id="7" name="Text 5"/>
-          <p:cNvSpPr/>
-          <p:nvPr/>
-        </p:nvSpPr>
-        <p:spPr>
-          <a:xfrm>
-            <a:off x="640080" y="2743200"/>
-            <a:ext cx="7863840" cy="731520"/>
-          </a:xfrm>
-          <a:prstGeom prst="rect">
-            <a:avLst/>
-          </a:prstGeom>
-          <a:noFill/>
-          <a:ln/>
-        </p:spPr>
-        <p:txBody>
-          <a:bodyPr wrap="square" lIns="0" tIns="0" rIns="0" bIns="0" rtlCol="0" anchor="ctr"/>
-          <a:lstStyle/>
-          <a:p>
-            <a:pPr indent="0" marL="0">
-              <a:lnSpc>
-                <a:spcPct val="130000"/>
-              </a:lnSpc>
-              <a:buNone/>
-            </a:pPr>
-            <a:r>
-              <a:rPr lang="en-US" sz="1300" b="1" dirty="0">
-                <a:solidFill>
-                  <a:srgbClr val="E76F51"/>
+              <a:t>Recommended actions: </a:t>
+            </a:r>
+            <a:r>
+              <a:rPr lang="en-US" sz="1300" dirty="0">
+                <a:solidFill>
+                  <a:srgbClr val="2C2C2C"/>
                 </a:solidFill>
                 <a:latin typeface="Calibri" pitchFamily="34" charset="0"/>
                 <a:ea typeface="Calibri" pitchFamily="34" charset="-122"/>
                 <a:cs typeface="Calibri" pitchFamily="34" charset="-120"/>
               </a:rPr>
-              <a:t>The at-risk profile: </a:t>
-            </a:r>
-            <a:pPr indent="0" marL="0">
-              <a:lnSpc>
-                <a:spcPct val="130000"/>
-              </a:lnSpc>
-              <a:buNone/>
-            </a:pPr>
-            <a:r>
-              <a:rPr lang="en-US" sz="1300" dirty="0">
-                <a:solidFill>
-                  <a:srgbClr val="2C2C2C"/>
-                </a:solidFill>
-                <a:latin typeface="Calibri" pitchFamily="34" charset="0"/>
-                <a:ea typeface="Calibri" pitchFamily="34" charset="-122"/>
-                <a:cs typeface="Calibri" pitchFamily="34" charset="-120"/>
-              </a:rPr>
-              <a:t>Young (~31 years old), low-paid (avg $4,024/month), new to the company (avg 3.7 years), working overtime, with poor work-life balance. Most likely a Nurse or 'Other' role in Cardiology or Maternity.</a:t>
-            </a:r>
-            <a:endParaRPr lang="en-US" sz="1300" dirty="0"/>
-          </a:p>
-        </p:txBody>
-      </p:sp>
-      <p:sp>
-        <p:nvSpPr>
-          <p:cNvPr id="8" name="Text 6"/>
-          <p:cNvSpPr/>
-          <p:nvPr/>
-        </p:nvSpPr>
-        <p:spPr>
-          <a:xfrm>
-            <a:off x="640080" y="3566160"/>
-            <a:ext cx="7863840" cy="731520"/>
-          </a:xfrm>
-          <a:prstGeom prst="rect">
-            <a:avLst/>
-          </a:prstGeom>
-          <a:noFill/>
-          <a:ln/>
-        </p:spPr>
-        <p:txBody>
-          <a:bodyPr wrap="square" lIns="0" tIns="0" rIns="0" bIns="0" rtlCol="0" anchor="ctr"/>
-          <a:lstStyle/>
-          <a:p>
-            <a:pPr indent="0" marL="0">
-              <a:lnSpc>
-                <a:spcPct val="130000"/>
-              </a:lnSpc>
-              <a:buNone/>
-            </a:pPr>
-            <a:r>
-              <a:rPr lang="en-US" sz="1300" b="1" dirty="0">
-                <a:solidFill>
-                  <a:srgbClr val="2A9D8F"/>
-                </a:solidFill>
-                <a:latin typeface="Calibri" pitchFamily="34" charset="0"/>
-                <a:ea typeface="Calibri" pitchFamily="34" charset="-122"/>
-                <a:cs typeface="Calibri" pitchFamily="34" charset="-120"/>
-              </a:rPr>
-              <a:t>Recommended actions: </a:t>
-            </a:r>
-            <a:pPr indent="0" marL="0">
-              <a:lnSpc>
-                <a:spcPct val="130000"/>
-              </a:lnSpc>
-              <a:buNone/>
-            </a:pPr>
-            <a:r>
-              <a:rPr lang="en-US" sz="1300" dirty="0">
-                <a:solidFill>
-                  <a:srgbClr val="2C2C2C"/>
-                </a:solidFill>
-                <a:latin typeface="Calibri" pitchFamily="34" charset="0"/>
-                <a:ea typeface="Calibri" pitchFamily="34" charset="-122"/>
-                <a:cs typeface="Calibri" pitchFamily="34" charset="-120"/>
-              </a:rPr>
               <a:t>Reduce mandatory overtime through additional hiring, increase entry-level compensation, strengthen the first-2-year onboarding experience, and implement nurse-specific retention programs.</a:t>
             </a:r>
             <a:endParaRPr lang="en-US" sz="1300" dirty="0"/>
@@ -5042,20 +4572,9 @@
           <a:bodyPr wrap="square" lIns="0" tIns="0" rIns="0" bIns="0" rtlCol="0" anchor="ctr"/>
           <a:lstStyle/>
           <a:p>
-            <a:pPr indent="0" marL="0">
-              <a:buNone/>
-            </a:pPr>
-            <a:r>
-              <a:rPr lang="en-US" sz="1000" dirty="0">
-                <a:solidFill>
-                  <a:srgbClr val="5A5A5A"/>
-                </a:solidFill>
-                <a:latin typeface="Calibri" pitchFamily="34" charset="0"/>
-                <a:ea typeface="Calibri" pitchFamily="34" charset="-122"/>
-                <a:cs typeface="Calibri" pitchFamily="34" charset="-120"/>
-              </a:rPr>
-              <a:t>Tools: Python (Pandas) → SQL (MySQL) → Tableau | Dataset: Watson Healthcare Modified (1,676 employees, 35 variables)</a:t>
-            </a:r>
+            <a:pPr marL="0" indent="0">
+              <a:buNone/>
+            </a:pPr>
             <a:endParaRPr lang="en-US" sz="1000" dirty="0"/>
           </a:p>
         </p:txBody>
@@ -5076,6 +4595,7 @@
         <a:solidFill>
           <a:srgbClr val="FFFFFF"/>
         </a:solidFill>
+        <a:effectLst/>
       </p:bgPr>
     </p:bg>
     <p:spTree>
@@ -5113,7 +4633,7 @@
           <a:bodyPr wrap="square" lIns="0" tIns="0" rIns="0" bIns="0" rtlCol="0" anchor="ctr"/>
           <a:lstStyle/>
           <a:p>
-            <a:pPr indent="0" marL="0">
+            <a:pPr marL="0" indent="0">
               <a:buNone/>
             </a:pPr>
             <a:r>
@@ -5148,17 +4668,27 @@
             </a:avLst>
           </a:prstGeom>
           <a:solidFill>
-            <a:srgbClr val="1B2A4A"/>
+            <a:schemeClr val="accent1">
+              <a:lumMod val="40000"/>
+              <a:lumOff val="60000"/>
+            </a:schemeClr>
           </a:solidFill>
           <a:ln/>
           <a:effectLst>
-            <a:outerShdw sx="100000" sy="100000" kx="0" ky="0" algn="bl" rotWithShape="0" blurRad="50800" dist="25400" dir="8100000">
+            <a:outerShdw blurRad="50800" dist="25400" dir="8100000" algn="bl" rotWithShape="0">
               <a:srgbClr val="000000">
                 <a:alpha val="10000"/>
               </a:srgbClr>
             </a:outerShdw>
           </a:effectLst>
         </p:spPr>
+        <p:txBody>
+          <a:bodyPr/>
+          <a:lstStyle/>
+          <a:p>
+            <a:endParaRPr lang="en-US"/>
+          </a:p>
+        </p:txBody>
       </p:sp>
       <p:sp>
         <p:nvSpPr>
@@ -5181,15 +4711,15 @@
           <a:bodyPr wrap="square" lIns="0" tIns="0" rIns="0" bIns="0" rtlCol="0" anchor="ctr"/>
           <a:lstStyle/>
           <a:p>
-            <a:pPr algn="ctr" indent="0" marL="0">
+            <a:pPr marL="0" indent="0" algn="ctr">
               <a:buNone/>
             </a:pPr>
             <a:r>
               <a:rPr lang="en-US" sz="1100" dirty="0">
                 <a:solidFill>
-                  <a:srgbClr val="FFFFFF">
+                  <a:schemeClr val="tx1">
                     <a:alpha val="70000"/>
-                  </a:srgbClr>
+                  </a:schemeClr>
                 </a:solidFill>
                 <a:latin typeface="Calibri" pitchFamily="34" charset="0"/>
                 <a:ea typeface="Calibri" pitchFamily="34" charset="-122"/>
@@ -5222,14 +4752,11 @@
           <a:bodyPr wrap="square" lIns="0" tIns="0" rIns="0" bIns="0" rtlCol="0" anchor="ctr"/>
           <a:lstStyle/>
           <a:p>
-            <a:pPr algn="ctr" indent="0" marL="0">
+            <a:pPr marL="0" indent="0" algn="ctr">
               <a:buNone/>
             </a:pPr>
             <a:r>
               <a:rPr lang="en-US" sz="3600" b="1" dirty="0">
-                <a:solidFill>
-                  <a:srgbClr val="FFFFFF"/>
-                </a:solidFill>
                 <a:latin typeface="Georgia" pitchFamily="34" charset="0"/>
                 <a:ea typeface="Georgia" pitchFamily="34" charset="-122"/>
                 <a:cs typeface="Georgia" pitchFamily="34" charset="-120"/>
@@ -5257,17 +4784,27 @@
             </a:avLst>
           </a:prstGeom>
           <a:solidFill>
-            <a:srgbClr val="E76F51"/>
+            <a:schemeClr val="accent1">
+              <a:lumMod val="40000"/>
+              <a:lumOff val="60000"/>
+            </a:schemeClr>
           </a:solidFill>
           <a:ln/>
           <a:effectLst>
-            <a:outerShdw sx="100000" sy="100000" kx="0" ky="0" algn="bl" rotWithShape="0" blurRad="50800" dist="25400" dir="8100000">
+            <a:outerShdw blurRad="50800" dist="25400" dir="8100000" algn="bl" rotWithShape="0">
               <a:srgbClr val="000000">
                 <a:alpha val="10000"/>
               </a:srgbClr>
             </a:outerShdw>
           </a:effectLst>
         </p:spPr>
+        <p:txBody>
+          <a:bodyPr/>
+          <a:lstStyle/>
+          <a:p>
+            <a:endParaRPr lang="en-US"/>
+          </a:p>
+        </p:txBody>
       </p:sp>
       <p:sp>
         <p:nvSpPr>
@@ -5290,15 +4827,15 @@
           <a:bodyPr wrap="square" lIns="0" tIns="0" rIns="0" bIns="0" rtlCol="0" anchor="ctr"/>
           <a:lstStyle/>
           <a:p>
-            <a:pPr algn="ctr" indent="0" marL="0">
+            <a:pPr marL="0" indent="0" algn="ctr">
               <a:buNone/>
             </a:pPr>
             <a:r>
               <a:rPr lang="en-US" sz="1100" dirty="0">
                 <a:solidFill>
-                  <a:srgbClr val="FFFFFF">
+                  <a:schemeClr val="tx1">
                     <a:alpha val="70000"/>
-                  </a:srgbClr>
+                  </a:schemeClr>
                 </a:solidFill>
                 <a:latin typeface="Calibri" pitchFamily="34" charset="0"/>
                 <a:ea typeface="Calibri" pitchFamily="34" charset="-122"/>
@@ -5331,14 +4868,11 @@
           <a:bodyPr wrap="square" lIns="0" tIns="0" rIns="0" bIns="0" rtlCol="0" anchor="ctr"/>
           <a:lstStyle/>
           <a:p>
-            <a:pPr algn="ctr" indent="0" marL="0">
+            <a:pPr marL="0" indent="0" algn="ctr">
               <a:buNone/>
             </a:pPr>
             <a:r>
               <a:rPr lang="en-US" sz="3600" b="1" dirty="0">
-                <a:solidFill>
-                  <a:srgbClr val="FFFFFF"/>
-                </a:solidFill>
                 <a:latin typeface="Georgia" pitchFamily="34" charset="0"/>
                 <a:ea typeface="Georgia" pitchFamily="34" charset="-122"/>
                 <a:cs typeface="Georgia" pitchFamily="34" charset="-120"/>
@@ -5366,17 +4900,27 @@
             </a:avLst>
           </a:prstGeom>
           <a:solidFill>
-            <a:srgbClr val="E9C46A"/>
+            <a:schemeClr val="accent1">
+              <a:lumMod val="40000"/>
+              <a:lumOff val="60000"/>
+            </a:schemeClr>
           </a:solidFill>
           <a:ln/>
           <a:effectLst>
-            <a:outerShdw sx="100000" sy="100000" kx="0" ky="0" algn="bl" rotWithShape="0" blurRad="50800" dist="25400" dir="8100000">
+            <a:outerShdw blurRad="50800" dist="25400" dir="8100000" algn="bl" rotWithShape="0">
               <a:srgbClr val="000000">
                 <a:alpha val="10000"/>
               </a:srgbClr>
             </a:outerShdw>
           </a:effectLst>
         </p:spPr>
+        <p:txBody>
+          <a:bodyPr/>
+          <a:lstStyle/>
+          <a:p>
+            <a:endParaRPr lang="en-US"/>
+          </a:p>
+        </p:txBody>
       </p:sp>
       <p:sp>
         <p:nvSpPr>
@@ -5399,11 +4943,11 @@
           <a:bodyPr wrap="square" lIns="0" tIns="0" rIns="0" bIns="0" rtlCol="0" anchor="ctr"/>
           <a:lstStyle/>
           <a:p>
-            <a:pPr algn="ctr" indent="0" marL="0">
-              <a:buNone/>
-            </a:pPr>
-            <a:r>
-              <a:rPr lang="en-US" sz="1100" dirty="0">
+            <a:pPr marL="0" indent="0" algn="ctr">
+              <a:buNone/>
+            </a:pPr>
+            <a:r>
+              <a:rPr lang="en-US" sz="1100" b="1" dirty="0">
                 <a:solidFill>
                   <a:srgbClr val="1B2A4A">
                     <a:alpha val="70000"/>
@@ -5415,7 +4959,7 @@
               </a:rPr>
               <a:t>Avg income (leavers)</a:t>
             </a:r>
-            <a:endParaRPr lang="en-US" sz="1100" dirty="0"/>
+            <a:endParaRPr lang="en-US" sz="1100" b="1" dirty="0"/>
           </a:p>
         </p:txBody>
       </p:sp>
@@ -5440,7 +4984,7 @@
           <a:bodyPr wrap="square" lIns="0" tIns="0" rIns="0" bIns="0" rtlCol="0" anchor="ctr"/>
           <a:lstStyle/>
           <a:p>
-            <a:pPr algn="ctr" indent="0" marL="0">
+            <a:pPr marL="0" indent="0" algn="ctr">
               <a:buNone/>
             </a:pPr>
             <a:r>
@@ -5475,17 +5019,27 @@
             </a:avLst>
           </a:prstGeom>
           <a:solidFill>
-            <a:srgbClr val="2A9D8F"/>
+            <a:schemeClr val="accent1">
+              <a:lumMod val="40000"/>
+              <a:lumOff val="60000"/>
+            </a:schemeClr>
           </a:solidFill>
           <a:ln/>
           <a:effectLst>
-            <a:outerShdw sx="100000" sy="100000" kx="0" ky="0" algn="bl" rotWithShape="0" blurRad="50800" dist="25400" dir="8100000">
+            <a:outerShdw blurRad="50800" dist="25400" dir="8100000" algn="bl" rotWithShape="0">
               <a:srgbClr val="000000">
                 <a:alpha val="10000"/>
               </a:srgbClr>
             </a:outerShdw>
           </a:effectLst>
         </p:spPr>
+        <p:txBody>
+          <a:bodyPr/>
+          <a:lstStyle/>
+          <a:p>
+            <a:endParaRPr lang="en-US"/>
+          </a:p>
+        </p:txBody>
       </p:sp>
       <p:sp>
         <p:nvSpPr>
@@ -5508,15 +5062,15 @@
           <a:bodyPr wrap="square" lIns="0" tIns="0" rIns="0" bIns="0" rtlCol="0" anchor="ctr"/>
           <a:lstStyle/>
           <a:p>
-            <a:pPr algn="ctr" indent="0" marL="0">
+            <a:pPr marL="0" indent="0" algn="ctr">
               <a:buNone/>
             </a:pPr>
             <a:r>
               <a:rPr lang="en-US" sz="1100" dirty="0">
                 <a:solidFill>
-                  <a:srgbClr val="FFFFFF">
+                  <a:schemeClr val="tx1">
                     <a:alpha val="70000"/>
-                  </a:srgbClr>
+                  </a:schemeClr>
                 </a:solidFill>
                 <a:latin typeface="Calibri" pitchFamily="34" charset="0"/>
                 <a:ea typeface="Calibri" pitchFamily="34" charset="-122"/>
@@ -5549,14 +5103,11 @@
           <a:bodyPr wrap="square" lIns="0" tIns="0" rIns="0" bIns="0" rtlCol="0" anchor="ctr"/>
           <a:lstStyle/>
           <a:p>
-            <a:pPr algn="ctr" indent="0" marL="0">
+            <a:pPr marL="0" indent="0" algn="ctr">
               <a:buNone/>
             </a:pPr>
             <a:r>
               <a:rPr lang="en-US" sz="3600" b="1" dirty="0">
-                <a:solidFill>
-                  <a:srgbClr val="FFFFFF"/>
-                </a:solidFill>
                 <a:latin typeface="Georgia" pitchFamily="34" charset="0"/>
                 <a:ea typeface="Georgia" pitchFamily="34" charset="-122"/>
                 <a:cs typeface="Georgia" pitchFamily="34" charset="-120"/>
@@ -5588,7 +5139,7 @@
           <a:bodyPr wrap="square" lIns="0" tIns="0" rIns="0" bIns="0" rtlCol="0" anchor="ctr"/>
           <a:lstStyle/>
           <a:p>
-            <a:pPr indent="0" marL="0">
+            <a:pPr marL="0" indent="0">
               <a:buNone/>
             </a:pPr>
             <a:r>
@@ -5614,8 +5165,8 @@
         </p:nvSpPr>
         <p:spPr>
           <a:xfrm>
-            <a:off x="640080" y="3017520"/>
-            <a:ext cx="3657600" cy="411480"/>
+            <a:off x="640080" y="2922036"/>
+            <a:ext cx="3657600" cy="602448"/>
           </a:xfrm>
           <a:prstGeom prst="rect">
             <a:avLst/>
@@ -5625,26 +5176,13 @@
           </a:solidFill>
           <a:ln/>
         </p:spPr>
-      </p:sp>
-      <p:sp>
-        <p:nvSpPr>
-          <p:cNvPr id="17" name="Shape 15"/>
-          <p:cNvSpPr/>
-          <p:nvPr/>
-        </p:nvSpPr>
-        <p:spPr>
-          <a:xfrm>
-            <a:off x="640080" y="3017520"/>
-            <a:ext cx="54864" cy="411480"/>
-          </a:xfrm>
-          <a:prstGeom prst="rect">
-            <a:avLst/>
-          </a:prstGeom>
-          <a:solidFill>
-            <a:srgbClr val="E76F51"/>
-          </a:solidFill>
-          <a:ln/>
-        </p:spPr>
+        <p:txBody>
+          <a:bodyPr/>
+          <a:lstStyle/>
+          <a:p>
+            <a:endParaRPr lang="en-US"/>
+          </a:p>
+        </p:txBody>
       </p:sp>
       <p:sp>
         <p:nvSpPr>
@@ -5667,7 +5205,7 @@
           <a:bodyPr wrap="square" lIns="0" tIns="0" rIns="0" bIns="0" rtlCol="0" anchor="ctr"/>
           <a:lstStyle/>
           <a:p>
-            <a:pPr indent="0" marL="0">
+            <a:pPr marL="0" indent="0">
               <a:buNone/>
             </a:pPr>
             <a:r>
@@ -5706,13 +5244,13 @@
           <a:bodyPr wrap="square" lIns="0" tIns="0" rIns="0" bIns="0" rtlCol="0" anchor="ctr"/>
           <a:lstStyle/>
           <a:p>
-            <a:pPr algn="ctr" indent="0" marL="0">
+            <a:pPr marL="0" indent="0" algn="ctr">
               <a:buNone/>
             </a:pPr>
             <a:r>
               <a:rPr lang="en-US" sz="1400" b="1" dirty="0">
                 <a:solidFill>
-                  <a:srgbClr val="E76F51"/>
+                  <a:schemeClr val="accent4"/>
                 </a:solidFill>
                 <a:latin typeface="Calibri" pitchFamily="34" charset="0"/>
                 <a:ea typeface="Calibri" pitchFamily="34" charset="-122"/>
@@ -5720,7 +5258,11 @@
               </a:rPr>
               <a:t>13.94%</a:t>
             </a:r>
-            <a:endParaRPr lang="en-US" sz="1400" dirty="0"/>
+            <a:endParaRPr lang="en-US" sz="1400" dirty="0">
+              <a:solidFill>
+                <a:schemeClr val="accent4"/>
+              </a:solidFill>
+            </a:endParaRPr>
           </a:p>
         </p:txBody>
       </p:sp>
@@ -5745,7 +5287,7 @@
           <a:bodyPr wrap="square" lIns="0" tIns="0" rIns="0" bIns="0" rtlCol="0" anchor="ctr"/>
           <a:lstStyle/>
           <a:p>
-            <a:pPr indent="0" marL="0">
+            <a:pPr marL="0" indent="0">
               <a:buNone/>
             </a:pPr>
             <a:r>
@@ -5771,8 +5313,8 @@
         </p:nvSpPr>
         <p:spPr>
           <a:xfrm>
-            <a:off x="640080" y="3566160"/>
-            <a:ext cx="3657600" cy="411480"/>
+            <a:off x="640080" y="3498060"/>
+            <a:ext cx="3657600" cy="547680"/>
           </a:xfrm>
           <a:prstGeom prst="rect">
             <a:avLst/>
@@ -5782,26 +5324,13 @@
           </a:solidFill>
           <a:ln/>
         </p:spPr>
-      </p:sp>
-      <p:sp>
-        <p:nvSpPr>
-          <p:cNvPr id="22" name="Shape 20"/>
-          <p:cNvSpPr/>
-          <p:nvPr/>
-        </p:nvSpPr>
-        <p:spPr>
-          <a:xfrm>
-            <a:off x="640080" y="3566160"/>
-            <a:ext cx="54864" cy="411480"/>
-          </a:xfrm>
-          <a:prstGeom prst="rect">
-            <a:avLst/>
-          </a:prstGeom>
-          <a:solidFill>
-            <a:srgbClr val="E9C46A"/>
-          </a:solidFill>
-          <a:ln/>
-        </p:spPr>
+        <p:txBody>
+          <a:bodyPr/>
+          <a:lstStyle/>
+          <a:p>
+            <a:endParaRPr lang="en-US"/>
+          </a:p>
+        </p:txBody>
       </p:sp>
       <p:sp>
         <p:nvSpPr>
@@ -5824,7 +5353,7 @@
           <a:bodyPr wrap="square" lIns="0" tIns="0" rIns="0" bIns="0" rtlCol="0" anchor="ctr"/>
           <a:lstStyle/>
           <a:p>
-            <a:pPr indent="0" marL="0">
+            <a:pPr marL="0" indent="0">
               <a:buNone/>
             </a:pPr>
             <a:r>
@@ -5863,13 +5392,13 @@
           <a:bodyPr wrap="square" lIns="0" tIns="0" rIns="0" bIns="0" rtlCol="0" anchor="ctr"/>
           <a:lstStyle/>
           <a:p>
-            <a:pPr algn="ctr" indent="0" marL="0">
+            <a:pPr marL="0" indent="0" algn="ctr">
               <a:buNone/>
             </a:pPr>
             <a:r>
               <a:rPr lang="en-US" sz="1400" b="1" dirty="0">
                 <a:solidFill>
-                  <a:srgbClr val="E9C46A"/>
+                  <a:schemeClr val="accent4"/>
                 </a:solidFill>
                 <a:latin typeface="Calibri" pitchFamily="34" charset="0"/>
                 <a:ea typeface="Calibri" pitchFamily="34" charset="-122"/>
@@ -5877,7 +5406,11 @@
               </a:rPr>
               <a:t>12.31%</a:t>
             </a:r>
-            <a:endParaRPr lang="en-US" sz="1400" dirty="0"/>
+            <a:endParaRPr lang="en-US" sz="1400" dirty="0">
+              <a:solidFill>
+                <a:schemeClr val="accent4"/>
+              </a:solidFill>
+            </a:endParaRPr>
           </a:p>
         </p:txBody>
       </p:sp>
@@ -5902,7 +5435,7 @@
           <a:bodyPr wrap="square" lIns="0" tIns="0" rIns="0" bIns="0" rtlCol="0" anchor="ctr"/>
           <a:lstStyle/>
           <a:p>
-            <a:pPr indent="0" marL="0">
+            <a:pPr marL="0" indent="0">
               <a:buNone/>
             </a:pPr>
             <a:r>
@@ -5928,8 +5461,8 @@
         </p:nvSpPr>
         <p:spPr>
           <a:xfrm>
-            <a:off x="640080" y="4114800"/>
-            <a:ext cx="3657600" cy="411480"/>
+            <a:off x="640080" y="4019316"/>
+            <a:ext cx="3657600" cy="602448"/>
           </a:xfrm>
           <a:prstGeom prst="rect">
             <a:avLst/>
@@ -5939,26 +5472,13 @@
           </a:solidFill>
           <a:ln/>
         </p:spPr>
-      </p:sp>
-      <p:sp>
-        <p:nvSpPr>
-          <p:cNvPr id="27" name="Shape 25"/>
-          <p:cNvSpPr/>
-          <p:nvPr/>
-        </p:nvSpPr>
-        <p:spPr>
-          <a:xfrm>
-            <a:off x="640080" y="4114800"/>
-            <a:ext cx="54864" cy="411480"/>
-          </a:xfrm>
-          <a:prstGeom prst="rect">
-            <a:avLst/>
-          </a:prstGeom>
-          <a:solidFill>
-            <a:srgbClr val="2A9D8F"/>
-          </a:solidFill>
-          <a:ln/>
-        </p:spPr>
+        <p:txBody>
+          <a:bodyPr/>
+          <a:lstStyle/>
+          <a:p>
+            <a:endParaRPr lang="en-US"/>
+          </a:p>
+        </p:txBody>
       </p:sp>
       <p:sp>
         <p:nvSpPr>
@@ -5981,7 +5501,7 @@
           <a:bodyPr wrap="square" lIns="0" tIns="0" rIns="0" bIns="0" rtlCol="0" anchor="ctr"/>
           <a:lstStyle/>
           <a:p>
-            <a:pPr indent="0" marL="0">
+            <a:pPr marL="0" indent="0">
               <a:buNone/>
             </a:pPr>
             <a:r>
@@ -6020,13 +5540,13 @@
           <a:bodyPr wrap="square" lIns="0" tIns="0" rIns="0" bIns="0" rtlCol="0" anchor="ctr"/>
           <a:lstStyle/>
           <a:p>
-            <a:pPr algn="ctr" indent="0" marL="0">
+            <a:pPr marL="0" indent="0" algn="ctr">
               <a:buNone/>
             </a:pPr>
             <a:r>
               <a:rPr lang="en-US" sz="1400" b="1" dirty="0">
                 <a:solidFill>
-                  <a:srgbClr val="2A9D8F"/>
+                  <a:schemeClr val="accent1"/>
                 </a:solidFill>
                 <a:latin typeface="Calibri" pitchFamily="34" charset="0"/>
                 <a:ea typeface="Calibri" pitchFamily="34" charset="-122"/>
@@ -6034,7 +5554,11 @@
               </a:rPr>
               <a:t>7.74%</a:t>
             </a:r>
-            <a:endParaRPr lang="en-US" sz="1400" dirty="0"/>
+            <a:endParaRPr lang="en-US" sz="1400" dirty="0">
+              <a:solidFill>
+                <a:schemeClr val="accent1"/>
+              </a:solidFill>
+            </a:endParaRPr>
           </a:p>
         </p:txBody>
       </p:sp>
@@ -6059,7 +5583,7 @@
           <a:bodyPr wrap="square" lIns="0" tIns="0" rIns="0" bIns="0" rtlCol="0" anchor="ctr"/>
           <a:lstStyle/>
           <a:p>
-            <a:pPr indent="0" marL="0">
+            <a:pPr marL="0" indent="0">
               <a:buNone/>
             </a:pPr>
             <a:r>
@@ -6085,20 +5609,24 @@
         </p:nvSpPr>
         <p:spPr>
           <a:xfrm>
-            <a:off x="5029200" y="2560320"/>
-            <a:ext cx="3657600" cy="365760"/>
-          </a:xfrm>
-          <a:prstGeom prst="rect">
-            <a:avLst/>
-          </a:prstGeom>
-          <a:noFill/>
-          <a:ln/>
-        </p:spPr>
-        <p:txBody>
-          <a:bodyPr wrap="square" lIns="0" tIns="0" rIns="0" bIns="0" rtlCol="0" anchor="ctr"/>
-          <a:lstStyle/>
-          <a:p>
-            <a:pPr indent="0" marL="0">
+            <a:off x="4898488" y="2542032"/>
+            <a:ext cx="3788312" cy="402336"/>
+          </a:xfrm>
+          <a:prstGeom prst="rect">
+            <a:avLst/>
+          </a:prstGeom>
+          <a:solidFill>
+            <a:schemeClr val="bg1">
+              <a:lumMod val="95000"/>
+            </a:schemeClr>
+          </a:solidFill>
+          <a:ln/>
+        </p:spPr>
+        <p:txBody>
+          <a:bodyPr wrap="square" lIns="0" tIns="0" rIns="0" bIns="0" rtlCol="0" anchor="ctr"/>
+          <a:lstStyle/>
+          <a:p>
+            <a:pPr marL="0" indent="0">
               <a:buNone/>
             </a:pPr>
             <a:r>
@@ -6110,7 +5638,7 @@
                 <a:ea typeface="Georgia" pitchFamily="34" charset="-122"/>
                 <a:cs typeface="Georgia" pitchFamily="34" charset="-120"/>
               </a:rPr>
-              <a:t>Risk tier</a:t>
+              <a:t> Risk tier</a:t>
             </a:r>
             <a:endParaRPr lang="en-US" sz="1400" dirty="0"/>
           </a:p>
@@ -6124,17 +5652,24 @@
         </p:nvSpPr>
         <p:spPr>
           <a:xfrm>
-            <a:off x="5029200" y="3063240"/>
-            <a:ext cx="228600" cy="228600"/>
+            <a:off x="4898488" y="2932528"/>
+            <a:ext cx="490025" cy="490025"/>
           </a:xfrm>
           <a:prstGeom prst="rect">
             <a:avLst/>
           </a:prstGeom>
           <a:solidFill>
-            <a:srgbClr val="E76F51"/>
+            <a:srgbClr val="C00000"/>
           </a:solidFill>
           <a:ln/>
         </p:spPr>
+        <p:txBody>
+          <a:bodyPr/>
+          <a:lstStyle/>
+          <a:p>
+            <a:endParaRPr lang="en-US" dirty="0"/>
+          </a:p>
+        </p:txBody>
       </p:sp>
       <p:sp>
         <p:nvSpPr>
@@ -6144,20 +5679,24 @@
         </p:nvSpPr>
         <p:spPr>
           <a:xfrm>
-            <a:off x="5394960" y="3063240"/>
-            <a:ext cx="2743200" cy="228600"/>
-          </a:xfrm>
-          <a:prstGeom prst="rect">
-            <a:avLst/>
-          </a:prstGeom>
-          <a:noFill/>
-          <a:ln/>
-        </p:spPr>
-        <p:txBody>
-          <a:bodyPr wrap="square" lIns="0" tIns="0" rIns="0" bIns="0" rtlCol="0" anchor="ctr"/>
-          <a:lstStyle/>
-          <a:p>
-            <a:pPr indent="0" marL="0">
+            <a:off x="5394960" y="2932528"/>
+            <a:ext cx="3291840" cy="490025"/>
+          </a:xfrm>
+          <a:prstGeom prst="rect">
+            <a:avLst/>
+          </a:prstGeom>
+          <a:solidFill>
+            <a:schemeClr val="bg1">
+              <a:lumMod val="95000"/>
+            </a:schemeClr>
+          </a:solidFill>
+          <a:ln/>
+        </p:spPr>
+        <p:txBody>
+          <a:bodyPr wrap="square" lIns="0" tIns="0" rIns="0" bIns="0" rtlCol="0" anchor="ctr"/>
+          <a:lstStyle/>
+          <a:p>
+            <a:pPr marL="0" indent="0">
               <a:buNone/>
             </a:pPr>
             <a:r>
@@ -6169,7 +5708,7 @@
                 <a:ea typeface="Calibri" pitchFamily="34" charset="-122"/>
                 <a:cs typeface="Calibri" pitchFamily="34" charset="-120"/>
               </a:rPr>
-              <a:t>High risk (&gt;15%)</a:t>
+              <a:t>  High risk (&gt;15%)</a:t>
             </a:r>
             <a:endParaRPr lang="en-US" sz="1200" dirty="0"/>
           </a:p>
@@ -6183,17 +5722,24 @@
         </p:nvSpPr>
         <p:spPr>
           <a:xfrm>
-            <a:off x="5029200" y="3474720"/>
-            <a:ext cx="228600" cy="228600"/>
+            <a:off x="4898488" y="3344008"/>
+            <a:ext cx="490025" cy="490025"/>
           </a:xfrm>
           <a:prstGeom prst="rect">
             <a:avLst/>
           </a:prstGeom>
           <a:solidFill>
-            <a:srgbClr val="E9C46A"/>
+            <a:schemeClr val="accent4"/>
           </a:solidFill>
           <a:ln/>
         </p:spPr>
+        <p:txBody>
+          <a:bodyPr/>
+          <a:lstStyle/>
+          <a:p>
+            <a:endParaRPr lang="en-US"/>
+          </a:p>
+        </p:txBody>
       </p:sp>
       <p:sp>
         <p:nvSpPr>
@@ -6203,20 +5749,24 @@
         </p:nvSpPr>
         <p:spPr>
           <a:xfrm>
-            <a:off x="5394960" y="3474720"/>
-            <a:ext cx="2743200" cy="228600"/>
-          </a:xfrm>
-          <a:prstGeom prst="rect">
-            <a:avLst/>
-          </a:prstGeom>
-          <a:noFill/>
-          <a:ln/>
-        </p:spPr>
-        <p:txBody>
-          <a:bodyPr wrap="square" lIns="0" tIns="0" rIns="0" bIns="0" rtlCol="0" anchor="ctr"/>
-          <a:lstStyle/>
-          <a:p>
-            <a:pPr indent="0" marL="0">
+            <a:off x="5394960" y="3404939"/>
+            <a:ext cx="3291840" cy="368163"/>
+          </a:xfrm>
+          <a:prstGeom prst="rect">
+            <a:avLst/>
+          </a:prstGeom>
+          <a:solidFill>
+            <a:schemeClr val="bg1">
+              <a:lumMod val="95000"/>
+            </a:schemeClr>
+          </a:solidFill>
+          <a:ln/>
+        </p:spPr>
+        <p:txBody>
+          <a:bodyPr wrap="square" lIns="0" tIns="0" rIns="0" bIns="0" rtlCol="0" anchor="ctr"/>
+          <a:lstStyle/>
+          <a:p>
+            <a:pPr marL="0" indent="0">
               <a:buNone/>
             </a:pPr>
             <a:r>
@@ -6228,7 +5778,7 @@
                 <a:ea typeface="Calibri" pitchFamily="34" charset="-122"/>
                 <a:cs typeface="Calibri" pitchFamily="34" charset="-120"/>
               </a:rPr>
-              <a:t>Moderate risk (10-15%)</a:t>
+              <a:t>  Moderate risk (10-15%)</a:t>
             </a:r>
             <a:endParaRPr lang="en-US" sz="1200" dirty="0"/>
           </a:p>
@@ -6242,17 +5792,24 @@
         </p:nvSpPr>
         <p:spPr>
           <a:xfrm>
-            <a:off x="5029200" y="3886200"/>
-            <a:ext cx="228600" cy="228600"/>
+            <a:off x="4898488" y="3755488"/>
+            <a:ext cx="490025" cy="490025"/>
           </a:xfrm>
           <a:prstGeom prst="rect">
             <a:avLst/>
           </a:prstGeom>
           <a:solidFill>
-            <a:srgbClr val="2A9D8F"/>
+            <a:schemeClr val="accent1"/>
           </a:solidFill>
           <a:ln/>
         </p:spPr>
+        <p:txBody>
+          <a:bodyPr/>
+          <a:lstStyle/>
+          <a:p>
+            <a:endParaRPr lang="en-US"/>
+          </a:p>
+        </p:txBody>
       </p:sp>
       <p:sp>
         <p:nvSpPr>
@@ -6262,20 +5819,24 @@
         </p:nvSpPr>
         <p:spPr>
           <a:xfrm>
-            <a:off x="5394960" y="3886200"/>
-            <a:ext cx="2743200" cy="228600"/>
-          </a:xfrm>
-          <a:prstGeom prst="rect">
-            <a:avLst/>
-          </a:prstGeom>
-          <a:noFill/>
-          <a:ln/>
-        </p:spPr>
-        <p:txBody>
-          <a:bodyPr wrap="square" lIns="0" tIns="0" rIns="0" bIns="0" rtlCol="0" anchor="ctr"/>
-          <a:lstStyle/>
-          <a:p>
-            <a:pPr indent="0" marL="0">
+            <a:off x="5394960" y="3755488"/>
+            <a:ext cx="3291840" cy="490025"/>
+          </a:xfrm>
+          <a:prstGeom prst="rect">
+            <a:avLst/>
+          </a:prstGeom>
+          <a:solidFill>
+            <a:schemeClr val="bg1">
+              <a:lumMod val="95000"/>
+            </a:schemeClr>
+          </a:solidFill>
+          <a:ln/>
+        </p:spPr>
+        <p:txBody>
+          <a:bodyPr wrap="square" lIns="0" tIns="0" rIns="0" bIns="0" rtlCol="0" anchor="ctr"/>
+          <a:lstStyle/>
+          <a:p>
+            <a:pPr marL="0" indent="0">
               <a:buNone/>
             </a:pPr>
             <a:r>
@@ -6287,7 +5848,7 @@
                 <a:ea typeface="Calibri" pitchFamily="34" charset="-122"/>
                 <a:cs typeface="Calibri" pitchFamily="34" charset="-120"/>
               </a:rPr>
-              <a:t>Low risk (&lt;10%)</a:t>
+              <a:t>  Low risk (&lt;10%)</a:t>
             </a:r>
             <a:endParaRPr lang="en-US" sz="1200" dirty="0"/>
           </a:p>
@@ -6309,6 +5870,7 @@
         <a:solidFill>
           <a:srgbClr val="FFFFFF"/>
         </a:solidFill>
+        <a:effectLst/>
       </p:bgPr>
     </p:bg>
     <p:spTree>
@@ -6346,7 +5908,7 @@
           <a:bodyPr wrap="square" lIns="0" tIns="0" rIns="0" bIns="0" rtlCol="0" anchor="ctr"/>
           <a:lstStyle/>
           <a:p>
-            <a:pPr indent="0" marL="0">
+            <a:pPr marL="0" indent="0">
               <a:buNone/>
             </a:pPr>
             <a:r>
@@ -6366,17 +5928,23 @@
       </p:sp>
       <p:graphicFrame>
         <p:nvGraphicFramePr>
-          <p:cNvPr id="3" name="Chart 0" descr=""/>
+          <p:cNvPr id="3" name="Chart 0"/>
           <p:cNvGraphicFramePr/>
-          <p:nvPr/>
+          <p:nvPr>
+            <p:extLst>
+              <p:ext uri="{D42A27DB-BD31-4B8C-83A1-F6EECF244321}">
+                <p14:modId xmlns:p14="http://schemas.microsoft.com/office/powerpoint/2010/main" val="2834885542"/>
+              </p:ext>
+            </p:extLst>
+          </p:nvPr>
         </p:nvGraphicFramePr>
         <p:xfrm>
           <a:off x="640080" y="1005840"/>
           <a:ext cx="4572000" cy="3200400"/>
         </p:xfrm>
-        <a:graphic xmlns:a="http://schemas.openxmlformats.org/drawingml/2006/main">
+        <a:graphic>
           <a:graphicData uri="http://schemas.openxmlformats.org/drawingml/2006/chart">
-            <c:chart xmlns:c="http://schemas.openxmlformats.org/drawingml/2006/chart" r:id="rId1"/>
+            <c:chart xmlns:c="http://schemas.openxmlformats.org/drawingml/2006/chart" xmlns:r="http://schemas.openxmlformats.org/officeDocument/2006/relationships" r:id="rId3"/>
           </a:graphicData>
         </a:graphic>
       </p:graphicFrame>
@@ -6394,68 +5962,61 @@
           <a:prstGeom prst="rect">
             <a:avLst/>
           </a:prstGeom>
+          <a:noFill/>
+          <a:ln/>
+        </p:spPr>
+        <p:txBody>
+          <a:bodyPr/>
+          <a:lstStyle/>
+          <a:p>
+            <a:endParaRPr lang="en-US"/>
+          </a:p>
+        </p:txBody>
+      </p:sp>
+      <p:sp>
+        <p:nvSpPr>
+          <p:cNvPr id="6" name="Text 3"/>
+          <p:cNvSpPr/>
+          <p:nvPr/>
+        </p:nvSpPr>
+        <p:spPr>
+          <a:xfrm>
+            <a:off x="6059978" y="1005840"/>
+            <a:ext cx="2327564" cy="1005840"/>
+          </a:xfrm>
+          <a:prstGeom prst="rect">
+            <a:avLst/>
+          </a:prstGeom>
           <a:solidFill>
-            <a:srgbClr val="FEF2EF"/>
+            <a:schemeClr val="bg1">
+              <a:lumMod val="95000"/>
+            </a:schemeClr>
           </a:solidFill>
           <a:ln/>
         </p:spPr>
-      </p:sp>
-      <p:sp>
-        <p:nvSpPr>
-          <p:cNvPr id="5" name="Shape 2"/>
-          <p:cNvSpPr/>
-          <p:nvPr/>
-        </p:nvSpPr>
-        <p:spPr>
-          <a:xfrm>
-            <a:off x="5669280" y="1005840"/>
-            <a:ext cx="54864" cy="1097280"/>
-          </a:xfrm>
-          <a:prstGeom prst="rect">
-            <a:avLst/>
-          </a:prstGeom>
-          <a:solidFill>
-            <a:srgbClr val="E76F51"/>
-          </a:solidFill>
-          <a:ln/>
-        </p:spPr>
-      </p:sp>
-      <p:sp>
-        <p:nvSpPr>
-          <p:cNvPr id="6" name="Text 3"/>
-          <p:cNvSpPr/>
-          <p:nvPr/>
-        </p:nvSpPr>
-        <p:spPr>
-          <a:xfrm>
-            <a:off x="5943600" y="1097280"/>
-            <a:ext cx="2560320" cy="914400"/>
-          </a:xfrm>
-          <a:prstGeom prst="rect">
-            <a:avLst/>
-          </a:prstGeom>
-          <a:noFill/>
-          <a:ln/>
-        </p:spPr>
-        <p:txBody>
-          <a:bodyPr wrap="square" lIns="0" tIns="0" rIns="0" bIns="0" rtlCol="0" anchor="ctr"/>
-          <a:lstStyle/>
-          <a:p>
-            <a:pPr indent="0" marL="0">
+        <p:txBody>
+          <a:bodyPr wrap="square" lIns="0" tIns="0" rIns="0" bIns="0" rtlCol="0" anchor="ctr"/>
+          <a:lstStyle/>
+          <a:p>
+            <a:pPr marL="0" indent="0">
               <a:buNone/>
             </a:pPr>
             <a:r>
               <a:rPr lang="en-US" sz="2800" b="1" dirty="0">
                 <a:solidFill>
-                  <a:srgbClr val="E76F51"/>
-                </a:solidFill>
-              </a:rPr>
-              <a:t>29.2%</a:t>
-            </a:r>
-            <a:endParaRPr lang="en-US" sz="2800" dirty="0"/>
-          </a:p>
-          <a:p>
-            <a:pPr indent="0" marL="0">
+                  <a:srgbClr val="C00000"/>
+                </a:solidFill>
+              </a:rPr>
+              <a:t>   29.2%</a:t>
+            </a:r>
+            <a:endParaRPr lang="en-US" sz="2800" dirty="0">
+              <a:solidFill>
+                <a:srgbClr val="C00000"/>
+              </a:solidFill>
+            </a:endParaRPr>
+          </a:p>
+          <a:p>
+            <a:pPr marL="0" indent="0">
               <a:buNone/>
             </a:pPr>
             <a:r>
@@ -6464,7 +6025,7 @@
                   <a:srgbClr val="2C2C2C"/>
                 </a:solidFill>
               </a:rPr>
-              <a:t>of overtime workers leave</a:t>
+              <a:t>       of overtime workers leave</a:t>
             </a:r>
             <a:endParaRPr lang="en-US" sz="2800" dirty="0"/>
           </a:p>
@@ -6484,68 +6045,61 @@
           <a:prstGeom prst="rect">
             <a:avLst/>
           </a:prstGeom>
+          <a:noFill/>
+          <a:ln/>
+        </p:spPr>
+        <p:txBody>
+          <a:bodyPr/>
+          <a:lstStyle/>
+          <a:p>
+            <a:endParaRPr lang="en-US"/>
+          </a:p>
+        </p:txBody>
+      </p:sp>
+      <p:sp>
+        <p:nvSpPr>
+          <p:cNvPr id="9" name="Text 6"/>
+          <p:cNvSpPr/>
+          <p:nvPr/>
+        </p:nvSpPr>
+        <p:spPr>
+          <a:xfrm>
+            <a:off x="6059978" y="1968077"/>
+            <a:ext cx="2327564" cy="1619915"/>
+          </a:xfrm>
+          <a:prstGeom prst="rect">
+            <a:avLst/>
+          </a:prstGeom>
           <a:solidFill>
-            <a:srgbClr val="EDF7F5"/>
+            <a:schemeClr val="bg1">
+              <a:lumMod val="95000"/>
+            </a:schemeClr>
           </a:solidFill>
           <a:ln/>
         </p:spPr>
-      </p:sp>
-      <p:sp>
-        <p:nvSpPr>
-          <p:cNvPr id="8" name="Shape 5"/>
-          <p:cNvSpPr/>
-          <p:nvPr/>
-        </p:nvSpPr>
-        <p:spPr>
-          <a:xfrm>
-            <a:off x="5669280" y="2286000"/>
-            <a:ext cx="54864" cy="1097280"/>
-          </a:xfrm>
-          <a:prstGeom prst="rect">
-            <a:avLst/>
-          </a:prstGeom>
-          <a:solidFill>
-            <a:srgbClr val="2A9D8F"/>
-          </a:solidFill>
-          <a:ln/>
-        </p:spPr>
-      </p:sp>
-      <p:sp>
-        <p:nvSpPr>
-          <p:cNvPr id="9" name="Text 6"/>
-          <p:cNvSpPr/>
-          <p:nvPr/>
-        </p:nvSpPr>
-        <p:spPr>
-          <a:xfrm>
-            <a:off x="5943600" y="2377440"/>
-            <a:ext cx="2560320" cy="914400"/>
-          </a:xfrm>
-          <a:prstGeom prst="rect">
-            <a:avLst/>
-          </a:prstGeom>
-          <a:noFill/>
-          <a:ln/>
-        </p:spPr>
-        <p:txBody>
-          <a:bodyPr wrap="square" lIns="0" tIns="0" rIns="0" bIns="0" rtlCol="0" anchor="ctr"/>
-          <a:lstStyle/>
-          <a:p>
-            <a:pPr indent="0" marL="0">
+        <p:txBody>
+          <a:bodyPr wrap="square" lIns="0" tIns="0" rIns="0" bIns="0" rtlCol="0" anchor="ctr"/>
+          <a:lstStyle/>
+          <a:p>
+            <a:pPr marL="0" indent="0">
               <a:buNone/>
             </a:pPr>
             <a:r>
               <a:rPr lang="en-US" sz="2800" b="1" dirty="0">
                 <a:solidFill>
-                  <a:srgbClr val="2A9D8F"/>
-                </a:solidFill>
-              </a:rPr>
-              <a:t>5.0%</a:t>
-            </a:r>
-            <a:endParaRPr lang="en-US" sz="2800" dirty="0"/>
-          </a:p>
-          <a:p>
-            <a:pPr indent="0" marL="0">
+                  <a:schemeClr val="accent1"/>
+                </a:solidFill>
+              </a:rPr>
+              <a:t>   5.0%</a:t>
+            </a:r>
+            <a:endParaRPr lang="en-US" sz="2800" dirty="0">
+              <a:solidFill>
+                <a:schemeClr val="accent1"/>
+              </a:solidFill>
+            </a:endParaRPr>
+          </a:p>
+          <a:p>
+            <a:pPr marL="0" indent="0">
               <a:buNone/>
             </a:pPr>
             <a:r>
@@ -6554,7 +6108,7 @@
                   <a:srgbClr val="2C2C2C"/>
                 </a:solidFill>
               </a:rPr>
-              <a:t>of non-overtime workers leave</a:t>
+              <a:t>       of non-overtime workers leave</a:t>
             </a:r>
             <a:endParaRPr lang="en-US" sz="2800" dirty="0"/>
           </a:p>
@@ -6581,13 +6135,13 @@
           <a:bodyPr wrap="square" lIns="0" tIns="0" rIns="0" bIns="0" rtlCol="0" anchor="ctr"/>
           <a:lstStyle/>
           <a:p>
-            <a:pPr indent="0" marL="0">
+            <a:pPr marL="0" indent="0">
               <a:buNone/>
             </a:pPr>
             <a:r>
               <a:rPr lang="en-US" sz="1200" i="1" dirty="0">
                 <a:solidFill>
-                  <a:srgbClr val="E76F51"/>
+                  <a:srgbClr val="C00000"/>
                 </a:solidFill>
                 <a:latin typeface="Calibri" pitchFamily="34" charset="0"/>
                 <a:ea typeface="Calibri" pitchFamily="34" charset="-122"/>
@@ -6595,7 +6149,11 @@
               </a:rPr>
               <a:t>The vicious cycle: understaffing → overtime → burnout → more departures → more understaffing</a:t>
             </a:r>
-            <a:endParaRPr lang="en-US" sz="1200" dirty="0"/>
+            <a:endParaRPr lang="en-US" sz="1200" dirty="0">
+              <a:solidFill>
+                <a:srgbClr val="C00000"/>
+              </a:solidFill>
+            </a:endParaRPr>
           </a:p>
         </p:txBody>
       </p:sp>
@@ -6620,7 +6178,7 @@
           <a:bodyPr wrap="square" lIns="0" tIns="0" rIns="0" bIns="0" rtlCol="0" anchor="ctr"/>
           <a:lstStyle/>
           <a:p>
-            <a:pPr indent="0" marL="0">
+            <a:pPr marL="0" indent="0">
               <a:buNone/>
             </a:pPr>
             <a:r>
@@ -6632,7 +6190,7 @@
                 <a:ea typeface="Calibri" pitchFamily="34" charset="-122"/>
                 <a:cs typeface="Calibri" pitchFamily="34" charset="-120"/>
               </a:rPr>
-              <a:t>Note: Overtime is recorded as binary (Yes/No). A more granular measure (weekly hours) would enable threshold analysis.</a:t>
+              <a:t>Note: Reporting Specific segments of overtime hours worked would give a better picture and allow for more effective policy changes</a:t>
             </a:r>
             <a:endParaRPr lang="en-US" sz="900" dirty="0"/>
           </a:p>
@@ -6652,8 +6210,9 @@
     <p:bg>
       <p:bgPr>
         <a:solidFill>
-          <a:srgbClr val="FFFFFF"/>
+          <a:schemeClr val="bg1"/>
         </a:solidFill>
+        <a:effectLst/>
       </p:bgPr>
     </p:bg>
     <p:spTree>
@@ -6691,7 +6250,7 @@
           <a:bodyPr wrap="square" lIns="0" tIns="0" rIns="0" bIns="0" rtlCol="0" anchor="ctr"/>
           <a:lstStyle/>
           <a:p>
-            <a:pPr indent="0" marL="0">
+            <a:pPr marL="0" indent="0">
               <a:buNone/>
             </a:pPr>
             <a:r>
@@ -6711,17 +6270,23 @@
       </p:sp>
       <p:graphicFrame>
         <p:nvGraphicFramePr>
-          <p:cNvPr id="3" name="Chart 0" descr=""/>
+          <p:cNvPr id="3" name="Chart 0"/>
           <p:cNvGraphicFramePr/>
-          <p:nvPr/>
+          <p:nvPr>
+            <p:extLst>
+              <p:ext uri="{D42A27DB-BD31-4B8C-83A1-F6EECF244321}">
+                <p14:modId xmlns:p14="http://schemas.microsoft.com/office/powerpoint/2010/main" val="2908731188"/>
+              </p:ext>
+            </p:extLst>
+          </p:nvPr>
         </p:nvGraphicFramePr>
         <p:xfrm>
           <a:off x="640080" y="914400"/>
           <a:ext cx="4572000" cy="3200400"/>
         </p:xfrm>
-        <a:graphic xmlns:a="http://schemas.openxmlformats.org/drawingml/2006/main">
+        <a:graphic>
           <a:graphicData uri="http://schemas.openxmlformats.org/drawingml/2006/chart">
-            <c:chart xmlns:c="http://schemas.openxmlformats.org/drawingml/2006/chart" r:id="rId1"/>
+            <c:chart xmlns:c="http://schemas.openxmlformats.org/drawingml/2006/chart" xmlns:r="http://schemas.openxmlformats.org/officeDocument/2006/relationships" r:id="rId3"/>
           </a:graphicData>
         </a:graphic>
       </p:graphicFrame>
@@ -6739,34 +6304,43 @@
           <a:prstGeom prst="rect">
             <a:avLst/>
           </a:prstGeom>
+          <a:noFill/>
+          <a:ln/>
+        </p:spPr>
+        <p:txBody>
+          <a:bodyPr/>
+          <a:lstStyle/>
+          <a:p>
+            <a:endParaRPr lang="en-US"/>
+          </a:p>
+        </p:txBody>
+      </p:sp>
+      <p:sp>
+        <p:nvSpPr>
+          <p:cNvPr id="5" name="Text 2"/>
+          <p:cNvSpPr/>
+          <p:nvPr/>
+        </p:nvSpPr>
+        <p:spPr>
+          <a:xfrm>
+            <a:off x="5669280" y="922103"/>
+            <a:ext cx="3017520" cy="441795"/>
+          </a:xfrm>
+          <a:prstGeom prst="rect">
+            <a:avLst/>
+          </a:prstGeom>
           <a:solidFill>
-            <a:srgbClr val="F7F7F7"/>
+            <a:schemeClr val="bg1">
+              <a:lumMod val="95000"/>
+            </a:schemeClr>
           </a:solidFill>
           <a:ln/>
         </p:spPr>
-      </p:sp>
-      <p:sp>
-        <p:nvSpPr>
-          <p:cNvPr id="5" name="Text 2"/>
-          <p:cNvSpPr/>
-          <p:nvPr/>
-        </p:nvSpPr>
-        <p:spPr>
-          <a:xfrm>
-            <a:off x="5669280" y="1005840"/>
-            <a:ext cx="3017520" cy="274320"/>
-          </a:xfrm>
-          <a:prstGeom prst="rect">
-            <a:avLst/>
-          </a:prstGeom>
-          <a:noFill/>
-          <a:ln/>
-        </p:spPr>
-        <p:txBody>
-          <a:bodyPr wrap="square" lIns="0" tIns="0" rIns="0" bIns="0" rtlCol="0" anchor="ctr"/>
-          <a:lstStyle/>
-          <a:p>
-            <a:pPr algn="ctr" indent="0" marL="0">
+        <p:txBody>
+          <a:bodyPr wrap="square" lIns="0" tIns="0" rIns="0" bIns="0" rtlCol="0" anchor="ctr"/>
+          <a:lstStyle/>
+          <a:p>
+            <a:pPr marL="0" indent="0" algn="ctr">
               <a:buNone/>
             </a:pPr>
             <a:r>
@@ -6798,20 +6372,24 @@
           <a:prstGeom prst="rect">
             <a:avLst/>
           </a:prstGeom>
-          <a:noFill/>
-          <a:ln/>
-        </p:spPr>
-        <p:txBody>
-          <a:bodyPr wrap="square" lIns="0" tIns="0" rIns="0" bIns="0" rtlCol="0" anchor="ctr"/>
-          <a:lstStyle/>
-          <a:p>
-            <a:pPr algn="ctr" indent="0" marL="0">
+          <a:solidFill>
+            <a:schemeClr val="bg1">
+              <a:lumMod val="95000"/>
+            </a:schemeClr>
+          </a:solidFill>
+          <a:ln/>
+        </p:spPr>
+        <p:txBody>
+          <a:bodyPr wrap="square" lIns="0" tIns="0" rIns="0" bIns="0" rtlCol="0" anchor="ctr"/>
+          <a:lstStyle/>
+          <a:p>
+            <a:pPr marL="0" indent="0" algn="ctr">
               <a:buNone/>
             </a:pPr>
             <a:r>
               <a:rPr lang="en-US" sz="1400" b="1" dirty="0">
                 <a:solidFill>
-                  <a:srgbClr val="2A9D8F"/>
+                  <a:schemeClr val="accent1"/>
                 </a:solidFill>
                 <a:latin typeface="Calibri" pitchFamily="34" charset="0"/>
                 <a:ea typeface="Calibri" pitchFamily="34" charset="-122"/>
@@ -6819,13 +6397,10 @@
               </a:rPr>
               <a:t>Stayed: </a:t>
             </a:r>
-            <a:pPr algn="ctr" indent="0" marL="0">
-              <a:buNone/>
-            </a:pPr>
             <a:r>
               <a:rPr lang="en-US" sz="2000" b="1" dirty="0">
                 <a:solidFill>
-                  <a:srgbClr val="2A9D8F"/>
+                  <a:schemeClr val="accent1"/>
                 </a:solidFill>
                 <a:latin typeface="Calibri" pitchFamily="34" charset="0"/>
                 <a:ea typeface="Calibri" pitchFamily="34" charset="-122"/>
@@ -6833,7 +6408,11 @@
               </a:rPr>
               <a:t>$6,852</a:t>
             </a:r>
-            <a:endParaRPr lang="en-US" sz="1400" dirty="0"/>
+            <a:endParaRPr lang="en-US" sz="1400" dirty="0">
+              <a:solidFill>
+                <a:schemeClr val="accent1"/>
+              </a:solidFill>
+            </a:endParaRPr>
           </a:p>
         </p:txBody>
       </p:sp>
@@ -6851,20 +6430,24 @@
           <a:prstGeom prst="rect">
             <a:avLst/>
           </a:prstGeom>
-          <a:noFill/>
-          <a:ln/>
-        </p:spPr>
-        <p:txBody>
-          <a:bodyPr wrap="square" lIns="0" tIns="0" rIns="0" bIns="0" rtlCol="0" anchor="ctr"/>
-          <a:lstStyle/>
-          <a:p>
-            <a:pPr algn="ctr" indent="0" marL="0">
+          <a:solidFill>
+            <a:schemeClr val="bg1">
+              <a:lumMod val="95000"/>
+            </a:schemeClr>
+          </a:solidFill>
+          <a:ln/>
+        </p:spPr>
+        <p:txBody>
+          <a:bodyPr wrap="square" lIns="0" tIns="0" rIns="0" bIns="0" rtlCol="0" anchor="ctr"/>
+          <a:lstStyle/>
+          <a:p>
+            <a:pPr marL="0" indent="0" algn="ctr">
               <a:buNone/>
             </a:pPr>
             <a:r>
               <a:rPr lang="en-US" sz="1400" b="1" dirty="0">
                 <a:solidFill>
-                  <a:srgbClr val="E76F51"/>
+                  <a:srgbClr val="C00000"/>
                 </a:solidFill>
                 <a:latin typeface="Calibri" pitchFamily="34" charset="0"/>
                 <a:ea typeface="Calibri" pitchFamily="34" charset="-122"/>
@@ -6872,13 +6455,10 @@
               </a:rPr>
               <a:t>Left: </a:t>
             </a:r>
-            <a:pPr algn="ctr" indent="0" marL="0">
-              <a:buNone/>
-            </a:pPr>
             <a:r>
               <a:rPr lang="en-US" sz="2000" b="1" dirty="0">
                 <a:solidFill>
-                  <a:srgbClr val="E76F51"/>
+                  <a:srgbClr val="C00000"/>
                 </a:solidFill>
                 <a:latin typeface="Calibri" pitchFamily="34" charset="0"/>
                 <a:ea typeface="Calibri" pitchFamily="34" charset="-122"/>
@@ -6886,7 +6466,11 @@
               </a:rPr>
               <a:t>$4,024</a:t>
             </a:r>
-            <a:endParaRPr lang="en-US" sz="1400" dirty="0"/>
+            <a:endParaRPr lang="en-US" sz="1400" dirty="0">
+              <a:solidFill>
+                <a:srgbClr val="C00000"/>
+              </a:solidFill>
+            </a:endParaRPr>
           </a:p>
         </p:txBody>
       </p:sp>
@@ -6904,14 +6488,18 @@
           <a:prstGeom prst="rect">
             <a:avLst/>
           </a:prstGeom>
-          <a:noFill/>
-          <a:ln/>
-        </p:spPr>
-        <p:txBody>
-          <a:bodyPr wrap="square" lIns="0" tIns="0" rIns="0" bIns="0" rtlCol="0" anchor="ctr"/>
-          <a:lstStyle/>
-          <a:p>
-            <a:pPr algn="ctr" indent="0" marL="0">
+          <a:solidFill>
+            <a:schemeClr val="bg1">
+              <a:lumMod val="95000"/>
+            </a:schemeClr>
+          </a:solidFill>
+          <a:ln/>
+        </p:spPr>
+        <p:txBody>
+          <a:bodyPr wrap="square" lIns="0" tIns="0" rIns="0" bIns="0" rtlCol="0" anchor="ctr"/>
+          <a:lstStyle/>
+          <a:p>
+            <a:pPr marL="0" indent="0" algn="ctr">
               <a:buNone/>
             </a:pPr>
             <a:r>
@@ -6950,7 +6538,7 @@
           <a:bodyPr wrap="square" lIns="0" tIns="0" rIns="0" bIns="0" rtlCol="0" anchor="ctr"/>
           <a:lstStyle/>
           <a:p>
-            <a:pPr indent="0" marL="0">
+            <a:pPr marL="0" indent="0">
               <a:lnSpc>
                 <a:spcPct val="120000"/>
               </a:lnSpc>
@@ -6987,6 +6575,7 @@
         <a:solidFill>
           <a:srgbClr val="FFFFFF"/>
         </a:solidFill>
+        <a:effectLst/>
       </p:bgPr>
     </p:bg>
     <p:spTree>
@@ -7024,7 +6613,7 @@
           <a:bodyPr wrap="square" lIns="0" tIns="0" rIns="0" bIns="0" rtlCol="0" anchor="ctr"/>
           <a:lstStyle/>
           <a:p>
-            <a:pPr indent="0" marL="0">
+            <a:pPr marL="0" indent="0">
               <a:buNone/>
             </a:pPr>
             <a:r>
@@ -7044,17 +6633,23 @@
       </p:sp>
       <p:graphicFrame>
         <p:nvGraphicFramePr>
-          <p:cNvPr id="3" name="Chart 0" descr=""/>
+          <p:cNvPr id="3" name="Chart 0"/>
           <p:cNvGraphicFramePr/>
-          <p:nvPr/>
+          <p:nvPr>
+            <p:extLst>
+              <p:ext uri="{D42A27DB-BD31-4B8C-83A1-F6EECF244321}">
+                <p14:modId xmlns:p14="http://schemas.microsoft.com/office/powerpoint/2010/main" val="878681863"/>
+              </p:ext>
+            </p:extLst>
+          </p:nvPr>
         </p:nvGraphicFramePr>
         <p:xfrm>
           <a:off x="640080" y="914400"/>
           <a:ext cx="4572000" cy="3200400"/>
         </p:xfrm>
-        <a:graphic xmlns:a="http://schemas.openxmlformats.org/drawingml/2006/main">
+        <a:graphic>
           <a:graphicData uri="http://schemas.openxmlformats.org/drawingml/2006/chart">
-            <c:chart xmlns:c="http://schemas.openxmlformats.org/drawingml/2006/chart" r:id="rId1"/>
+            <c:chart xmlns:c="http://schemas.openxmlformats.org/drawingml/2006/chart" xmlns:r="http://schemas.openxmlformats.org/officeDocument/2006/relationships" r:id="rId3"/>
           </a:graphicData>
         </a:graphic>
       </p:graphicFrame>
@@ -7072,31 +6667,16 @@
           <a:prstGeom prst="rect">
             <a:avLst/>
           </a:prstGeom>
-          <a:solidFill>
-            <a:srgbClr val="FEF2EF"/>
-          </a:solidFill>
-          <a:ln/>
-        </p:spPr>
-      </p:sp>
-      <p:sp>
-        <p:nvSpPr>
-          <p:cNvPr id="5" name="Shape 2"/>
-          <p:cNvSpPr/>
-          <p:nvPr/>
-        </p:nvSpPr>
-        <p:spPr>
-          <a:xfrm>
-            <a:off x="5669280" y="914400"/>
-            <a:ext cx="54864" cy="2286000"/>
-          </a:xfrm>
-          <a:prstGeom prst="rect">
-            <a:avLst/>
-          </a:prstGeom>
-          <a:solidFill>
-            <a:srgbClr val="E76F51"/>
-          </a:solidFill>
-          <a:ln/>
-        </p:spPr>
+          <a:noFill/>
+          <a:ln/>
+        </p:spPr>
+        <p:txBody>
+          <a:bodyPr/>
+          <a:lstStyle/>
+          <a:p>
+            <a:endParaRPr lang="en-US"/>
+          </a:p>
+        </p:txBody>
       </p:sp>
       <p:sp>
         <p:nvSpPr>
@@ -7112,87 +6692,103 @@
           <a:prstGeom prst="rect">
             <a:avLst/>
           </a:prstGeom>
-          <a:noFill/>
-          <a:ln/>
-        </p:spPr>
-        <p:txBody>
-          <a:bodyPr wrap="square" lIns="0" tIns="0" rIns="0" bIns="0" rtlCol="0" anchor="ctr"/>
-          <a:lstStyle/>
-          <a:p>
-            <a:pPr indent="0" marL="0">
+          <a:solidFill>
+            <a:schemeClr val="bg1">
+              <a:lumMod val="95000"/>
+            </a:schemeClr>
+          </a:solidFill>
+          <a:ln/>
+        </p:spPr>
+        <p:txBody>
+          <a:bodyPr wrap="square" lIns="0" tIns="0" rIns="0" bIns="0" rtlCol="0" anchor="ctr"/>
+          <a:lstStyle/>
+          <a:p>
+            <a:pPr marL="0" indent="0">
               <a:buNone/>
             </a:pPr>
             <a:r>
               <a:rPr lang="en-US" sz="2400" b="1" dirty="0">
                 <a:solidFill>
-                  <a:srgbClr val="E76F51"/>
+                  <a:srgbClr val="C00000"/>
                 </a:solidFill>
               </a:rPr>
               <a:t>107 of 199</a:t>
             </a:r>
+            <a:endParaRPr lang="en-US" sz="2400" dirty="0">
+              <a:solidFill>
+                <a:srgbClr val="C00000"/>
+              </a:solidFill>
+            </a:endParaRPr>
+          </a:p>
+          <a:p>
+            <a:pPr marL="0" indent="0">
+              <a:buNone/>
+            </a:pPr>
+            <a:r>
+              <a:rPr lang="en-US" sz="1300" dirty="0">
+                <a:solidFill>
+                  <a:srgbClr val="2C2C2C"/>
+                </a:solidFill>
+              </a:rPr>
+              <a:t>departures happen within the first 2 years</a:t>
+            </a:r>
             <a:endParaRPr lang="en-US" sz="2400" dirty="0"/>
           </a:p>
           <a:p>
-            <a:pPr indent="0" marL="0">
-              <a:buNone/>
-            </a:pPr>
-            <a:r>
-              <a:rPr lang="en-US" sz="1300" dirty="0">
-                <a:solidFill>
-                  <a:srgbClr val="2C2C2C"/>
-                </a:solidFill>
-              </a:rPr>
-              <a:t>departures happen within the first 2 years</a:t>
-            </a:r>
+            <a:pPr marL="0" indent="0">
+              <a:buNone/>
+            </a:pPr>
             <a:endParaRPr lang="en-US" sz="2400" dirty="0"/>
           </a:p>
           <a:p>
-            <a:pPr indent="0" marL="0">
-              <a:buNone/>
-            </a:pPr>
+            <a:pPr marL="0" indent="0">
+              <a:buNone/>
+            </a:pPr>
+            <a:r>
+              <a:rPr lang="en-US" sz="1100" dirty="0">
+                <a:solidFill>
+                  <a:srgbClr val="5A5A5A"/>
+                </a:solidFill>
+              </a:rPr>
+              <a:t>Average tenure:</a:t>
+            </a:r>
             <a:endParaRPr lang="en-US" sz="2400" dirty="0"/>
           </a:p>
           <a:p>
-            <a:pPr indent="0" marL="0">
-              <a:buNone/>
-            </a:pPr>
-            <a:r>
-              <a:rPr lang="en-US" sz="1100" dirty="0">
-                <a:solidFill>
-                  <a:srgbClr val="5A5A5A"/>
-                </a:solidFill>
-              </a:rPr>
-              <a:t>Average tenure:</a:t>
-            </a:r>
-            <a:endParaRPr lang="en-US" sz="2400" dirty="0"/>
-          </a:p>
-          <a:p>
-            <a:pPr indent="0" marL="0">
+            <a:pPr marL="0" indent="0">
               <a:buNone/>
             </a:pPr>
             <a:r>
               <a:rPr lang="en-US" sz="1100" b="1" dirty="0">
                 <a:solidFill>
-                  <a:srgbClr val="2A9D8F"/>
+                  <a:schemeClr val="accent1"/>
                 </a:solidFill>
               </a:rPr>
               <a:t>Stayed: 7.48 years</a:t>
             </a:r>
-            <a:endParaRPr lang="en-US" sz="2400" dirty="0"/>
-          </a:p>
-          <a:p>
-            <a:pPr indent="0" marL="0">
+            <a:endParaRPr lang="en-US" sz="2400" dirty="0">
+              <a:solidFill>
+                <a:schemeClr val="accent1"/>
+              </a:solidFill>
+            </a:endParaRPr>
+          </a:p>
+          <a:p>
+            <a:pPr marL="0" indent="0">
               <a:buNone/>
             </a:pPr>
             <a:r>
               <a:rPr lang="en-US" sz="1100" b="1" dirty="0">
                 <a:solidFill>
-                  <a:srgbClr val="E76F51"/>
+                  <a:srgbClr val="C00000"/>
                 </a:solidFill>
               </a:rPr>
               <a:t>Left: 3.69 years</a:t>
             </a:r>
-            <a:endParaRPr lang="en-US" sz="2400" dirty="0"/>
+            <a:endParaRPr lang="en-US" sz="2400" dirty="0">
+              <a:solidFill>
+                <a:srgbClr val="C00000"/>
+              </a:solidFill>
+            </a:endParaRPr>
           </a:p>
         </p:txBody>
       </p:sp>
@@ -7217,7 +6813,7 @@
           <a:bodyPr wrap="square" lIns="0" tIns="0" rIns="0" bIns="0" rtlCol="0" anchor="ctr"/>
           <a:lstStyle/>
           <a:p>
-            <a:pPr indent="0" marL="0">
+            <a:pPr marL="0" indent="0">
               <a:lnSpc>
                 <a:spcPct val="120000"/>
               </a:lnSpc>
@@ -7254,6 +6850,7 @@
         <a:solidFill>
           <a:srgbClr val="FFFFFF"/>
         </a:solidFill>
+        <a:effectLst/>
       </p:bgPr>
     </p:bg>
     <p:spTree>
@@ -7291,7 +6888,7 @@
           <a:bodyPr wrap="square" lIns="0" tIns="0" rIns="0" bIns="0" rtlCol="0" anchor="ctr"/>
           <a:lstStyle/>
           <a:p>
-            <a:pPr indent="0" marL="0">
+            <a:pPr marL="0" indent="0">
               <a:buNone/>
             </a:pPr>
             <a:r>
@@ -7330,7 +6927,7 @@
           <a:bodyPr wrap="square" lIns="0" tIns="0" rIns="0" bIns="0" rtlCol="0" anchor="ctr"/>
           <a:lstStyle/>
           <a:p>
-            <a:pPr indent="0" marL="0">
+            <a:pPr marL="0" indent="0">
               <a:buNone/>
             </a:pPr>
             <a:r>
@@ -7350,17 +6947,23 @@
       </p:sp>
       <p:graphicFrame>
         <p:nvGraphicFramePr>
-          <p:cNvPr id="4" name="Chart 0" descr=""/>
+          <p:cNvPr id="4" name="Chart 0"/>
           <p:cNvGraphicFramePr/>
-          <p:nvPr/>
+          <p:nvPr>
+            <p:extLst>
+              <p:ext uri="{D42A27DB-BD31-4B8C-83A1-F6EECF244321}">
+                <p14:modId xmlns:p14="http://schemas.microsoft.com/office/powerpoint/2010/main" val="975246689"/>
+              </p:ext>
+            </p:extLst>
+          </p:nvPr>
         </p:nvGraphicFramePr>
         <p:xfrm>
           <a:off x="457200" y="1097280"/>
           <a:ext cx="4114800" cy="2560320"/>
         </p:xfrm>
-        <a:graphic xmlns:a="http://schemas.openxmlformats.org/drawingml/2006/main">
+        <a:graphic>
           <a:graphicData uri="http://schemas.openxmlformats.org/drawingml/2006/chart">
-            <c:chart xmlns:c="http://schemas.openxmlformats.org/drawingml/2006/chart" r:id="rId1"/>
+            <c:chart xmlns:c="http://schemas.openxmlformats.org/drawingml/2006/chart" xmlns:r="http://schemas.openxmlformats.org/officeDocument/2006/relationships" r:id="rId3"/>
           </a:graphicData>
         </a:graphic>
       </p:graphicFrame>
@@ -7385,7 +6988,7 @@
           <a:bodyPr wrap="square" lIns="0" tIns="0" rIns="0" bIns="0" rtlCol="0" anchor="ctr"/>
           <a:lstStyle/>
           <a:p>
-            <a:pPr indent="0" marL="0">
+            <a:pPr marL="0" indent="0">
               <a:buNone/>
             </a:pPr>
             <a:r>
@@ -7405,17 +7008,23 @@
       </p:sp>
       <p:graphicFrame>
         <p:nvGraphicFramePr>
-          <p:cNvPr id="6" name="Chart 1" descr=""/>
+          <p:cNvPr id="6" name="Chart 1"/>
           <p:cNvGraphicFramePr/>
-          <p:nvPr/>
+          <p:nvPr>
+            <p:extLst>
+              <p:ext uri="{D42A27DB-BD31-4B8C-83A1-F6EECF244321}">
+                <p14:modId xmlns:p14="http://schemas.microsoft.com/office/powerpoint/2010/main" val="3031969687"/>
+              </p:ext>
+            </p:extLst>
+          </p:nvPr>
         </p:nvGraphicFramePr>
         <p:xfrm>
           <a:off x="4663440" y="1097280"/>
           <a:ext cx="4114800" cy="2560320"/>
         </p:xfrm>
-        <a:graphic xmlns:a="http://schemas.openxmlformats.org/drawingml/2006/main">
+        <a:graphic>
           <a:graphicData uri="http://schemas.openxmlformats.org/drawingml/2006/chart">
-            <c:chart xmlns:c="http://schemas.openxmlformats.org/drawingml/2006/chart" r:id="rId2"/>
+            <c:chart xmlns:c="http://schemas.openxmlformats.org/drawingml/2006/chart" xmlns:r="http://schemas.openxmlformats.org/officeDocument/2006/relationships" r:id="rId4"/>
           </a:graphicData>
         </a:graphic>
       </p:graphicFrame>
@@ -7440,7 +7049,7 @@
           <a:bodyPr wrap="square" lIns="0" tIns="0" rIns="0" bIns="0" rtlCol="0" anchor="ctr"/>
           <a:lstStyle/>
           <a:p>
-            <a:pPr indent="0" marL="0">
+            <a:pPr marL="0" indent="0">
               <a:lnSpc>
                 <a:spcPct val="120000"/>
               </a:lnSpc>
@@ -7477,6 +7086,7 @@
         <a:solidFill>
           <a:srgbClr val="FFFFFF"/>
         </a:solidFill>
+        <a:effectLst/>
       </p:bgPr>
     </p:bg>
     <p:spTree>
@@ -7514,7 +7124,7 @@
           <a:bodyPr wrap="square" lIns="0" tIns="0" rIns="0" bIns="0" rtlCol="0" anchor="ctr"/>
           <a:lstStyle/>
           <a:p>
-            <a:pPr indent="0" marL="0">
+            <a:pPr marL="0" indent="0">
               <a:buNone/>
             </a:pPr>
             <a:r>
@@ -7534,17 +7144,23 @@
       </p:sp>
       <p:graphicFrame>
         <p:nvGraphicFramePr>
-          <p:cNvPr id="3" name="Chart 0" descr=""/>
+          <p:cNvPr id="3" name="Chart 0"/>
           <p:cNvGraphicFramePr/>
-          <p:nvPr/>
+          <p:nvPr>
+            <p:extLst>
+              <p:ext uri="{D42A27DB-BD31-4B8C-83A1-F6EECF244321}">
+                <p14:modId xmlns:p14="http://schemas.microsoft.com/office/powerpoint/2010/main" val="568231513"/>
+              </p:ext>
+            </p:extLst>
+          </p:nvPr>
         </p:nvGraphicFramePr>
         <p:xfrm>
           <a:off x="640080" y="914400"/>
           <a:ext cx="5029200" cy="3200400"/>
         </p:xfrm>
-        <a:graphic xmlns:a="http://schemas.openxmlformats.org/drawingml/2006/main">
+        <a:graphic>
           <a:graphicData uri="http://schemas.openxmlformats.org/drawingml/2006/chart">
-            <c:chart xmlns:c="http://schemas.openxmlformats.org/drawingml/2006/chart" r:id="rId1"/>
+            <c:chart xmlns:c="http://schemas.openxmlformats.org/drawingml/2006/chart" xmlns:r="http://schemas.openxmlformats.org/officeDocument/2006/relationships" r:id="rId3"/>
           </a:graphicData>
         </a:graphic>
       </p:graphicFrame>
@@ -7567,6 +7183,13 @@
           </a:solidFill>
           <a:ln/>
         </p:spPr>
+        <p:txBody>
+          <a:bodyPr/>
+          <a:lstStyle/>
+          <a:p>
+            <a:endParaRPr lang="en-US"/>
+          </a:p>
+        </p:txBody>
       </p:sp>
       <p:sp>
         <p:nvSpPr>
@@ -7589,21 +7212,63 @@
           <a:bodyPr wrap="square" lIns="0" tIns="0" rIns="0" bIns="0" rtlCol="0" anchor="ctr"/>
           <a:lstStyle/>
           <a:p>
-            <a:pPr indent="0" marL="0">
+            <a:pPr marL="0" indent="0">
               <a:buNone/>
             </a:pPr>
             <a:r>
               <a:rPr lang="en-US" sz="1800" b="1" dirty="0">
                 <a:solidFill>
-                  <a:srgbClr val="E76F51"/>
+                  <a:srgbClr val="C00000"/>
                 </a:solidFill>
               </a:rPr>
               <a:t>822 Nurses</a:t>
             </a:r>
+            <a:endParaRPr lang="en-US" sz="1800" dirty="0">
+              <a:solidFill>
+                <a:srgbClr val="C00000"/>
+              </a:solidFill>
+            </a:endParaRPr>
+          </a:p>
+          <a:p>
+            <a:pPr marL="0" indent="0">
+              <a:buNone/>
+            </a:pPr>
+            <a:r>
+              <a:rPr lang="en-US" sz="1200" dirty="0">
+                <a:solidFill>
+                  <a:srgbClr val="2C2C2C"/>
+                </a:solidFill>
+              </a:rPr>
+              <a:t>at 13% attrition = largest at-risk group</a:t>
+            </a:r>
             <a:endParaRPr lang="en-US" sz="1800" dirty="0"/>
           </a:p>
           <a:p>
-            <a:pPr indent="0" marL="0">
+            <a:pPr marL="0" indent="0">
+              <a:buNone/>
+            </a:pPr>
+            <a:endParaRPr lang="en-US" sz="1800" dirty="0"/>
+          </a:p>
+          <a:p>
+            <a:pPr marL="0" indent="0">
+              <a:buNone/>
+            </a:pPr>
+            <a:r>
+              <a:rPr lang="en-US" sz="1800" b="1" dirty="0">
+                <a:solidFill>
+                  <a:srgbClr val="C00000"/>
+                </a:solidFill>
+              </a:rPr>
+              <a:t>534 'Other' roles</a:t>
+            </a:r>
+            <a:endParaRPr lang="en-US" sz="1800" dirty="0">
+              <a:solidFill>
+                <a:srgbClr val="C00000"/>
+              </a:solidFill>
+            </a:endParaRPr>
+          </a:p>
+          <a:p>
+            <a:pPr marL="0" indent="0">
               <a:buNone/>
             </a:pPr>
             <a:r>
@@ -7612,52 +7277,18 @@
                   <a:srgbClr val="2C2C2C"/>
                 </a:solidFill>
               </a:rPr>
-              <a:t>at 13% attrition = largest at-risk group</a:t>
+              <a:t>at 16.3% = highest rate but undefined</a:t>
             </a:r>
             <a:endParaRPr lang="en-US" sz="1800" dirty="0"/>
           </a:p>
           <a:p>
-            <a:pPr indent="0" marL="0">
+            <a:pPr marL="0" indent="0">
               <a:buNone/>
             </a:pPr>
             <a:endParaRPr lang="en-US" sz="1800" dirty="0"/>
           </a:p>
           <a:p>
-            <a:pPr indent="0" marL="0">
-              <a:buNone/>
-            </a:pPr>
-            <a:r>
-              <a:rPr lang="en-US" sz="1800" b="1" dirty="0">
-                <a:solidFill>
-                  <a:srgbClr val="E76F51"/>
-                </a:solidFill>
-              </a:rPr>
-              <a:t>534 'Other' roles</a:t>
-            </a:r>
-            <a:endParaRPr lang="en-US" sz="1800" dirty="0"/>
-          </a:p>
-          <a:p>
-            <a:pPr indent="0" marL="0">
-              <a:buNone/>
-            </a:pPr>
-            <a:r>
-              <a:rPr lang="en-US" sz="1200" dirty="0">
-                <a:solidFill>
-                  <a:srgbClr val="2C2C2C"/>
-                </a:solidFill>
-              </a:rPr>
-              <a:t>at 16.3% = highest rate but undefined</a:t>
-            </a:r>
-            <a:endParaRPr lang="en-US" sz="1800" dirty="0"/>
-          </a:p>
-          <a:p>
-            <a:pPr indent="0" marL="0">
-              <a:buNone/>
-            </a:pPr>
-            <a:endParaRPr lang="en-US" sz="1800" dirty="0"/>
-          </a:p>
-          <a:p>
-            <a:pPr indent="0" marL="0">
+            <a:pPr marL="0" indent="0">
               <a:buNone/>
             </a:pPr>
             <a:r>
@@ -7668,9 +7299,6 @@
               </a:rPr>
               <a:t>Data limitation: </a:t>
             </a:r>
-            <a:pPr indent="0" marL="0">
-              <a:buNone/>
-            </a:pPr>
             <a:r>
               <a:rPr lang="en-US" sz="1000" dirty="0">
                 <a:solidFill>
@@ -7699,6 +7327,7 @@
         <a:solidFill>
           <a:srgbClr val="FFFFFF"/>
         </a:solidFill>
+        <a:effectLst/>
       </p:bgPr>
     </p:bg>
     <p:spTree>
@@ -7736,7 +7365,7 @@
           <a:bodyPr wrap="square" lIns="0" tIns="0" rIns="0" bIns="0" rtlCol="0" anchor="ctr"/>
           <a:lstStyle/>
           <a:p>
-            <a:pPr indent="0" marL="0">
+            <a:pPr marL="0" indent="0">
               <a:buNone/>
             </a:pPr>
             <a:r>
@@ -7762,8 +7391,8 @@
         </p:nvSpPr>
         <p:spPr>
           <a:xfrm>
-            <a:off x="640080" y="960120"/>
-            <a:ext cx="7863840" cy="640080"/>
+            <a:off x="640080" y="811589"/>
+            <a:ext cx="7863840" cy="937142"/>
           </a:xfrm>
           <a:prstGeom prst="rect">
             <a:avLst/>
@@ -7773,26 +7402,13 @@
           </a:solidFill>
           <a:ln/>
         </p:spPr>
-      </p:sp>
-      <p:sp>
-        <p:nvSpPr>
-          <p:cNvPr id="4" name="Shape 2"/>
-          <p:cNvSpPr/>
-          <p:nvPr/>
-        </p:nvSpPr>
-        <p:spPr>
-          <a:xfrm>
-            <a:off x="640080" y="960120"/>
-            <a:ext cx="54864" cy="640080"/>
-          </a:xfrm>
-          <a:prstGeom prst="rect">
-            <a:avLst/>
-          </a:prstGeom>
-          <a:solidFill>
-            <a:srgbClr val="E76F51"/>
-          </a:solidFill>
-          <a:ln/>
-        </p:spPr>
+        <p:txBody>
+          <a:bodyPr/>
+          <a:lstStyle/>
+          <a:p>
+            <a:endParaRPr lang="en-US"/>
+          </a:p>
+        </p:txBody>
       </p:sp>
       <p:sp>
         <p:nvSpPr>
@@ -7815,14 +7431,11 @@
           <a:bodyPr wrap="square" lIns="0" tIns="0" rIns="0" bIns="0" rtlCol="0" anchor="ctr"/>
           <a:lstStyle/>
           <a:p>
-            <a:pPr indent="0" marL="0">
+            <a:pPr marL="0" indent="0">
               <a:buNone/>
             </a:pPr>
             <a:r>
               <a:rPr lang="en-US" sz="2000" b="1" dirty="0">
-                <a:solidFill>
-                  <a:srgbClr val="E76F51"/>
-                </a:solidFill>
                 <a:latin typeface="Georgia" pitchFamily="34" charset="0"/>
                 <a:ea typeface="Georgia" pitchFamily="34" charset="-122"/>
                 <a:cs typeface="Georgia" pitchFamily="34" charset="-120"/>
@@ -7854,7 +7467,7 @@
           <a:bodyPr wrap="square" lIns="0" tIns="0" rIns="0" bIns="0" rtlCol="0" anchor="ctr"/>
           <a:lstStyle/>
           <a:p>
-            <a:pPr indent="0" marL="0">
+            <a:pPr marL="0" indent="0">
               <a:buNone/>
             </a:pPr>
             <a:r>
@@ -7893,57 +7506,97 @@
           <a:bodyPr wrap="square" lIns="0" tIns="0" rIns="0" bIns="0" rtlCol="0" anchor="ctr"/>
           <a:lstStyle/>
           <a:p>
-            <a:pPr indent="0" marL="0">
+            <a:pPr marL="0" indent="0">
               <a:buNone/>
             </a:pPr>
             <a:r>
               <a:rPr lang="en-US" sz="1400" b="1" dirty="0">
                 <a:solidFill>
-                  <a:srgbClr val="E76F51"/>
+                  <a:srgbClr val="C00000"/>
                 </a:solidFill>
                 <a:latin typeface="Calibri" pitchFamily="34" charset="0"/>
                 <a:ea typeface="Calibri" pitchFamily="34" charset="-122"/>
                 <a:cs typeface="Calibri" pitchFamily="34" charset="-120"/>
               </a:rPr>
-              <a:t>29.2% vs 5.0%</a:t>
-            </a:r>
-            <a:endParaRPr lang="en-US" sz="1400" dirty="0"/>
-          </a:p>
-        </p:txBody>
-      </p:sp>
-      <p:sp>
-        <p:nvSpPr>
-          <p:cNvPr id="8" name="Text 6"/>
-          <p:cNvSpPr/>
-          <p:nvPr/>
-        </p:nvSpPr>
-        <p:spPr>
-          <a:xfrm>
-            <a:off x="5212080" y="960120"/>
-            <a:ext cx="3200400" cy="640080"/>
-          </a:xfrm>
-          <a:prstGeom prst="rect">
-            <a:avLst/>
-          </a:prstGeom>
-          <a:noFill/>
-          <a:ln/>
-        </p:spPr>
-        <p:txBody>
-          <a:bodyPr wrap="square" lIns="0" tIns="0" rIns="0" bIns="0" rtlCol="0" anchor="ctr"/>
-          <a:lstStyle/>
-          <a:p>
-            <a:pPr indent="0" marL="0">
-              <a:buNone/>
-            </a:pPr>
-            <a:r>
-              <a:rPr lang="en-US" sz="1100" dirty="0">
-                <a:solidFill>
-                  <a:srgbClr val="5A5A5A"/>
+              <a:t>29.2% </a:t>
+            </a:r>
+            <a:r>
+              <a:rPr lang="en-US" sz="1400" b="1" dirty="0">
+                <a:solidFill>
+                  <a:schemeClr val="tx1">
+                    <a:lumMod val="50000"/>
+                    <a:lumOff val="50000"/>
+                  </a:schemeClr>
                 </a:solidFill>
                 <a:latin typeface="Calibri" pitchFamily="34" charset="0"/>
                 <a:ea typeface="Calibri" pitchFamily="34" charset="-122"/>
                 <a:cs typeface="Calibri" pitchFamily="34" charset="-120"/>
               </a:rPr>
+              <a:t>vs</a:t>
+            </a:r>
+            <a:r>
+              <a:rPr lang="en-US" sz="1400" b="1" dirty="0">
+                <a:solidFill>
+                  <a:srgbClr val="E76F51"/>
+                </a:solidFill>
+                <a:latin typeface="Calibri" pitchFamily="34" charset="0"/>
+                <a:ea typeface="Calibri" pitchFamily="34" charset="-122"/>
+                <a:cs typeface="Calibri" pitchFamily="34" charset="-120"/>
+              </a:rPr>
+              <a:t> </a:t>
+            </a:r>
+            <a:r>
+              <a:rPr lang="en-US" sz="1400" b="1" dirty="0">
+                <a:solidFill>
+                  <a:schemeClr val="accent1"/>
+                </a:solidFill>
+                <a:latin typeface="Calibri" pitchFamily="34" charset="0"/>
+                <a:ea typeface="Calibri" pitchFamily="34" charset="-122"/>
+                <a:cs typeface="Calibri" pitchFamily="34" charset="-120"/>
+              </a:rPr>
+              <a:t>5.0%</a:t>
+            </a:r>
+            <a:endParaRPr lang="en-US" sz="1400" dirty="0">
+              <a:solidFill>
+                <a:schemeClr val="accent1"/>
+              </a:solidFill>
+            </a:endParaRPr>
+          </a:p>
+        </p:txBody>
+      </p:sp>
+      <p:sp>
+        <p:nvSpPr>
+          <p:cNvPr id="8" name="Text 6"/>
+          <p:cNvSpPr/>
+          <p:nvPr/>
+        </p:nvSpPr>
+        <p:spPr>
+          <a:xfrm>
+            <a:off x="5212080" y="960120"/>
+            <a:ext cx="3200400" cy="640080"/>
+          </a:xfrm>
+          <a:prstGeom prst="rect">
+            <a:avLst/>
+          </a:prstGeom>
+          <a:noFill/>
+          <a:ln/>
+        </p:spPr>
+        <p:txBody>
+          <a:bodyPr wrap="square" lIns="0" tIns="0" rIns="0" bIns="0" rtlCol="0" anchor="ctr"/>
+          <a:lstStyle/>
+          <a:p>
+            <a:pPr marL="0" indent="0">
+              <a:buNone/>
+            </a:pPr>
+            <a:r>
+              <a:rPr lang="en-US" sz="1100" dirty="0">
+                <a:solidFill>
+                  <a:srgbClr val="5A5A5A"/>
+                </a:solidFill>
+                <a:latin typeface="Calibri" pitchFamily="34" charset="0"/>
+                <a:ea typeface="Calibri" pitchFamily="34" charset="-122"/>
+                <a:cs typeface="Calibri" pitchFamily="34" charset="-120"/>
+              </a:rPr>
               <a:t>Nearly 6x difference. Single strongest predictor.</a:t>
             </a:r>
             <a:endParaRPr lang="en-US" sz="1100" dirty="0"/>
@@ -7958,8 +7611,8 @@
         </p:nvSpPr>
         <p:spPr>
           <a:xfrm>
-            <a:off x="640080" y="1737360"/>
-            <a:ext cx="7863840" cy="640080"/>
+            <a:off x="640080" y="1588829"/>
+            <a:ext cx="7863840" cy="937142"/>
           </a:xfrm>
           <a:prstGeom prst="rect">
             <a:avLst/>
@@ -7969,26 +7622,13 @@
           </a:solidFill>
           <a:ln/>
         </p:spPr>
-      </p:sp>
-      <p:sp>
-        <p:nvSpPr>
-          <p:cNvPr id="10" name="Shape 8"/>
-          <p:cNvSpPr/>
-          <p:nvPr/>
-        </p:nvSpPr>
-        <p:spPr>
-          <a:xfrm>
-            <a:off x="640080" y="1737360"/>
-            <a:ext cx="54864" cy="640080"/>
-          </a:xfrm>
-          <a:prstGeom prst="rect">
-            <a:avLst/>
-          </a:prstGeom>
-          <a:solidFill>
-            <a:srgbClr val="E76F51"/>
-          </a:solidFill>
-          <a:ln/>
-        </p:spPr>
+        <p:txBody>
+          <a:bodyPr/>
+          <a:lstStyle/>
+          <a:p>
+            <a:endParaRPr lang="en-US"/>
+          </a:p>
+        </p:txBody>
       </p:sp>
       <p:sp>
         <p:nvSpPr>
@@ -8011,14 +7651,11 @@
           <a:bodyPr wrap="square" lIns="0" tIns="0" rIns="0" bIns="0" rtlCol="0" anchor="ctr"/>
           <a:lstStyle/>
           <a:p>
-            <a:pPr indent="0" marL="0">
+            <a:pPr marL="0" indent="0">
               <a:buNone/>
             </a:pPr>
             <a:r>
               <a:rPr lang="en-US" sz="2000" b="1" dirty="0">
-                <a:solidFill>
-                  <a:srgbClr val="E76F51"/>
-                </a:solidFill>
                 <a:latin typeface="Georgia" pitchFamily="34" charset="0"/>
                 <a:ea typeface="Georgia" pitchFamily="34" charset="-122"/>
                 <a:cs typeface="Georgia" pitchFamily="34" charset="-120"/>
@@ -8050,7 +7687,7 @@
           <a:bodyPr wrap="square" lIns="0" tIns="0" rIns="0" bIns="0" rtlCol="0" anchor="ctr"/>
           <a:lstStyle/>
           <a:p>
-            <a:pPr indent="0" marL="0">
+            <a:pPr marL="0" indent="0">
               <a:buNone/>
             </a:pPr>
             <a:r>
@@ -8089,13 +7726,13 @@
           <a:bodyPr wrap="square" lIns="0" tIns="0" rIns="0" bIns="0" rtlCol="0" anchor="ctr"/>
           <a:lstStyle/>
           <a:p>
-            <a:pPr indent="0" marL="0">
+            <a:pPr marL="0" indent="0">
               <a:buNone/>
             </a:pPr>
             <a:r>
               <a:rPr lang="en-US" sz="1400" b="1" dirty="0">
                 <a:solidFill>
-                  <a:srgbClr val="E76F51"/>
+                  <a:srgbClr val="C00000"/>
                 </a:solidFill>
                 <a:latin typeface="Calibri" pitchFamily="34" charset="0"/>
                 <a:ea typeface="Calibri" pitchFamily="34" charset="-122"/>
@@ -8103,7 +7740,11 @@
               </a:rPr>
               <a:t>26.2% for &lt;$3K</a:t>
             </a:r>
-            <a:endParaRPr lang="en-US" sz="1400" dirty="0"/>
+            <a:endParaRPr lang="en-US" sz="1400" dirty="0">
+              <a:solidFill>
+                <a:srgbClr val="C00000"/>
+              </a:solidFill>
+            </a:endParaRPr>
           </a:p>
         </p:txBody>
       </p:sp>
@@ -8128,7 +7769,7 @@
           <a:bodyPr wrap="square" lIns="0" tIns="0" rIns="0" bIns="0" rtlCol="0" anchor="ctr"/>
           <a:lstStyle/>
           <a:p>
-            <a:pPr indent="0" marL="0">
+            <a:pPr marL="0" indent="0">
               <a:buNone/>
             </a:pPr>
             <a:r>
@@ -8154,8 +7795,8 @@
         </p:nvSpPr>
         <p:spPr>
           <a:xfrm>
-            <a:off x="640080" y="2514600"/>
-            <a:ext cx="7863840" cy="640080"/>
+            <a:off x="640080" y="2366069"/>
+            <a:ext cx="7863840" cy="937142"/>
           </a:xfrm>
           <a:prstGeom prst="rect">
             <a:avLst/>
@@ -8165,26 +7806,13 @@
           </a:solidFill>
           <a:ln/>
         </p:spPr>
-      </p:sp>
-      <p:sp>
-        <p:nvSpPr>
-          <p:cNvPr id="16" name="Shape 14"/>
-          <p:cNvSpPr/>
-          <p:nvPr/>
-        </p:nvSpPr>
-        <p:spPr>
-          <a:xfrm>
-            <a:off x="640080" y="2514600"/>
-            <a:ext cx="54864" cy="640080"/>
-          </a:xfrm>
-          <a:prstGeom prst="rect">
-            <a:avLst/>
-          </a:prstGeom>
-          <a:solidFill>
-            <a:srgbClr val="E76F51"/>
-          </a:solidFill>
-          <a:ln/>
-        </p:spPr>
+        <p:txBody>
+          <a:bodyPr/>
+          <a:lstStyle/>
+          <a:p>
+            <a:endParaRPr lang="en-US"/>
+          </a:p>
+        </p:txBody>
       </p:sp>
       <p:sp>
         <p:nvSpPr>
@@ -8207,14 +7835,11 @@
           <a:bodyPr wrap="square" lIns="0" tIns="0" rIns="0" bIns="0" rtlCol="0" anchor="ctr"/>
           <a:lstStyle/>
           <a:p>
-            <a:pPr indent="0" marL="0">
+            <a:pPr marL="0" indent="0">
               <a:buNone/>
             </a:pPr>
             <a:r>
               <a:rPr lang="en-US" sz="2000" b="1" dirty="0">
-                <a:solidFill>
-                  <a:srgbClr val="E76F51"/>
-                </a:solidFill>
                 <a:latin typeface="Georgia" pitchFamily="34" charset="0"/>
                 <a:ea typeface="Georgia" pitchFamily="34" charset="-122"/>
                 <a:cs typeface="Georgia" pitchFamily="34" charset="-120"/>
@@ -8246,7 +7871,7 @@
           <a:bodyPr wrap="square" lIns="0" tIns="0" rIns="0" bIns="0" rtlCol="0" anchor="ctr"/>
           <a:lstStyle/>
           <a:p>
-            <a:pPr indent="0" marL="0">
+            <a:pPr marL="0" indent="0">
               <a:buNone/>
             </a:pPr>
             <a:r>
@@ -8285,13 +7910,13 @@
           <a:bodyPr wrap="square" lIns="0" tIns="0" rIns="0" bIns="0" rtlCol="0" anchor="ctr"/>
           <a:lstStyle/>
           <a:p>
-            <a:pPr indent="0" marL="0">
+            <a:pPr marL="0" indent="0">
               <a:buNone/>
             </a:pPr>
             <a:r>
               <a:rPr lang="en-US" sz="1400" b="1" dirty="0">
                 <a:solidFill>
-                  <a:srgbClr val="E76F51"/>
+                  <a:srgbClr val="C00000"/>
                 </a:solidFill>
                 <a:latin typeface="Calibri" pitchFamily="34" charset="0"/>
                 <a:ea typeface="Calibri" pitchFamily="34" charset="-122"/>
@@ -8299,7 +7924,11 @@
               </a:rPr>
               <a:t>27.7% in 0-2 yrs</a:t>
             </a:r>
-            <a:endParaRPr lang="en-US" sz="1400" dirty="0"/>
+            <a:endParaRPr lang="en-US" sz="1400" dirty="0">
+              <a:solidFill>
+                <a:srgbClr val="C00000"/>
+              </a:solidFill>
+            </a:endParaRPr>
           </a:p>
         </p:txBody>
       </p:sp>
@@ -8324,7 +7953,7 @@
           <a:bodyPr wrap="square" lIns="0" tIns="0" rIns="0" bIns="0" rtlCol="0" anchor="ctr"/>
           <a:lstStyle/>
           <a:p>
-            <a:pPr indent="0" marL="0">
+            <a:pPr marL="0" indent="0">
               <a:buNone/>
             </a:pPr>
             <a:r>
@@ -8350,8 +7979,8 @@
         </p:nvSpPr>
         <p:spPr>
           <a:xfrm>
-            <a:off x="640080" y="3291840"/>
-            <a:ext cx="7863840" cy="640080"/>
+            <a:off x="640080" y="3143309"/>
+            <a:ext cx="7863840" cy="937142"/>
           </a:xfrm>
           <a:prstGeom prst="rect">
             <a:avLst/>
@@ -8361,26 +7990,13 @@
           </a:solidFill>
           <a:ln/>
         </p:spPr>
-      </p:sp>
-      <p:sp>
-        <p:nvSpPr>
-          <p:cNvPr id="22" name="Shape 20"/>
-          <p:cNvSpPr/>
-          <p:nvPr/>
-        </p:nvSpPr>
-        <p:spPr>
-          <a:xfrm>
-            <a:off x="640080" y="3291840"/>
-            <a:ext cx="54864" cy="640080"/>
-          </a:xfrm>
-          <a:prstGeom prst="rect">
-            <a:avLst/>
-          </a:prstGeom>
-          <a:solidFill>
-            <a:srgbClr val="E9C46A"/>
-          </a:solidFill>
-          <a:ln/>
-        </p:spPr>
+        <p:txBody>
+          <a:bodyPr/>
+          <a:lstStyle/>
+          <a:p>
+            <a:endParaRPr lang="en-US"/>
+          </a:p>
+        </p:txBody>
       </p:sp>
       <p:sp>
         <p:nvSpPr>
@@ -8403,14 +8019,11 @@
           <a:bodyPr wrap="square" lIns="0" tIns="0" rIns="0" bIns="0" rtlCol="0" anchor="ctr"/>
           <a:lstStyle/>
           <a:p>
-            <a:pPr indent="0" marL="0">
+            <a:pPr marL="0" indent="0">
               <a:buNone/>
             </a:pPr>
             <a:r>
               <a:rPr lang="en-US" sz="2000" b="1" dirty="0">
-                <a:solidFill>
-                  <a:srgbClr val="E9C46A"/>
-                </a:solidFill>
                 <a:latin typeface="Georgia" pitchFamily="34" charset="0"/>
                 <a:ea typeface="Georgia" pitchFamily="34" charset="-122"/>
                 <a:cs typeface="Georgia" pitchFamily="34" charset="-120"/>
@@ -8442,7 +8055,7 @@
           <a:bodyPr wrap="square" lIns="0" tIns="0" rIns="0" bIns="0" rtlCol="0" anchor="ctr"/>
           <a:lstStyle/>
           <a:p>
-            <a:pPr indent="0" marL="0">
+            <a:pPr marL="0" indent="0">
               <a:buNone/>
             </a:pPr>
             <a:r>
@@ -8481,13 +8094,13 @@
           <a:bodyPr wrap="square" lIns="0" tIns="0" rIns="0" bIns="0" rtlCol="0" anchor="ctr"/>
           <a:lstStyle/>
           <a:p>
-            <a:pPr indent="0" marL="0">
+            <a:pPr marL="0" indent="0">
               <a:buNone/>
             </a:pPr>
             <a:r>
               <a:rPr lang="en-US" sz="1400" b="1" dirty="0">
                 <a:solidFill>
-                  <a:srgbClr val="E9C46A"/>
+                  <a:srgbClr val="C00000"/>
                 </a:solidFill>
                 <a:latin typeface="Calibri" pitchFamily="34" charset="0"/>
                 <a:ea typeface="Calibri" pitchFamily="34" charset="-122"/>
@@ -8495,7 +8108,11 @@
               </a:rPr>
               <a:t>26.7% for lowest</a:t>
             </a:r>
-            <a:endParaRPr lang="en-US" sz="1400" dirty="0"/>
+            <a:endParaRPr lang="en-US" sz="1400" dirty="0">
+              <a:solidFill>
+                <a:srgbClr val="C00000"/>
+              </a:solidFill>
+            </a:endParaRPr>
           </a:p>
         </p:txBody>
       </p:sp>
@@ -8520,7 +8137,7 @@
           <a:bodyPr wrap="square" lIns="0" tIns="0" rIns="0" bIns="0" rtlCol="0" anchor="ctr"/>
           <a:lstStyle/>
           <a:p>
-            <a:pPr indent="0" marL="0">
+            <a:pPr marL="0" indent="0">
               <a:buNone/>
             </a:pPr>
             <a:r>
@@ -8557,26 +8174,13 @@
           </a:solidFill>
           <a:ln/>
         </p:spPr>
-      </p:sp>
-      <p:sp>
-        <p:nvSpPr>
-          <p:cNvPr id="28" name="Shape 26"/>
-          <p:cNvSpPr/>
-          <p:nvPr/>
-        </p:nvSpPr>
-        <p:spPr>
-          <a:xfrm>
-            <a:off x="640080" y="4069080"/>
-            <a:ext cx="54864" cy="640080"/>
-          </a:xfrm>
-          <a:prstGeom prst="rect">
-            <a:avLst/>
-          </a:prstGeom>
-          <a:solidFill>
-            <a:srgbClr val="E9C46A"/>
-          </a:solidFill>
-          <a:ln/>
-        </p:spPr>
+        <p:txBody>
+          <a:bodyPr/>
+          <a:lstStyle/>
+          <a:p>
+            <a:endParaRPr lang="en-US"/>
+          </a:p>
+        </p:txBody>
       </p:sp>
       <p:sp>
         <p:nvSpPr>
@@ -8599,14 +8203,11 @@
           <a:bodyPr wrap="square" lIns="0" tIns="0" rIns="0" bIns="0" rtlCol="0" anchor="ctr"/>
           <a:lstStyle/>
           <a:p>
-            <a:pPr indent="0" marL="0">
+            <a:pPr marL="0" indent="0">
               <a:buNone/>
             </a:pPr>
             <a:r>
               <a:rPr lang="en-US" sz="2000" b="1" dirty="0">
-                <a:solidFill>
-                  <a:srgbClr val="E9C46A"/>
-                </a:solidFill>
                 <a:latin typeface="Georgia" pitchFamily="34" charset="0"/>
                 <a:ea typeface="Georgia" pitchFamily="34" charset="-122"/>
                 <a:cs typeface="Georgia" pitchFamily="34" charset="-120"/>
@@ -8638,7 +8239,7 @@
           <a:bodyPr wrap="square" lIns="0" tIns="0" rIns="0" bIns="0" rtlCol="0" anchor="ctr"/>
           <a:lstStyle/>
           <a:p>
-            <a:pPr indent="0" marL="0">
+            <a:pPr marL="0" indent="0">
               <a:buNone/>
             </a:pPr>
             <a:r>
@@ -8677,13 +8278,13 @@
           <a:bodyPr wrap="square" lIns="0" tIns="0" rIns="0" bIns="0" rtlCol="0" anchor="ctr"/>
           <a:lstStyle/>
           <a:p>
-            <a:pPr indent="0" marL="0">
+            <a:pPr marL="0" indent="0">
               <a:buNone/>
             </a:pPr>
             <a:r>
               <a:rPr lang="en-US" sz="1400" b="1" dirty="0">
                 <a:solidFill>
-                  <a:srgbClr val="E9C46A"/>
+                  <a:srgbClr val="C00000"/>
                 </a:solidFill>
                 <a:latin typeface="Calibri" pitchFamily="34" charset="0"/>
                 <a:ea typeface="Calibri" pitchFamily="34" charset="-122"/>
@@ -8691,7 +8292,11 @@
               </a:rPr>
               <a:t>Avg age 31</a:t>
             </a:r>
-            <a:endParaRPr lang="en-US" sz="1400" dirty="0"/>
+            <a:endParaRPr lang="en-US" sz="1400" dirty="0">
+              <a:solidFill>
+                <a:srgbClr val="C00000"/>
+              </a:solidFill>
+            </a:endParaRPr>
           </a:p>
         </p:txBody>
       </p:sp>
@@ -8716,7 +8321,7 @@
           <a:bodyPr wrap="square" lIns="0" tIns="0" rIns="0" bIns="0" rtlCol="0" anchor="ctr"/>
           <a:lstStyle/>
           <a:p>
-            <a:pPr indent="0" marL="0">
+            <a:pPr marL="0" indent="0">
               <a:buNone/>
             </a:pPr>
             <a:r>
@@ -9035,4 +8640,319 @@
     </a:ext>
   </a:extLst>
 </a:theme>
+</file>
+
+<file path=ppt/theme/theme2.xml><?xml version="1.0" encoding="utf-8"?>
+<a:theme xmlns:a="http://schemas.openxmlformats.org/drawingml/2006/main" name="Office Theme">
+  <a:themeElements>
+    <a:clrScheme name="Office">
+      <a:dk1>
+        <a:sysClr val="windowText" lastClr="000000"/>
+      </a:dk1>
+      <a:lt1>
+        <a:sysClr val="window" lastClr="FFFFFF"/>
+      </a:lt1>
+      <a:dk2>
+        <a:srgbClr val="0E2841"/>
+      </a:dk2>
+      <a:lt2>
+        <a:srgbClr val="E8E8E8"/>
+      </a:lt2>
+      <a:accent1>
+        <a:srgbClr val="156082"/>
+      </a:accent1>
+      <a:accent2>
+        <a:srgbClr val="E97132"/>
+      </a:accent2>
+      <a:accent3>
+        <a:srgbClr val="196B24"/>
+      </a:accent3>
+      <a:accent4>
+        <a:srgbClr val="0F9ED5"/>
+      </a:accent4>
+      <a:accent5>
+        <a:srgbClr val="A02B93"/>
+      </a:accent5>
+      <a:accent6>
+        <a:srgbClr val="4EA72E"/>
+      </a:accent6>
+      <a:hlink>
+        <a:srgbClr val="467886"/>
+      </a:hlink>
+      <a:folHlink>
+        <a:srgbClr val="96607D"/>
+      </a:folHlink>
+    </a:clrScheme>
+    <a:fontScheme name="Office">
+      <a:majorFont>
+        <a:latin typeface="Aptos Display" panose="02110004020202020204"/>
+        <a:ea typeface=""/>
+        <a:cs typeface=""/>
+        <a:font script="Jpan" typeface="游ゴシック Light"/>
+        <a:font script="Hang" typeface="맑은 고딕"/>
+        <a:font script="Hans" typeface="等线 Light"/>
+        <a:font script="Hant" typeface="新細明體"/>
+        <a:font script="Arab" typeface="Times New Roman"/>
+        <a:font script="Hebr" typeface="Times New Roman"/>
+        <a:font script="Thai" typeface="Angsana New"/>
+        <a:font script="Ethi" typeface="Nyala"/>
+        <a:font script="Beng" typeface="Vrinda"/>
+        <a:font script="Gujr" typeface="Shruti"/>
+        <a:font script="Khmr" typeface="MoolBoran"/>
+        <a:font script="Knda" typeface="Tunga"/>
+        <a:font script="Guru" typeface="Raavi"/>
+        <a:font script="Cans" typeface="Euphemia"/>
+        <a:font script="Cher" typeface="Plantagenet Cherokee"/>
+        <a:font script="Yiii" typeface="Microsoft Yi Baiti"/>
+        <a:font script="Tibt" typeface="Microsoft Himalaya"/>
+        <a:font script="Thaa" typeface="MV Boli"/>
+        <a:font script="Deva" typeface="Mangal"/>
+        <a:font script="Telu" typeface="Gautami"/>
+        <a:font script="Taml" typeface="Latha"/>
+        <a:font script="Syrc" typeface="Estrangelo Edessa"/>
+        <a:font script="Orya" typeface="Kalinga"/>
+        <a:font script="Mlym" typeface="Kartika"/>
+        <a:font script="Laoo" typeface="DokChampa"/>
+        <a:font script="Sinh" typeface="Iskoola Pota"/>
+        <a:font script="Mong" typeface="Mongolian Baiti"/>
+        <a:font script="Viet" typeface="Times New Roman"/>
+        <a:font script="Uigh" typeface="Microsoft Uighur"/>
+        <a:font script="Geor" typeface="Sylfaen"/>
+        <a:font script="Armn" typeface="Arial"/>
+        <a:font script="Bugi" typeface="Leelawadee UI"/>
+        <a:font script="Bopo" typeface="Microsoft JhengHei"/>
+        <a:font script="Java" typeface="Javanese Text"/>
+        <a:font script="Lisu" typeface="Segoe UI"/>
+        <a:font script="Mymr" typeface="Myanmar Text"/>
+        <a:font script="Nkoo" typeface="Ebrima"/>
+        <a:font script="Olck" typeface="Nirmala UI"/>
+        <a:font script="Osma" typeface="Ebrima"/>
+        <a:font script="Phag" typeface="Phagspa"/>
+        <a:font script="Syrn" typeface="Estrangelo Edessa"/>
+        <a:font script="Syrj" typeface="Estrangelo Edessa"/>
+        <a:font script="Syre" typeface="Estrangelo Edessa"/>
+        <a:font script="Sora" typeface="Nirmala UI"/>
+        <a:font script="Tale" typeface="Microsoft Tai Le"/>
+        <a:font script="Talu" typeface="Microsoft New Tai Lue"/>
+        <a:font script="Tfng" typeface="Ebrima"/>
+      </a:majorFont>
+      <a:minorFont>
+        <a:latin typeface="Aptos" panose="02110004020202020204"/>
+        <a:ea typeface=""/>
+        <a:cs typeface=""/>
+        <a:font script="Jpan" typeface="游ゴシック"/>
+        <a:font script="Hang" typeface="맑은 고딕"/>
+        <a:font script="Hans" typeface="等线"/>
+        <a:font script="Hant" typeface="新細明體"/>
+        <a:font script="Arab" typeface="Arial"/>
+        <a:font script="Hebr" typeface="Arial"/>
+        <a:font script="Thai" typeface="Cordia New"/>
+        <a:font script="Ethi" typeface="Nyala"/>
+        <a:font script="Beng" typeface="Vrinda"/>
+        <a:font script="Gujr" typeface="Shruti"/>
+        <a:font script="Khmr" typeface="DaunPenh"/>
+        <a:font script="Knda" typeface="Tunga"/>
+        <a:font script="Guru" typeface="Raavi"/>
+        <a:font script="Cans" typeface="Euphemia"/>
+        <a:font script="Cher" typeface="Plantagenet Cherokee"/>
+        <a:font script="Yiii" typeface="Microsoft Yi Baiti"/>
+        <a:font script="Tibt" typeface="Microsoft Himalaya"/>
+        <a:font script="Thaa" typeface="MV Boli"/>
+        <a:font script="Deva" typeface="Mangal"/>
+        <a:font script="Telu" typeface="Gautami"/>
+        <a:font script="Taml" typeface="Latha"/>
+        <a:font script="Syrc" typeface="Estrangelo Edessa"/>
+        <a:font script="Orya" typeface="Kalinga"/>
+        <a:font script="Mlym" typeface="Kartika"/>
+        <a:font script="Laoo" typeface="DokChampa"/>
+        <a:font script="Sinh" typeface="Iskoola Pota"/>
+        <a:font script="Mong" typeface="Mongolian Baiti"/>
+        <a:font script="Viet" typeface="Arial"/>
+        <a:font script="Uigh" typeface="Microsoft Uighur"/>
+        <a:font script="Geor" typeface="Sylfaen"/>
+        <a:font script="Armn" typeface="Arial"/>
+        <a:font script="Bugi" typeface="Leelawadee UI"/>
+        <a:font script="Bopo" typeface="Microsoft JhengHei"/>
+        <a:font script="Java" typeface="Javanese Text"/>
+        <a:font script="Lisu" typeface="Segoe UI"/>
+        <a:font script="Mymr" typeface="Myanmar Text"/>
+        <a:font script="Nkoo" typeface="Ebrima"/>
+        <a:font script="Olck" typeface="Nirmala UI"/>
+        <a:font script="Osma" typeface="Ebrima"/>
+        <a:font script="Phag" typeface="Phagspa"/>
+        <a:font script="Syrn" typeface="Estrangelo Edessa"/>
+        <a:font script="Syrj" typeface="Estrangelo Edessa"/>
+        <a:font script="Syre" typeface="Estrangelo Edessa"/>
+        <a:font script="Sora" typeface="Nirmala UI"/>
+        <a:font script="Tale" typeface="Microsoft Tai Le"/>
+        <a:font script="Talu" typeface="Microsoft New Tai Lue"/>
+        <a:font script="Tfng" typeface="Ebrima"/>
+      </a:minorFont>
+    </a:fontScheme>
+    <a:fmtScheme name="Office">
+      <a:fillStyleLst>
+        <a:solidFill>
+          <a:schemeClr val="phClr"/>
+        </a:solidFill>
+        <a:gradFill rotWithShape="1">
+          <a:gsLst>
+            <a:gs pos="0">
+              <a:schemeClr val="phClr">
+                <a:lumMod val="110000"/>
+                <a:satMod val="105000"/>
+                <a:tint val="67000"/>
+              </a:schemeClr>
+            </a:gs>
+            <a:gs pos="50000">
+              <a:schemeClr val="phClr">
+                <a:lumMod val="105000"/>
+                <a:satMod val="103000"/>
+                <a:tint val="73000"/>
+              </a:schemeClr>
+            </a:gs>
+            <a:gs pos="100000">
+              <a:schemeClr val="phClr">
+                <a:lumMod val="105000"/>
+                <a:satMod val="109000"/>
+                <a:tint val="81000"/>
+              </a:schemeClr>
+            </a:gs>
+          </a:gsLst>
+          <a:lin ang="5400000" scaled="0"/>
+        </a:gradFill>
+        <a:gradFill rotWithShape="1">
+          <a:gsLst>
+            <a:gs pos="0">
+              <a:schemeClr val="phClr">
+                <a:satMod val="103000"/>
+                <a:lumMod val="102000"/>
+                <a:tint val="94000"/>
+              </a:schemeClr>
+            </a:gs>
+            <a:gs pos="50000">
+              <a:schemeClr val="phClr">
+                <a:satMod val="110000"/>
+                <a:lumMod val="100000"/>
+                <a:shade val="100000"/>
+              </a:schemeClr>
+            </a:gs>
+            <a:gs pos="100000">
+              <a:schemeClr val="phClr">
+                <a:lumMod val="99000"/>
+                <a:satMod val="120000"/>
+                <a:shade val="78000"/>
+              </a:schemeClr>
+            </a:gs>
+          </a:gsLst>
+          <a:lin ang="5400000" scaled="0"/>
+        </a:gradFill>
+      </a:fillStyleLst>
+      <a:lnStyleLst>
+        <a:ln w="12700" cap="flat" cmpd="sng" algn="ctr">
+          <a:solidFill>
+            <a:schemeClr val="phClr"/>
+          </a:solidFill>
+          <a:prstDash val="solid"/>
+          <a:miter lim="800000"/>
+        </a:ln>
+        <a:ln w="19050" cap="flat" cmpd="sng" algn="ctr">
+          <a:solidFill>
+            <a:schemeClr val="phClr"/>
+          </a:solidFill>
+          <a:prstDash val="solid"/>
+          <a:miter lim="800000"/>
+        </a:ln>
+        <a:ln w="25400" cap="flat" cmpd="sng" algn="ctr">
+          <a:solidFill>
+            <a:schemeClr val="phClr"/>
+          </a:solidFill>
+          <a:prstDash val="solid"/>
+          <a:miter lim="800000"/>
+        </a:ln>
+      </a:lnStyleLst>
+      <a:effectStyleLst>
+        <a:effectStyle>
+          <a:effectLst/>
+        </a:effectStyle>
+        <a:effectStyle>
+          <a:effectLst/>
+        </a:effectStyle>
+        <a:effectStyle>
+          <a:effectLst>
+            <a:outerShdw blurRad="57150" dist="19050" dir="5400000" algn="ctr" rotWithShape="0">
+              <a:srgbClr val="000000">
+                <a:alpha val="63000"/>
+              </a:srgbClr>
+            </a:outerShdw>
+          </a:effectLst>
+        </a:effectStyle>
+      </a:effectStyleLst>
+      <a:bgFillStyleLst>
+        <a:solidFill>
+          <a:schemeClr val="phClr"/>
+        </a:solidFill>
+        <a:solidFill>
+          <a:schemeClr val="phClr">
+            <a:tint val="95000"/>
+            <a:satMod val="170000"/>
+          </a:schemeClr>
+        </a:solidFill>
+        <a:gradFill rotWithShape="1">
+          <a:gsLst>
+            <a:gs pos="0">
+              <a:schemeClr val="phClr">
+                <a:tint val="93000"/>
+                <a:satMod val="150000"/>
+                <a:shade val="98000"/>
+                <a:lumMod val="102000"/>
+              </a:schemeClr>
+            </a:gs>
+            <a:gs pos="50000">
+              <a:schemeClr val="phClr">
+                <a:tint val="98000"/>
+                <a:satMod val="130000"/>
+                <a:shade val="90000"/>
+                <a:lumMod val="103000"/>
+              </a:schemeClr>
+            </a:gs>
+            <a:gs pos="100000">
+              <a:schemeClr val="phClr">
+                <a:shade val="63000"/>
+                <a:satMod val="120000"/>
+              </a:schemeClr>
+            </a:gs>
+          </a:gsLst>
+          <a:lin ang="5400000" scaled="0"/>
+        </a:gradFill>
+      </a:bgFillStyleLst>
+    </a:fmtScheme>
+  </a:themeElements>
+  <a:objectDefaults>
+    <a:lnDef>
+      <a:spPr/>
+      <a:bodyPr/>
+      <a:lstStyle/>
+      <a:style>
+        <a:lnRef idx="2">
+          <a:schemeClr val="accent1"/>
+        </a:lnRef>
+        <a:fillRef idx="0">
+          <a:schemeClr val="accent1"/>
+        </a:fillRef>
+        <a:effectRef idx="1">
+          <a:schemeClr val="accent1"/>
+        </a:effectRef>
+        <a:fontRef idx="minor">
+          <a:schemeClr val="tx1"/>
+        </a:fontRef>
+      </a:style>
+    </a:lnDef>
+  </a:objectDefaults>
+  <a:extraClrSchemeLst/>
+  <a:extLst>
+    <a:ext uri="{05A4C25C-085E-4340-85A3-A5531E510DB2}">
+      <thm15:themeFamily xmlns:thm15="http://schemas.microsoft.com/office/thememl/2012/main" name="Office Theme" id="{2E142A2C-CD16-42D6-873A-C26D2A0506FA}" vid="{1BDDFF52-6CD6-40A5-AB3C-68EB2F1E4D0A}"/>
+    </a:ext>
+  </a:extLst>
+</a:theme>
 </file>